--- a/docs/SLIDE.pptx
+++ b/docs/SLIDE.pptx
@@ -633,9 +633,20 @@
           <a:p>
             <a:r>
               <a:rPr lang="en-US"/>
-              <a:t>30 giây. Nói ngay câu chốt: "Câu hỏi của đồ án này là — hệ thống dựa vào đâu để tin một thông tin."</a:t>
-            </a:r>
-            <a:endParaRPr lang="en-US" smtClean="0"/>
+              <a:t>15 GIÂY. Tên đề tài + câu chốt: "Câu hỏi của đồ án này là — hệ thống dựa vào đâu để tin một thông tin."</a:t>
+            </a:r>
+          </a:p>
+          <a:p>
+            <a:r>
+              <a:rPr lang="en-US"/>
+              <a:t/>
+            </a:r>
+          </a:p>
+          <a:p>
+            <a:r>
+              <a:rPr lang="en-US"/>
+              <a:t>Đừng đọc tên từng thành viên — thầy đã có trong báo cáo.</a:t>
+            </a:r>
           </a:p>
         </p:txBody>
       </p:sp>
@@ -846,9 +857,50 @@
           <a:p>
             <a:r>
               <a:rPr lang="en-US"/>
-              <a:t>60 giây. Đây là slide ghi điểm: có số thật, không nói chung chung.</a:t>
-            </a:r>
-            <a:endParaRPr lang="en-US" smtClean="0"/>
+              <a:t>50 GIÂY. SLIDE GHI ĐIỂM.</a:t>
+            </a:r>
+          </a:p>
+          <a:p>
+            <a:r>
+              <a:rPr lang="en-US"/>
+              <a:t/>
+            </a:r>
+          </a:p>
+          <a:p>
+            <a:r>
+              <a:rPr lang="en-US"/>
+              <a:t>Chỉ đọc ba con số:</a:t>
+            </a:r>
+          </a:p>
+          <a:p>
+            <a:r>
+              <a:rPr lang="en-US"/>
+              <a:t>  1 sửa / 30 giây</a:t>
+            </a:r>
+          </a:p>
+          <a:p>
+            <a:r>
+              <a:rPr lang="en-US"/>
+              <a:t>  PL1 chặn oan 0/15</a:t>
+            </a:r>
+          </a:p>
+          <a:p>
+            <a:r>
+              <a:rPr lang="en-US"/>
+              <a:t>  RTO 5–6 giây</a:t>
+            </a:r>
+          </a:p>
+          <a:p>
+            <a:r>
+              <a:rPr lang="en-US"/>
+              <a:t/>
+            </a:r>
+          </a:p>
+          <a:p>
+            <a:r>
+              <a:rPr lang="en-US"/>
+              <a:t>DỄ VỠ NGÂN SÁCH: đừng kể quá trình đo, chỉ đọc kết quả.</a:t>
+            </a:r>
           </a:p>
         </p:txBody>
       </p:sp>
@@ -1059,9 +1111,38 @@
           <a:p>
             <a:r>
               <a:rPr lang="en-US"/>
-              <a:t>45 giây. Biết mình chưa làm gì — nói thẳng, đừng né.</a:t>
-            </a:r>
-            <a:endParaRPr lang="en-US" smtClean="0"/>
+              <a:t>25 GIÂY. Đọc nhanh đúng 2 dòng:</a:t>
+            </a:r>
+          </a:p>
+          <a:p>
+            <a:r>
+              <a:rPr lang="en-US"/>
+              <a:t>  TOTP không chống AiTM → Passkey/WebAuthn</a:t>
+            </a:r>
+          </a:p>
+          <a:p>
+            <a:r>
+              <a:rPr lang="en-US"/>
+              <a:t>  Superuser DB vẫn tính lại được hash-chain → SIEM + WORM</a:t>
+            </a:r>
+          </a:p>
+          <a:p>
+            <a:r>
+              <a:rPr lang="en-US"/>
+              <a:t/>
+            </a:r>
+          </a:p>
+          <a:p>
+            <a:r>
+              <a:rPr lang="en-US"/>
+              <a:t>DỄ VỠ NGÂN SÁCH: đừng xin lỗi dài dòng.</a:t>
+            </a:r>
+          </a:p>
+          <a:p>
+            <a:r>
+              <a:rPr lang="en-US"/>
+              <a:t>Nếu phần nói đã quá 6:30 thì cắt slide này còn 15 giây.</a:t>
+            </a:r>
           </a:p>
         </p:txBody>
       </p:sp>
@@ -1272,9 +1353,20 @@
           <a:p>
             <a:r>
               <a:rPr lang="en-US"/>
-              <a:t>Đọc chậm bốn câu, dừng lại sau câu 3. Rồi mời hỏi đáp.</a:t>
-            </a:r>
-            <a:endParaRPr lang="en-US" smtClean="0"/>
+              <a:t>30 GIÂY. Bốn câu, đọc chậm, dừng lại sau câu 3. Rồi mời hỏi đáp.</a:t>
+            </a:r>
+          </a:p>
+          <a:p>
+            <a:r>
+              <a:rPr lang="en-US"/>
+              <a:t/>
+            </a:r>
+          </a:p>
+          <a:p>
+            <a:r>
+              <a:rPr lang="en-US"/>
+              <a:t>TỔNG PHẦN NÓI: 5 phút 55 — dư 65 giây so với khung 7 phút.</a:t>
+            </a:r>
           </a:p>
         </p:txBody>
       </p:sp>
@@ -1485,9 +1577,32 @@
           <a:p>
             <a:r>
               <a:rPr lang="en-US"/>
-              <a:t>45 giây. Đây là cái móc của cả bài: đừng vội nói về kỹ thuật.</a:t>
-            </a:r>
-            <a:endParaRPr lang="en-US" smtClean="0"/>
+              <a:t>45 GIÂY. Điểm là tài sản toàn vẹn → cổng vào duy nhất là tài khoản GV → dừng ở câu hỏi lớn.</a:t>
+            </a:r>
+          </a:p>
+          <a:p>
+            <a:r>
+              <a:rPr lang="en-US"/>
+              <a:t/>
+            </a:r>
+          </a:p>
+          <a:p>
+            <a:r>
+              <a:rPr lang="en-US"/>
+              <a:t>THÊM MỘT CÂU (vì slide 3 đã ẩn): "tác nhân nguy hiểm nhất là insider có quyền DB — phần lớn đồ án bỏ qua."</a:t>
+            </a:r>
+          </a:p>
+          <a:p>
+            <a:r>
+              <a:rPr lang="en-US"/>
+              <a:t/>
+            </a:r>
+          </a:p>
+          <a:p>
+            <a:r>
+              <a:rPr lang="en-US"/>
+              <a:t>Đây là cái móc của cả bài: đừng vội nói về kỹ thuật.</a:t>
+            </a:r>
           </a:p>
         </p:txBody>
       </p:sp>
@@ -1698,9 +1813,26 @@
           <a:p>
             <a:r>
               <a:rPr lang="en-US"/>
-              <a:t>45 giây. Nhấn vào dòng insider: hầu hết đồ án bỏ qua tác nhân này.</a:t>
-            </a:r>
-            <a:endParaRPr lang="en-US" smtClean="0"/>
+              <a:t>ẨN SLIDE NÀY khi trình bày.</a:t>
+            </a:r>
+          </a:p>
+          <a:p>
+            <a:r>
+              <a:rPr lang="en-US"/>
+              <a:t>PowerPoint: chuột phải vào slide ở khung bên trái → Hide Slide.</a:t>
+            </a:r>
+          </a:p>
+          <a:p>
+            <a:r>
+              <a:rPr lang="en-US"/>
+              <a:t/>
+            </a:r>
+          </a:p>
+          <a:p>
+            <a:r>
+              <a:rPr lang="en-US"/>
+              <a:t>Chỉ mở khi thầy hỏi "tài sản nào quan trọng nhất". Nội dung đã gộp một câu vào slide 2.</a:t>
+            </a:r>
           </a:p>
         </p:txBody>
       </p:sp>
@@ -1911,9 +2043,32 @@
           <a:p>
             <a:r>
               <a:rPr lang="en-US"/>
-              <a:t>60 giây. Nói hệ quả của D4: có RCE trong app cũng không exfiltrate được dữ liệu.</a:t>
-            </a:r>
-            <a:endParaRPr lang="en-US" smtClean="0"/>
+              <a:t>50 GIÂY. 3 zone · chỉ WAF có port.</a:t>
+            </a:r>
+          </a:p>
+          <a:p>
+            <a:r>
+              <a:rPr lang="en-US"/>
+              <a:t/>
+            </a:r>
+          </a:p>
+          <a:p>
+            <a:r>
+              <a:rPr lang="en-US"/>
+              <a:t>NHẤN D4: app không gọi được ra Internet, nên có RCE trong app cũng không exfiltrate được dữ liệu.</a:t>
+            </a:r>
+          </a:p>
+          <a:p>
+            <a:r>
+              <a:rPr lang="en-US"/>
+              <a:t/>
+            </a:r>
+          </a:p>
+          <a:p>
+            <a:r>
+              <a:rPr lang="en-US"/>
+              <a:t>Đừng đọc hết 5 luồng bị chặn.</a:t>
+            </a:r>
           </a:p>
         </p:txBody>
       </p:sp>
@@ -2124,9 +2279,44 @@
           <a:p>
             <a:r>
               <a:rPr lang="en-US"/>
-              <a:t>75 giây. Dòng cuối là điểm nhấn: không tin cả DB của mình.</a:t>
-            </a:r>
-            <a:endParaRPr lang="en-US" smtClean="0"/>
+              <a:t>70 GIÂY — slide dài nhất, bấm giờ riêng khi tổng duyệt.</a:t>
+            </a:r>
+          </a:p>
+          <a:p>
+            <a:r>
+              <a:rPr lang="en-US"/>
+              <a:t/>
+            </a:r>
+          </a:p>
+          <a:p>
+            <a:r>
+              <a:rPr lang="en-US"/>
+              <a:t>Đọc 5 dòng bảng, dừng lại ở dòng cuối (không tin cả DB của mình).</a:t>
+            </a:r>
+          </a:p>
+          <a:p>
+            <a:r>
+              <a:rPr lang="en-US"/>
+              <a:t/>
+            </a:r>
+          </a:p>
+          <a:p>
+            <a:r>
+              <a:rPr lang="en-US"/>
+              <a:t>THÊM MỘT CÂU (vì slide 6 đã ẩn): "cụ thể hoá thành 12 lớp kiểm chứng, một request sửa điểm phải qua hết."</a:t>
+            </a:r>
+          </a:p>
+          <a:p>
+            <a:r>
+              <a:rPr lang="en-US"/>
+              <a:t/>
+            </a:r>
+          </a:p>
+          <a:p>
+            <a:r>
+              <a:rPr lang="en-US"/>
+              <a:t>DỄ VỠ NGÂN SÁCH: đừng giải thích từng dòng.</a:t>
+            </a:r>
           </a:p>
         </p:txBody>
       </p:sp>
@@ -2337,9 +2527,26 @@
           <a:p>
             <a:r>
               <a:rPr lang="en-US"/>
-              <a:t>60 giây. Chỉ đọc 4 lớp tô đậm (5 Fingerprint, 8 Step-up OTP, 10 Ownership, 12 Audit hash-chain), đừng đọc hết 12.</a:t>
-            </a:r>
-            <a:endParaRPr lang="en-US" smtClean="0"/>
+              <a:t>ẨN SLIDE NÀY khi trình bày.</a:t>
+            </a:r>
+          </a:p>
+          <a:p>
+            <a:r>
+              <a:rPr lang="en-US"/>
+              <a:t>PowerPoint: chuột phải vào slide ở khung bên trái → Hide Slide.</a:t>
+            </a:r>
+          </a:p>
+          <a:p>
+            <a:r>
+              <a:rPr lang="en-US"/>
+              <a:t/>
+            </a:r>
+          </a:p>
+          <a:p>
+            <a:r>
+              <a:rPr lang="en-US"/>
+              <a:t>Chỉ mở khi thầy hỏi "12 lớp là những lớp nào". Đã nói bằng một câu ở slide 5.</a:t>
+            </a:r>
           </a:p>
         </p:txBody>
       </p:sp>
@@ -2550,9 +2757,20 @@
           <a:p>
             <a:r>
               <a:rPr lang="en-US"/>
-              <a:t>45 giây. Dừng lại ở dòng R08: insider có quyền DB.</a:t>
-            </a:r>
-            <a:endParaRPr lang="en-US" smtClean="0"/>
+              <a:t>40 GIÂY. Lướt nhanh 4 dòng đầu.</a:t>
+            </a:r>
+          </a:p>
+          <a:p>
+            <a:r>
+              <a:rPr lang="en-US"/>
+              <a:t/>
+            </a:r>
+          </a:p>
+          <a:p>
+            <a:r>
+              <a:rPr lang="en-US"/>
+              <a:t>DỮNG Ở R08: insider sửa DB, audit_log append-only, hash-chain, TC22–TC24. Đây là dòng phân biệt đồ án này với đồ án khác.</a:t>
+            </a:r>
           </a:p>
         </p:txBody>
       </p:sp>
@@ -2763,9 +2981,62 @@
           <a:p>
             <a:r>
               <a:rPr lang="en-US"/>
-              <a:t>Theo kịch bản demo 9 phút 30. Nếu máy lỗi: phát video OBS dự phòng.</a:t>
-            </a:r>
-            <a:endParaRPr lang="en-US" smtClean="0"/>
+              <a:t>5 GIÂY. "Chuyển sang màn hình live."</a:t>
+            </a:r>
+          </a:p>
+          <a:p>
+            <a:r>
+              <a:rPr lang="en-US"/>
+              <a:t/>
+            </a:r>
+          </a:p>
+          <a:p>
+            <a:r>
+              <a:rPr lang="en-US"/>
+              <a:t>DEMO 4 PHÚT theo docs/KICH_BAN_7P.md:</a:t>
+            </a:r>
+          </a:p>
+          <a:p>
+            <a:r>
+              <a:rPr lang="en-US"/>
+              <a:t>  D1 0:00–0:25  phân vùng (2 lệnh)</a:t>
+            </a:r>
+          </a:p>
+          <a:p>
+            <a:r>
+              <a:rPr lang="en-US"/>
+              <a:t>  D2 0:25–1:10  sửa điểm hợp lệ + step-up OTP</a:t>
+            </a:r>
+          </a:p>
+          <a:p>
+            <a:r>
+              <a:rPr lang="en-US"/>
+              <a:t>  D3 1:10–2:20  KB2 đánh cắp cookie</a:t>
+            </a:r>
+          </a:p>
+          <a:p>
+            <a:r>
+              <a:rPr lang="en-US"/>
+              <a:t>  D4 2:20–3:45  KB6 insider sửa DB</a:t>
+            </a:r>
+          </a:p>
+          <a:p>
+            <a:r>
+              <a:rPr lang="en-US"/>
+              <a:t/>
+            </a:r>
+          </a:p>
+          <a:p>
+            <a:r>
+              <a:rPr lang="en-US"/>
+              <a:t>KB1 / KB3 / KB4 / KB5 để dành cho hỏi đáp.</a:t>
+            </a:r>
+          </a:p>
+          <a:p>
+            <a:r>
+              <a:rPr lang="en-US"/>
+              <a:t>NHỚT TRƯỚC KHI BẤM GIỜ: gv01 và admin đã đăng nhập sẵn, đã chạy docker compose restart app, lệnh dán sẵn trong file text.</a:t>
+            </a:r>
           </a:p>
         </p:txBody>
       </p:sp>
@@ -2976,9 +3247,20 @@
           <a:p>
             <a:r>
               <a:rPr lang="en-US"/>
-              <a:t>30 giây. Mỗi rủi ro trong ma trận đều trỏ tới ít nhất 1 test case. Bộ test bao phủ 6 kịch bản tấn công KB1–KB6.</a:t>
-            </a:r>
-            <a:endParaRPr lang="en-US" smtClean="0"/>
+              <a:t>25 GIÂY. 25/25 PASS · 6 luồng bình thường + 19 test tấn công · phủ KB1–KB6.</a:t>
+            </a:r>
+          </a:p>
+          <a:p>
+            <a:r>
+              <a:rPr lang="en-US"/>
+              <a:t/>
+            </a:r>
+          </a:p>
+          <a:p>
+            <a:r>
+              <a:rPr lang="en-US"/>
+              <a:t>Đừng đọc từng dòng trên màn hình — để thầy tự đọc.</a:t>
+            </a:r>
           </a:p>
         </p:txBody>
       </p:sp>
@@ -6339,7 +6621,7 @@
         <p:spPr>
           <a:xfrm rot="0">
             <a:off x="1047750" y="6229350"/>
-            <a:ext cx="10953750" cy="2091690"/>
+            <a:ext cx="10953750" cy="2091333"/>
           </a:xfrm>
           <a:prstGeom prst="rect">
             <a:avLst/>

--- a/docs/SLIDE.pptx
+++ b/docs/SLIDE.pptx
@@ -3035,7 +3035,7 @@
           <a:p>
             <a:r>
               <a:rPr lang="en-US"/>
-              <a:t>NHỚT TRƯỚC KHI BẤM GIỜ: gv01 và admin đã đăng nhập sẵn, đã chạy docker compose restart app, lệnh dán sẵn trong file text.</a:t>
+              <a:t>NHỚ TRƯỚC KHI BẤM GIỜ: gv01 và admin đã đăng nhập sẵn, đã chạy docker compose restart app, lệnh dán sẵn trong file text.</a:t>
             </a:r>
           </a:p>
         </p:txBody>
@@ -6276,7 +6276,7 @@
     <p:bg>
       <p:bgPr>
         <a:solidFill>
-          <a:srgbClr val="0F1C2E"/>
+          <a:srgbClr val="F7F9FC"/>
         </a:solidFill>
       </p:bgPr>
     </p:bg>
@@ -6410,7 +6410,7 @@
             <a:r>
               <a:rPr lang="en-US" sz="1350">
                 <a:solidFill>
-                  <a:srgbClr val="AAB6C6"/>
+                  <a:srgbClr val="8A98AA"/>
                 </a:solidFill>
                 <a:latin typeface="JetBrains Mono"/>
                 <a:ea typeface="JetBrains Mono"/>
@@ -6473,7 +6473,7 @@
             </a:custGeom>
             <a:solidFill>
               <a:srgbClr val="2E5C8A">
-                <a:alpha val="23922"/>
+                <a:alpha val="9804"/>
               </a:srgbClr>
             </a:solidFill>
             <a:ln cap="sq">
@@ -6540,7 +6540,7 @@
             <a:r>
               <a:rPr lang="en-US" sz="9600" b="true">
                 <a:solidFill>
-                  <a:srgbClr val="F4F7FB"/>
+                  <a:srgbClr val="1B2A3F"/>
                 </a:solidFill>
                 <a:latin typeface="IBM Plex Sans Bold"/>
                 <a:ea typeface="IBM Plex Sans Bold"/>
@@ -6621,7 +6621,7 @@
         <p:spPr>
           <a:xfrm rot="0">
             <a:off x="1047750" y="6229350"/>
-            <a:ext cx="10953750" cy="2091333"/>
+            <a:ext cx="10953750" cy="2091690"/>
           </a:xfrm>
           <a:prstGeom prst="rect">
             <a:avLst/>
@@ -6644,7 +6644,7 @@
             <a:r>
               <a:rPr lang="en-US" sz="1800" strike="noStrike" u="none">
                 <a:solidFill>
-                  <a:srgbClr val="AAB6C6"/>
+                  <a:srgbClr val="3C4A5C"/>
                 </a:solidFill>
                 <a:latin typeface="JetBrains Mono"/>
                 <a:ea typeface="JetBrains Mono"/>
@@ -6666,7 +6666,7 @@
             <a:r>
               <a:rPr lang="en-US" sz="1800" strike="noStrike" u="none">
                 <a:solidFill>
-                  <a:srgbClr val="AAB6C6"/>
+                  <a:srgbClr val="3C4A5C"/>
                 </a:solidFill>
                 <a:latin typeface="JetBrains Mono"/>
                 <a:ea typeface="JetBrains Mono"/>
@@ -6698,7 +6698,7 @@
             <a:r>
               <a:rPr lang="en-US" sz="1800" strike="noStrike" u="none">
                 <a:solidFill>
-                  <a:srgbClr val="AAB6C6"/>
+                  <a:srgbClr val="3C4A5C"/>
                 </a:solidFill>
                 <a:latin typeface="JetBrains Mono"/>
                 <a:ea typeface="JetBrains Mono"/>
@@ -6720,7 +6720,7 @@
             <a:r>
               <a:rPr lang="en-US" sz="1800" strike="noStrike" u="none">
                 <a:solidFill>
-                  <a:srgbClr val="AAB6C6"/>
+                  <a:srgbClr val="3C4A5C"/>
                 </a:solidFill>
                 <a:latin typeface="JetBrains Mono"/>
                 <a:ea typeface="JetBrains Mono"/>
@@ -6742,7 +6742,7 @@
             <a:r>
               <a:rPr lang="en-US" sz="1800" strike="noStrike" u="none">
                 <a:solidFill>
-                  <a:srgbClr val="AAB6C6"/>
+                  <a:srgbClr val="3C4A5C"/>
                 </a:solidFill>
                 <a:latin typeface="JetBrains Mono"/>
                 <a:ea typeface="JetBrains Mono"/>
@@ -6768,7 +6768,7 @@
     <p:bg>
       <p:bgPr>
         <a:solidFill>
-          <a:srgbClr val="16243A"/>
+          <a:srgbClr val="EDF1F6"/>
         </a:solidFill>
       </p:bgPr>
     </p:bg>
@@ -6902,7 +6902,7 @@
             <a:r>
               <a:rPr lang="en-US" sz="1350">
                 <a:solidFill>
-                  <a:srgbClr val="AAB6C6"/>
+                  <a:srgbClr val="8A98AA"/>
                 </a:solidFill>
                 <a:latin typeface="JetBrains Mono"/>
                 <a:ea typeface="JetBrains Mono"/>
@@ -6943,7 +6943,7 @@
             <a:r>
               <a:rPr lang="en-US" sz="4800" b="true">
                 <a:solidFill>
-                  <a:srgbClr val="F4F7FB"/>
+                  <a:srgbClr val="1B2A3F"/>
                 </a:solidFill>
                 <a:latin typeface="IBM Plex Sans Bold"/>
                 <a:ea typeface="IBM Plex Sans Bold"/>
@@ -7019,11 +7019,11 @@
                 </a:pathLst>
               </a:custGeom>
               <a:solidFill>
-                <a:srgbClr val="192A42"/>
+                <a:srgbClr val="FFFFFF"/>
               </a:solidFill>
               <a:ln w="9525" cap="sq">
                 <a:solidFill>
-                  <a:srgbClr val="34465D"/>
+                  <a:srgbClr val="D4DCE6"/>
                 </a:solidFill>
                 <a:prstDash val="solid"/>
                 <a:miter/>
@@ -7074,7 +7074,7 @@
             </a:prstGeom>
             <a:ln cap="flat" w="12700">
               <a:solidFill>
-                <a:srgbClr val="34465D"/>
+                <a:srgbClr val="D4DCE6"/>
               </a:solidFill>
               <a:prstDash val="solid"/>
               <a:headEnd type="none" len="sm" w="sm"/>
@@ -7098,7 +7098,7 @@
             </a:prstGeom>
             <a:ln cap="flat" w="12700">
               <a:solidFill>
-                <a:srgbClr val="34465D"/>
+                <a:srgbClr val="D4DCE6"/>
               </a:solidFill>
               <a:prstDash val="solid"/>
               <a:headEnd type="none" len="sm" w="sm"/>
@@ -7146,7 +7146,7 @@
             </a:prstGeom>
             <a:ln cap="flat" w="12700">
               <a:solidFill>
-                <a:srgbClr val="34465D"/>
+                <a:srgbClr val="D4DCE6"/>
               </a:solidFill>
               <a:prstDash val="solid"/>
               <a:headEnd type="none" len="sm" w="sm"/>
@@ -7170,7 +7170,7 @@
             </a:prstGeom>
             <a:ln cap="flat" w="12700">
               <a:solidFill>
-                <a:srgbClr val="34465D"/>
+                <a:srgbClr val="D4DCE6"/>
               </a:solidFill>
               <a:prstDash val="solid"/>
               <a:headEnd type="none" len="sm" w="sm"/>
@@ -7333,7 +7333,7 @@
               <a:r>
                 <a:rPr lang="en-US" sz="1800" strike="noStrike" u="none">
                   <a:solidFill>
-                    <a:srgbClr val="AAB6C6"/>
+                    <a:srgbClr val="3C4A5C"/>
                   </a:solidFill>
                   <a:latin typeface="IBM Plex Sans"/>
                   <a:ea typeface="IBM Plex Sans"/>
@@ -7377,7 +7377,7 @@
               <a:r>
                 <a:rPr lang="en-US" sz="1800" strike="noStrike" u="none">
                   <a:solidFill>
-                    <a:srgbClr val="AAB6C6"/>
+                    <a:srgbClr val="3C4A5C"/>
                   </a:solidFill>
                   <a:latin typeface="IBM Plex Sans"/>
                   <a:ea typeface="IBM Plex Sans"/>
@@ -7421,7 +7421,7 @@
               <a:r>
                 <a:rPr lang="en-US" sz="1800" strike="noStrike" u="none">
                   <a:solidFill>
-                    <a:srgbClr val="AAB6C6"/>
+                    <a:srgbClr val="3C4A5C"/>
                   </a:solidFill>
                   <a:latin typeface="IBM Plex Sans"/>
                   <a:ea typeface="IBM Plex Sans"/>
@@ -7465,7 +7465,7 @@
               <a:r>
                 <a:rPr lang="en-US" sz="1800" strike="noStrike" u="none">
                   <a:solidFill>
-                    <a:srgbClr val="AAB6C6"/>
+                    <a:srgbClr val="3C4A5C"/>
                   </a:solidFill>
                   <a:latin typeface="IBM Plex Sans"/>
                   <a:ea typeface="IBM Plex Sans"/>
@@ -7509,7 +7509,7 @@
               <a:r>
                 <a:rPr lang="en-US" sz="1800" strike="noStrike" u="none">
                   <a:solidFill>
-                    <a:srgbClr val="AAB6C6"/>
+                    <a:srgbClr val="3C4A5C"/>
                   </a:solidFill>
                   <a:latin typeface="IBM Plex Sans"/>
                   <a:ea typeface="IBM Plex Sans"/>
@@ -7553,7 +7553,7 @@
               <a:r>
                 <a:rPr lang="en-US" sz="1800" strike="noStrike" u="none">
                   <a:solidFill>
-                    <a:srgbClr val="AAB6C6"/>
+                    <a:srgbClr val="3C4A5C"/>
                   </a:solidFill>
                   <a:latin typeface="IBM Plex Sans"/>
                   <a:ea typeface="IBM Plex Sans"/>
@@ -7597,7 +7597,7 @@
               <a:r>
                 <a:rPr lang="en-US" sz="1800" strike="noStrike" u="none">
                   <a:solidFill>
-                    <a:srgbClr val="AAB6C6"/>
+                    <a:srgbClr val="3C4A5C"/>
                   </a:solidFill>
                   <a:latin typeface="IBM Plex Sans"/>
                   <a:ea typeface="IBM Plex Sans"/>
@@ -7641,7 +7641,7 @@
               <a:r>
                 <a:rPr lang="en-US" sz="1800" strike="noStrike" u="none">
                   <a:solidFill>
-                    <a:srgbClr val="AAB6C6"/>
+                    <a:srgbClr val="3C4A5C"/>
                   </a:solidFill>
                   <a:latin typeface="IBM Plex Sans"/>
                   <a:ea typeface="IBM Plex Sans"/>
@@ -7685,7 +7685,7 @@
               <a:r>
                 <a:rPr lang="en-US" sz="1800" strike="noStrike" u="none">
                   <a:solidFill>
-                    <a:srgbClr val="AAB6C6"/>
+                    <a:srgbClr val="3C4A5C"/>
                   </a:solidFill>
                   <a:latin typeface="IBM Plex Sans"/>
                   <a:ea typeface="IBM Plex Sans"/>
@@ -7730,7 +7730,7 @@
             <a:r>
               <a:rPr lang="en-US" b="true" sz="2700" strike="noStrike" u="none">
                 <a:solidFill>
-                  <a:srgbClr val="F4F7FB"/>
+                  <a:srgbClr val="1B2A3F"/>
                 </a:solidFill>
                 <a:latin typeface="JetBrains Mono Bold"/>
                 <a:ea typeface="JetBrains Mono Bold"/>
@@ -7774,7 +7774,7 @@
             <a:r>
               <a:rPr lang="en-US" b="true" sz="2700" strike="noStrike" u="none">
                 <a:solidFill>
-                  <a:srgbClr val="F4F7FB"/>
+                  <a:srgbClr val="1B2A3F"/>
                 </a:solidFill>
                 <a:latin typeface="JetBrains Mono Bold"/>
                 <a:ea typeface="JetBrains Mono Bold"/>
@@ -7818,7 +7818,7 @@
             <a:r>
               <a:rPr lang="en-US" b="true" sz="2700" strike="noStrike" u="none">
                 <a:solidFill>
-                  <a:srgbClr val="F4F7FB"/>
+                  <a:srgbClr val="1B2A3F"/>
                 </a:solidFill>
                 <a:latin typeface="JetBrains Mono Bold"/>
                 <a:ea typeface="JetBrains Mono Bold"/>
@@ -7844,7 +7844,7 @@
     <p:bg>
       <p:bgPr>
         <a:solidFill>
-          <a:srgbClr val="0F1C2E"/>
+          <a:srgbClr val="F7F9FC"/>
         </a:solidFill>
       </p:bgPr>
     </p:bg>
@@ -7978,7 +7978,7 @@
             <a:r>
               <a:rPr lang="en-US" sz="1350">
                 <a:solidFill>
-                  <a:srgbClr val="AAB6C6"/>
+                  <a:srgbClr val="8A98AA"/>
                 </a:solidFill>
                 <a:latin typeface="JetBrains Mono"/>
                 <a:ea typeface="JetBrains Mono"/>
@@ -8019,7 +8019,7 @@
             <a:r>
               <a:rPr lang="en-US" sz="4800" b="true">
                 <a:solidFill>
-                  <a:srgbClr val="F4F7FB"/>
+                  <a:srgbClr val="1B2A3F"/>
                 </a:solidFill>
                 <a:latin typeface="IBM Plex Sans Bold"/>
                 <a:ea typeface="IBM Plex Sans Bold"/>
@@ -8095,11 +8095,11 @@
                 </a:pathLst>
               </a:custGeom>
               <a:solidFill>
-                <a:srgbClr val="192A42"/>
+                <a:srgbClr val="FFFFFF"/>
               </a:solidFill>
               <a:ln w="9525" cap="sq">
                 <a:solidFill>
-                  <a:srgbClr val="34465D"/>
+                  <a:srgbClr val="D4DCE6"/>
                 </a:solidFill>
                 <a:prstDash val="solid"/>
                 <a:miter/>
@@ -8150,7 +8150,7 @@
             </a:prstGeom>
             <a:ln cap="flat" w="12700">
               <a:solidFill>
-                <a:srgbClr val="34465D"/>
+                <a:srgbClr val="D4DCE6"/>
               </a:solidFill>
               <a:prstDash val="solid"/>
               <a:headEnd type="none" len="sm" w="sm"/>
@@ -8198,7 +8198,7 @@
             </a:prstGeom>
             <a:ln cap="flat" w="12700">
               <a:solidFill>
-                <a:srgbClr val="34465D"/>
+                <a:srgbClr val="D4DCE6"/>
               </a:solidFill>
               <a:prstDash val="solid"/>
               <a:headEnd type="none" len="sm" w="sm"/>
@@ -8222,7 +8222,7 @@
             </a:prstGeom>
             <a:ln cap="flat" w="12700">
               <a:solidFill>
-                <a:srgbClr val="34465D"/>
+                <a:srgbClr val="D4DCE6"/>
               </a:solidFill>
               <a:prstDash val="solid"/>
               <a:headEnd type="none" len="sm" w="sm"/>
@@ -8246,7 +8246,7 @@
             </a:prstGeom>
             <a:ln cap="flat" w="12700">
               <a:solidFill>
-                <a:srgbClr val="34465D"/>
+                <a:srgbClr val="D4DCE6"/>
               </a:solidFill>
               <a:prstDash val="solid"/>
               <a:headEnd type="none" len="sm" w="sm"/>
@@ -8270,7 +8270,7 @@
             </a:prstGeom>
             <a:ln cap="flat" w="12700">
               <a:solidFill>
-                <a:srgbClr val="34465D"/>
+                <a:srgbClr val="D4DCE6"/>
               </a:solidFill>
               <a:prstDash val="solid"/>
               <a:headEnd type="none" len="sm" w="sm"/>
@@ -8392,7 +8392,7 @@
               <a:r>
                 <a:rPr lang="en-US" sz="1575" strike="noStrike" u="none">
                   <a:solidFill>
-                    <a:srgbClr val="AAB6C6"/>
+                    <a:srgbClr val="3C4A5C"/>
                   </a:solidFill>
                   <a:latin typeface="IBM Plex Sans"/>
                   <a:ea typeface="IBM Plex Sans"/>
@@ -8436,7 +8436,7 @@
               <a:r>
                 <a:rPr lang="en-US" sz="1575" strike="noStrike" u="none">
                   <a:solidFill>
-                    <a:srgbClr val="AAB6C6"/>
+                    <a:srgbClr val="3C4A5C"/>
                   </a:solidFill>
                   <a:latin typeface="IBM Plex Sans"/>
                   <a:ea typeface="IBM Plex Sans"/>
@@ -8480,7 +8480,7 @@
               <a:r>
                 <a:rPr lang="en-US" sz="1575" strike="noStrike" u="none">
                   <a:solidFill>
-                    <a:srgbClr val="AAB6C6"/>
+                    <a:srgbClr val="3C4A5C"/>
                   </a:solidFill>
                   <a:latin typeface="IBM Plex Sans"/>
                   <a:ea typeface="IBM Plex Sans"/>
@@ -8524,7 +8524,7 @@
               <a:r>
                 <a:rPr lang="en-US" sz="1575" strike="noStrike" u="none">
                   <a:solidFill>
-                    <a:srgbClr val="AAB6C6"/>
+                    <a:srgbClr val="3C4A5C"/>
                   </a:solidFill>
                   <a:latin typeface="IBM Plex Sans"/>
                   <a:ea typeface="IBM Plex Sans"/>
@@ -8568,7 +8568,7 @@
               <a:r>
                 <a:rPr lang="en-US" sz="1575" strike="noStrike" u="none">
                   <a:solidFill>
-                    <a:srgbClr val="AAB6C6"/>
+                    <a:srgbClr val="3C4A5C"/>
                   </a:solidFill>
                   <a:latin typeface="IBM Plex Sans"/>
                   <a:ea typeface="IBM Plex Sans"/>
@@ -8612,7 +8612,7 @@
               <a:r>
                 <a:rPr lang="en-US" sz="1575" strike="noStrike" u="none">
                   <a:solidFill>
-                    <a:srgbClr val="AAB6C6"/>
+                    <a:srgbClr val="3C4A5C"/>
                   </a:solidFill>
                   <a:latin typeface="IBM Plex Sans"/>
                   <a:ea typeface="IBM Plex Sans"/>
@@ -8656,7 +8656,7 @@
               <a:r>
                 <a:rPr lang="en-US" sz="1575" strike="noStrike" u="none">
                   <a:solidFill>
-                    <a:srgbClr val="AAB6C6"/>
+                    <a:srgbClr val="3C4A5C"/>
                   </a:solidFill>
                   <a:latin typeface="IBM Plex Sans"/>
                   <a:ea typeface="IBM Plex Sans"/>
@@ -8700,7 +8700,7 @@
               <a:r>
                 <a:rPr lang="en-US" sz="1575" strike="noStrike" u="none">
                   <a:solidFill>
-                    <a:srgbClr val="AAB6C6"/>
+                    <a:srgbClr val="3C4A5C"/>
                   </a:solidFill>
                   <a:latin typeface="IBM Plex Sans"/>
                   <a:ea typeface="IBM Plex Sans"/>
@@ -8744,7 +8744,7 @@
               <a:r>
                 <a:rPr lang="en-US" sz="1575" strike="noStrike" u="none">
                   <a:solidFill>
-                    <a:srgbClr val="AAB6C6"/>
+                    <a:srgbClr val="3C4A5C"/>
                   </a:solidFill>
                   <a:latin typeface="IBM Plex Sans"/>
                   <a:ea typeface="IBM Plex Sans"/>
@@ -8788,7 +8788,7 @@
               <a:r>
                 <a:rPr lang="en-US" sz="1575" strike="noStrike" u="none">
                   <a:solidFill>
-                    <a:srgbClr val="AAB6C6"/>
+                    <a:srgbClr val="3C4A5C"/>
                   </a:solidFill>
                   <a:latin typeface="IBM Plex Sans"/>
                   <a:ea typeface="IBM Plex Sans"/>
@@ -8815,7 +8815,7 @@
     <p:bg>
       <p:bgPr>
         <a:solidFill>
-          <a:srgbClr val="16243A"/>
+          <a:srgbClr val="EDF1F6"/>
         </a:solidFill>
       </p:bgPr>
     </p:bg>
@@ -8949,7 +8949,7 @@
             <a:r>
               <a:rPr lang="en-US" sz="1350">
                 <a:solidFill>
-                  <a:srgbClr val="AAB6C6"/>
+                  <a:srgbClr val="8A98AA"/>
                 </a:solidFill>
                 <a:latin typeface="JetBrains Mono"/>
                 <a:ea typeface="JetBrains Mono"/>
@@ -8990,7 +8990,7 @@
             <a:r>
               <a:rPr lang="en-US" sz="4800" b="true">
                 <a:solidFill>
-                  <a:srgbClr val="F4F7FB"/>
+                  <a:srgbClr val="1B2A3F"/>
                 </a:solidFill>
                 <a:latin typeface="IBM Plex Sans Bold"/>
                 <a:ea typeface="IBM Plex Sans Bold"/>
@@ -9075,7 +9075,7 @@
             <a:r>
               <a:rPr lang="en-US" b="true" sz="2250" strike="noStrike" u="none">
                 <a:solidFill>
-                  <a:srgbClr val="F4F7FB"/>
+                  <a:srgbClr val="1B2A3F"/>
                 </a:solidFill>
                 <a:latin typeface="IBM Plex Sans Bold"/>
                 <a:ea typeface="IBM Plex Sans Bold"/>
@@ -9160,7 +9160,7 @@
             <a:r>
               <a:rPr lang="en-US" b="true" sz="2250" strike="noStrike" u="none">
                 <a:solidFill>
-                  <a:srgbClr val="F4F7FB"/>
+                  <a:srgbClr val="1B2A3F"/>
                 </a:solidFill>
                 <a:latin typeface="IBM Plex Sans Bold"/>
                 <a:ea typeface="IBM Plex Sans Bold"/>
@@ -9245,7 +9245,7 @@
             <a:r>
               <a:rPr lang="en-US" b="true" sz="2250" strike="noStrike" u="none">
                 <a:solidFill>
-                  <a:srgbClr val="F4F7FB"/>
+                  <a:srgbClr val="1B2A3F"/>
                 </a:solidFill>
                 <a:latin typeface="IBM Plex Sans Bold"/>
                 <a:ea typeface="IBM Plex Sans Bold"/>
@@ -9330,7 +9330,7 @@
             <a:r>
               <a:rPr lang="en-US" b="true" sz="2250" strike="noStrike" u="none">
                 <a:solidFill>
-                  <a:srgbClr val="F4F7FB"/>
+                  <a:srgbClr val="1B2A3F"/>
                 </a:solidFill>
                 <a:latin typeface="IBM Plex Sans Bold"/>
                 <a:ea typeface="IBM Plex Sans Bold"/>
@@ -9374,7 +9374,7 @@
             <a:r>
               <a:rPr lang="en-US" sz="1650" strike="noStrike" u="none">
                 <a:solidFill>
-                  <a:srgbClr val="AAB6C6"/>
+                  <a:srgbClr val="3C4A5C"/>
                 </a:solidFill>
                 <a:latin typeface="IBM Plex Sans"/>
                 <a:ea typeface="IBM Plex Sans"/>
@@ -9400,7 +9400,7 @@
     <p:bg>
       <p:bgPr>
         <a:solidFill>
-          <a:srgbClr val="16243A"/>
+          <a:srgbClr val="EDF1F6"/>
         </a:solidFill>
       </p:bgPr>
     </p:bg>
@@ -9534,7 +9534,7 @@
             <a:r>
               <a:rPr lang="en-US" sz="1350">
                 <a:solidFill>
-                  <a:srgbClr val="AAB6C6"/>
+                  <a:srgbClr val="8A98AA"/>
                 </a:solidFill>
                 <a:latin typeface="JetBrains Mono"/>
                 <a:ea typeface="JetBrains Mono"/>
@@ -9575,7 +9575,7 @@
             <a:r>
               <a:rPr lang="en-US" sz="5400" b="true">
                 <a:solidFill>
-                  <a:srgbClr val="F4F7FB"/>
+                  <a:srgbClr val="1B2A3F"/>
                 </a:solidFill>
                 <a:latin typeface="IBM Plex Sans Bold"/>
                 <a:ea typeface="IBM Plex Sans Bold"/>
@@ -9594,7 +9594,7 @@
             <a:r>
               <a:rPr lang="en-US" sz="5400" b="true">
                 <a:solidFill>
-                  <a:srgbClr val="F4F7FB"/>
+                  <a:srgbClr val="1B2A3F"/>
                 </a:solidFill>
                 <a:latin typeface="IBM Plex Sans Bold"/>
                 <a:ea typeface="IBM Plex Sans Bold"/>
@@ -9638,7 +9638,7 @@
             <a:r>
               <a:rPr lang="en-US" sz="2100" strike="noStrike" u="none">
                 <a:solidFill>
-                  <a:srgbClr val="AAB6C6"/>
+                  <a:srgbClr val="3C4A5C"/>
                 </a:solidFill>
                 <a:latin typeface="IBM Plex Sans"/>
                 <a:ea typeface="IBM Plex Sans"/>
@@ -9670,7 +9670,7 @@
             <a:r>
               <a:rPr lang="en-US" sz="2100" strike="noStrike" u="none">
                 <a:solidFill>
-                  <a:srgbClr val="AAB6C6"/>
+                  <a:srgbClr val="3C4A5C"/>
                 </a:solidFill>
                 <a:latin typeface="IBM Plex Sans"/>
                 <a:ea typeface="IBM Plex Sans"/>
@@ -9801,7 +9801,7 @@
             <a:r>
               <a:rPr lang="en-US" b="true" sz="3900" strike="noStrike" u="none">
                 <a:solidFill>
-                  <a:srgbClr val="F4F7FB"/>
+                  <a:srgbClr val="1B2A3F"/>
                 </a:solidFill>
                 <a:latin typeface="IBM Plex Sans Bold"/>
                 <a:ea typeface="IBM Plex Sans Bold"/>
@@ -9827,7 +9827,7 @@
     <p:bg>
       <p:bgPr>
         <a:solidFill>
-          <a:srgbClr val="0F1C2E"/>
+          <a:srgbClr val="F7F9FC"/>
         </a:solidFill>
       </p:bgPr>
     </p:bg>
@@ -9961,7 +9961,7 @@
             <a:r>
               <a:rPr lang="en-US" sz="1350">
                 <a:solidFill>
-                  <a:srgbClr val="AAB6C6"/>
+                  <a:srgbClr val="8A98AA"/>
                 </a:solidFill>
                 <a:latin typeface="JetBrains Mono"/>
                 <a:ea typeface="JetBrains Mono"/>
@@ -10002,7 +10002,7 @@
             <a:r>
               <a:rPr lang="en-US" sz="4800" b="true">
                 <a:solidFill>
-                  <a:srgbClr val="F4F7FB"/>
+                  <a:srgbClr val="1B2A3F"/>
                 </a:solidFill>
                 <a:latin typeface="IBM Plex Sans Bold"/>
                 <a:ea typeface="IBM Plex Sans Bold"/>
@@ -10078,11 +10078,11 @@
                 </a:pathLst>
               </a:custGeom>
               <a:solidFill>
-                <a:srgbClr val="192A42"/>
+                <a:srgbClr val="FFFFFF"/>
               </a:solidFill>
               <a:ln w="9525" cap="sq">
                 <a:solidFill>
-                  <a:srgbClr val="34465D"/>
+                  <a:srgbClr val="D4DCE6"/>
                 </a:solidFill>
                 <a:prstDash val="solid"/>
                 <a:miter/>
@@ -10133,7 +10133,7 @@
             </a:prstGeom>
             <a:ln cap="flat" w="12700">
               <a:solidFill>
-                <a:srgbClr val="34465D"/>
+                <a:srgbClr val="D4DCE6"/>
               </a:solidFill>
               <a:prstDash val="solid"/>
               <a:headEnd type="none" len="sm" w="sm"/>
@@ -10181,7 +10181,7 @@
             </a:prstGeom>
             <a:ln cap="flat" w="12700">
               <a:solidFill>
-                <a:srgbClr val="34465D"/>
+                <a:srgbClr val="D4DCE6"/>
               </a:solidFill>
               <a:prstDash val="solid"/>
               <a:headEnd type="none" len="sm" w="sm"/>
@@ -10205,7 +10205,7 @@
             </a:prstGeom>
             <a:ln cap="flat" w="12700">
               <a:solidFill>
-                <a:srgbClr val="34465D"/>
+                <a:srgbClr val="D4DCE6"/>
               </a:solidFill>
               <a:prstDash val="solid"/>
               <a:headEnd type="none" len="sm" w="sm"/>
@@ -10229,7 +10229,7 @@
             </a:prstGeom>
             <a:ln cap="flat" w="12700">
               <a:solidFill>
-                <a:srgbClr val="34465D"/>
+                <a:srgbClr val="D4DCE6"/>
               </a:solidFill>
               <a:prstDash val="solid"/>
               <a:headEnd type="none" len="sm" w="sm"/>
@@ -10351,7 +10351,7 @@
               <a:r>
                 <a:rPr lang="en-US" sz="1800" strike="noStrike" u="none">
                   <a:solidFill>
-                    <a:srgbClr val="AAB6C6"/>
+                    <a:srgbClr val="3C4A5C"/>
                   </a:solidFill>
                   <a:latin typeface="IBM Plex Sans"/>
                   <a:ea typeface="IBM Plex Sans"/>
@@ -10395,7 +10395,7 @@
               <a:r>
                 <a:rPr lang="en-US" sz="1800" strike="noStrike" u="none">
                   <a:solidFill>
-                    <a:srgbClr val="AAB6C6"/>
+                    <a:srgbClr val="3C4A5C"/>
                   </a:solidFill>
                   <a:latin typeface="IBM Plex Sans"/>
                   <a:ea typeface="IBM Plex Sans"/>
@@ -10439,7 +10439,7 @@
               <a:r>
                 <a:rPr lang="en-US" sz="1800" strike="noStrike" u="none">
                   <a:solidFill>
-                    <a:srgbClr val="AAB6C6"/>
+                    <a:srgbClr val="3C4A5C"/>
                   </a:solidFill>
                   <a:latin typeface="IBM Plex Sans"/>
                   <a:ea typeface="IBM Plex Sans"/>
@@ -10483,7 +10483,7 @@
               <a:r>
                 <a:rPr lang="en-US" sz="1800" strike="noStrike" u="none">
                   <a:solidFill>
-                    <a:srgbClr val="AAB6C6"/>
+                    <a:srgbClr val="3C4A5C"/>
                   </a:solidFill>
                   <a:latin typeface="IBM Plex Sans"/>
                   <a:ea typeface="IBM Plex Sans"/>
@@ -10527,7 +10527,7 @@
               <a:r>
                 <a:rPr lang="en-US" sz="1800" strike="noStrike" u="none">
                   <a:solidFill>
-                    <a:srgbClr val="AAB6C6"/>
+                    <a:srgbClr val="3C4A5C"/>
                   </a:solidFill>
                   <a:latin typeface="IBM Plex Sans"/>
                   <a:ea typeface="IBM Plex Sans"/>
@@ -10571,7 +10571,7 @@
               <a:r>
                 <a:rPr lang="en-US" sz="1800" strike="noStrike" u="none">
                   <a:solidFill>
-                    <a:srgbClr val="AAB6C6"/>
+                    <a:srgbClr val="3C4A5C"/>
                   </a:solidFill>
                   <a:latin typeface="IBM Plex Sans"/>
                   <a:ea typeface="IBM Plex Sans"/>
@@ -10615,7 +10615,7 @@
               <a:r>
                 <a:rPr lang="en-US" sz="1800" strike="noStrike" u="none">
                   <a:solidFill>
-                    <a:srgbClr val="AAB6C6"/>
+                    <a:srgbClr val="3C4A5C"/>
                   </a:solidFill>
                   <a:latin typeface="IBM Plex Sans"/>
                   <a:ea typeface="IBM Plex Sans"/>
@@ -10659,7 +10659,7 @@
               <a:r>
                 <a:rPr lang="en-US" sz="1800" strike="noStrike" u="none">
                   <a:solidFill>
-                    <a:srgbClr val="AAB6C6"/>
+                    <a:srgbClr val="3C4A5C"/>
                   </a:solidFill>
                   <a:latin typeface="IBM Plex Sans"/>
                   <a:ea typeface="IBM Plex Sans"/>
@@ -10704,7 +10704,7 @@
             <a:r>
               <a:rPr lang="en-US" sz="1800" strike="noStrike" u="none">
                 <a:solidFill>
-                  <a:srgbClr val="AAB6C6"/>
+                  <a:srgbClr val="3C4A5C"/>
                 </a:solidFill>
                 <a:latin typeface="IBM Plex Sans"/>
                 <a:ea typeface="IBM Plex Sans"/>
@@ -10774,7 +10774,7 @@
     <p:bg>
       <p:bgPr>
         <a:solidFill>
-          <a:srgbClr val="16243A"/>
+          <a:srgbClr val="EDF1F6"/>
         </a:solidFill>
       </p:bgPr>
     </p:bg>
@@ -10908,7 +10908,7 @@
             <a:r>
               <a:rPr lang="en-US" sz="1350">
                 <a:solidFill>
-                  <a:srgbClr val="AAB6C6"/>
+                  <a:srgbClr val="8A98AA"/>
                 </a:solidFill>
                 <a:latin typeface="JetBrains Mono"/>
                 <a:ea typeface="JetBrains Mono"/>
@@ -10949,7 +10949,7 @@
             <a:r>
               <a:rPr lang="en-US" sz="4800" b="true">
                 <a:solidFill>
-                  <a:srgbClr val="F4F7FB"/>
+                  <a:srgbClr val="1B2A3F"/>
                 </a:solidFill>
                 <a:latin typeface="IBM Plex Sans Bold"/>
                 <a:ea typeface="IBM Plex Sans Bold"/>
@@ -10968,7 +10968,7 @@
             <a:r>
               <a:rPr lang="en-US" sz="4800" b="true">
                 <a:solidFill>
-                  <a:srgbClr val="F4F7FB"/>
+                  <a:srgbClr val="1B2A3F"/>
                 </a:solidFill>
                 <a:latin typeface="IBM Plex Sans Bold"/>
                 <a:ea typeface="IBM Plex Sans Bold"/>
@@ -11012,7 +11012,7 @@
             <a:r>
               <a:rPr lang="en-US" sz="1800" strike="noStrike" u="none">
                 <a:solidFill>
-                  <a:srgbClr val="F4F7FB"/>
+                  <a:srgbClr val="3C4A5C"/>
                 </a:solidFill>
                 <a:latin typeface="JetBrains Mono"/>
                 <a:ea typeface="JetBrains Mono"/>
@@ -11034,7 +11034,7 @@
             <a:r>
               <a:rPr lang="en-US" sz="1800" strike="noStrike" u="none">
                 <a:solidFill>
-                  <a:srgbClr val="F4F7FB"/>
+                  <a:srgbClr val="3C4A5C"/>
                 </a:solidFill>
                 <a:latin typeface="JetBrains Mono"/>
                 <a:ea typeface="JetBrains Mono"/>
@@ -11056,7 +11056,7 @@
             <a:r>
               <a:rPr lang="en-US" sz="1800" strike="noStrike" u="none">
                 <a:solidFill>
-                  <a:srgbClr val="F4F7FB"/>
+                  <a:srgbClr val="3C4A5C"/>
                 </a:solidFill>
                 <a:latin typeface="JetBrains Mono"/>
                 <a:ea typeface="JetBrains Mono"/>
@@ -11088,7 +11088,7 @@
             <a:r>
               <a:rPr lang="en-US" sz="1800" strike="noStrike" u="none">
                 <a:solidFill>
-                  <a:srgbClr val="F4F7FB"/>
+                  <a:srgbClr val="3C4A5C"/>
                 </a:solidFill>
                 <a:latin typeface="JetBrains Mono"/>
                 <a:ea typeface="JetBrains Mono"/>
@@ -11110,7 +11110,7 @@
             <a:r>
               <a:rPr lang="en-US" sz="1800" strike="noStrike" u="none">
                 <a:solidFill>
-                  <a:srgbClr val="F4F7FB"/>
+                  <a:srgbClr val="3C4A5C"/>
                 </a:solidFill>
                 <a:latin typeface="JetBrains Mono"/>
                 <a:ea typeface="JetBrains Mono"/>
@@ -11132,7 +11132,7 @@
             <a:r>
               <a:rPr lang="en-US" sz="1800" strike="noStrike" u="none">
                 <a:solidFill>
-                  <a:srgbClr val="F4F7FB"/>
+                  <a:srgbClr val="3C4A5C"/>
                 </a:solidFill>
                 <a:latin typeface="JetBrains Mono"/>
                 <a:ea typeface="JetBrains Mono"/>
@@ -11194,11 +11194,11 @@
               </a:pathLst>
             </a:custGeom>
             <a:solidFill>
-              <a:srgbClr val="16243A"/>
+              <a:srgbClr val="FFFFFF"/>
             </a:solidFill>
             <a:ln w="9525" cap="sq">
               <a:solidFill>
-                <a:srgbClr val="34465D"/>
+                <a:srgbClr val="D4DCE6"/>
               </a:solidFill>
               <a:prstDash val="lgDash"/>
               <a:miter/>
@@ -11265,7 +11265,7 @@
             <a:r>
               <a:rPr lang="en-US" sz="1575" strike="noStrike" u="none">
                 <a:solidFill>
-                  <a:srgbClr val="AAB6C6"/>
+                  <a:srgbClr val="3C4A5C"/>
                 </a:solidFill>
                 <a:latin typeface="JetBrains Mono"/>
                 <a:ea typeface="JetBrains Mono"/>
@@ -11337,7 +11337,7 @@
     <p:bg>
       <p:bgPr>
         <a:solidFill>
-          <a:srgbClr val="0F1C2E"/>
+          <a:srgbClr val="F7F9FC"/>
         </a:solidFill>
       </p:bgPr>
     </p:bg>
@@ -11471,7 +11471,7 @@
             <a:r>
               <a:rPr lang="en-US" sz="1350">
                 <a:solidFill>
-                  <a:srgbClr val="AAB6C6"/>
+                  <a:srgbClr val="8A98AA"/>
                 </a:solidFill>
                 <a:latin typeface="JetBrains Mono"/>
                 <a:ea typeface="JetBrains Mono"/>
@@ -11512,7 +11512,7 @@
             <a:r>
               <a:rPr lang="en-US" sz="4800" b="true">
                 <a:solidFill>
-                  <a:srgbClr val="F4F7FB"/>
+                  <a:srgbClr val="1B2A3F"/>
                 </a:solidFill>
                 <a:latin typeface="IBM Plex Sans Bold"/>
                 <a:ea typeface="IBM Plex Sans Bold"/>
@@ -11588,11 +11588,11 @@
                 </a:pathLst>
               </a:custGeom>
               <a:solidFill>
-                <a:srgbClr val="192A42"/>
+                <a:srgbClr val="FFFFFF"/>
               </a:solidFill>
               <a:ln w="9525" cap="sq">
                 <a:solidFill>
-                  <a:srgbClr val="34465D"/>
+                  <a:srgbClr val="D4DCE6"/>
                 </a:solidFill>
                 <a:prstDash val="solid"/>
                 <a:miter/>
@@ -11643,7 +11643,7 @@
             </a:prstGeom>
             <a:ln cap="flat" w="12700">
               <a:solidFill>
-                <a:srgbClr val="34465D"/>
+                <a:srgbClr val="D4DCE6"/>
               </a:solidFill>
               <a:prstDash val="solid"/>
               <a:headEnd type="none" len="sm" w="sm"/>
@@ -11691,7 +11691,7 @@
             </a:prstGeom>
             <a:ln cap="flat" w="12700">
               <a:solidFill>
-                <a:srgbClr val="34465D"/>
+                <a:srgbClr val="D4DCE6"/>
               </a:solidFill>
               <a:prstDash val="solid"/>
               <a:headEnd type="none" len="sm" w="sm"/>
@@ -11715,7 +11715,7 @@
             </a:prstGeom>
             <a:ln cap="flat" w="12700">
               <a:solidFill>
-                <a:srgbClr val="34465D"/>
+                <a:srgbClr val="D4DCE6"/>
               </a:solidFill>
               <a:prstDash val="solid"/>
               <a:headEnd type="none" len="sm" w="sm"/>
@@ -11739,7 +11739,7 @@
             </a:prstGeom>
             <a:ln cap="flat" w="12700">
               <a:solidFill>
-                <a:srgbClr val="34465D"/>
+                <a:srgbClr val="D4DCE6"/>
               </a:solidFill>
               <a:prstDash val="solid"/>
               <a:headEnd type="none" len="sm" w="sm"/>
@@ -11763,7 +11763,7 @@
             </a:prstGeom>
             <a:ln cap="flat" w="12700">
               <a:solidFill>
-                <a:srgbClr val="34465D"/>
+                <a:srgbClr val="D4DCE6"/>
               </a:solidFill>
               <a:prstDash val="solid"/>
               <a:headEnd type="none" len="sm" w="sm"/>
@@ -11822,7 +11822,7 @@
               </a:custGeom>
               <a:solidFill>
                 <a:srgbClr val="C0392B">
-                  <a:alpha val="17647"/>
+                  <a:alpha val="9804"/>
                 </a:srgbClr>
               </a:solidFill>
               <a:ln cap="sq">
@@ -11974,7 +11974,7 @@
               <a:r>
                 <a:rPr lang="en-US" sz="1575" strike="noStrike" u="none">
                   <a:solidFill>
-                    <a:srgbClr val="AAB6C6"/>
+                    <a:srgbClr val="3C4A5C"/>
                   </a:solidFill>
                   <a:latin typeface="IBM Plex Sans"/>
                   <a:ea typeface="IBM Plex Sans"/>
@@ -12018,7 +12018,7 @@
               <a:r>
                 <a:rPr lang="en-US" sz="1575" strike="noStrike" u="none">
                   <a:solidFill>
-                    <a:srgbClr val="AAB6C6"/>
+                    <a:srgbClr val="3C4A5C"/>
                   </a:solidFill>
                   <a:latin typeface="JetBrains Mono"/>
                   <a:ea typeface="JetBrains Mono"/>
@@ -12062,7 +12062,7 @@
               <a:r>
                 <a:rPr lang="en-US" sz="1575" strike="noStrike" u="none">
                   <a:solidFill>
-                    <a:srgbClr val="AAB6C6"/>
+                    <a:srgbClr val="3C4A5C"/>
                   </a:solidFill>
                   <a:latin typeface="IBM Plex Sans"/>
                   <a:ea typeface="IBM Plex Sans"/>
@@ -12106,7 +12106,7 @@
               <a:r>
                 <a:rPr lang="en-US" sz="1575" strike="noStrike" u="none">
                   <a:solidFill>
-                    <a:srgbClr val="AAB6C6"/>
+                    <a:srgbClr val="3C4A5C"/>
                   </a:solidFill>
                   <a:latin typeface="JetBrains Mono"/>
                   <a:ea typeface="JetBrains Mono"/>
@@ -12150,7 +12150,7 @@
               <a:r>
                 <a:rPr lang="en-US" sz="1575" strike="noStrike" u="none">
                   <a:solidFill>
-                    <a:srgbClr val="AAB6C6"/>
+                    <a:srgbClr val="3C4A5C"/>
                   </a:solidFill>
                   <a:latin typeface="IBM Plex Sans"/>
                   <a:ea typeface="IBM Plex Sans"/>
@@ -12194,7 +12194,7 @@
               <a:r>
                 <a:rPr lang="en-US" sz="1575" strike="noStrike" u="none">
                   <a:solidFill>
-                    <a:srgbClr val="AAB6C6"/>
+                    <a:srgbClr val="3C4A5C"/>
                   </a:solidFill>
                   <a:latin typeface="JetBrains Mono"/>
                   <a:ea typeface="JetBrains Mono"/>
@@ -12238,7 +12238,7 @@
               <a:r>
                 <a:rPr lang="en-US" sz="1575" strike="noStrike" u="none">
                   <a:solidFill>
-                    <a:srgbClr val="AAB6C6"/>
+                    <a:srgbClr val="3C4A5C"/>
                   </a:solidFill>
                   <a:latin typeface="IBM Plex Sans"/>
                   <a:ea typeface="IBM Plex Sans"/>
@@ -12282,7 +12282,7 @@
               <a:r>
                 <a:rPr lang="en-US" sz="1575" strike="noStrike" u="none">
                   <a:solidFill>
-                    <a:srgbClr val="AAB6C6"/>
+                    <a:srgbClr val="3C4A5C"/>
                   </a:solidFill>
                   <a:latin typeface="JetBrains Mono"/>
                   <a:ea typeface="JetBrains Mono"/>
@@ -12326,7 +12326,7 @@
               <a:r>
                 <a:rPr lang="en-US" b="true" sz="1575" strike="noStrike" u="none">
                   <a:solidFill>
-                    <a:srgbClr val="F4F7FB"/>
+                    <a:srgbClr val="1B2A3F"/>
                   </a:solidFill>
                   <a:latin typeface="IBM Plex Sans Bold"/>
                   <a:ea typeface="IBM Plex Sans Bold"/>
@@ -12370,7 +12370,7 @@
               <a:r>
                 <a:rPr lang="en-US" b="true" sz="1575" strike="noStrike" u="none">
                   <a:solidFill>
-                    <a:srgbClr val="F4F7FB"/>
+                    <a:srgbClr val="1B2A3F"/>
                   </a:solidFill>
                   <a:latin typeface="JetBrains Mono Bold"/>
                   <a:ea typeface="JetBrains Mono Bold"/>
@@ -12438,7 +12438,7 @@
     <p:bg>
       <p:bgPr>
         <a:solidFill>
-          <a:srgbClr val="16243A"/>
+          <a:srgbClr val="EDF1F6"/>
         </a:solidFill>
       </p:bgPr>
     </p:bg>
@@ -12572,7 +12572,7 @@
             <a:r>
               <a:rPr lang="en-US" sz="1350">
                 <a:solidFill>
-                  <a:srgbClr val="AAB6C6"/>
+                  <a:srgbClr val="8A98AA"/>
                 </a:solidFill>
                 <a:latin typeface="JetBrains Mono"/>
                 <a:ea typeface="JetBrains Mono"/>
@@ -12613,7 +12613,7 @@
             <a:r>
               <a:rPr lang="en-US" sz="4800" b="true">
                 <a:solidFill>
-                  <a:srgbClr val="F4F7FB"/>
+                  <a:srgbClr val="1B2A3F"/>
                 </a:solidFill>
                 <a:latin typeface="IBM Plex Sans Bold"/>
                 <a:ea typeface="IBM Plex Sans Bold"/>
@@ -12689,11 +12689,11 @@
                 </a:pathLst>
               </a:custGeom>
               <a:solidFill>
-                <a:srgbClr val="192A42"/>
+                <a:srgbClr val="FFFFFF"/>
               </a:solidFill>
               <a:ln w="9525" cap="sq">
                 <a:solidFill>
-                  <a:srgbClr val="34465D"/>
+                  <a:srgbClr val="D4DCE6"/>
                 </a:solidFill>
                 <a:prstDash val="solid"/>
                 <a:miter/>
@@ -12730,7 +12730,7 @@
                 <a:r>
                   <a:rPr lang="en-US" sz="1425" strike="noStrike" u="none">
                     <a:solidFill>
-                      <a:srgbClr val="F4F7FB"/>
+                      <a:srgbClr val="1B2A3F"/>
                     </a:solidFill>
                     <a:latin typeface="IBM Plex Sans"/>
                     <a:ea typeface="IBM Plex Sans"/>
@@ -12817,11 +12817,11 @@
                 </a:pathLst>
               </a:custGeom>
               <a:solidFill>
-                <a:srgbClr val="192A42"/>
+                <a:srgbClr val="FFFFFF"/>
               </a:solidFill>
               <a:ln w="9525" cap="sq">
                 <a:solidFill>
-                  <a:srgbClr val="34465D"/>
+                  <a:srgbClr val="D4DCE6"/>
                 </a:solidFill>
                 <a:prstDash val="solid"/>
                 <a:miter/>
@@ -12858,7 +12858,7 @@
                 <a:r>
                   <a:rPr lang="en-US" sz="1425" strike="noStrike" u="none">
                     <a:solidFill>
-                      <a:srgbClr val="F4F7FB"/>
+                      <a:srgbClr val="1B2A3F"/>
                     </a:solidFill>
                     <a:latin typeface="IBM Plex Sans"/>
                     <a:ea typeface="IBM Plex Sans"/>
@@ -12945,11 +12945,11 @@
                 </a:pathLst>
               </a:custGeom>
               <a:solidFill>
-                <a:srgbClr val="192A42"/>
+                <a:srgbClr val="FFFFFF"/>
               </a:solidFill>
               <a:ln w="9525" cap="sq">
                 <a:solidFill>
-                  <a:srgbClr val="34465D"/>
+                  <a:srgbClr val="D4DCE6"/>
                 </a:solidFill>
                 <a:prstDash val="solid"/>
                 <a:miter/>
@@ -12986,7 +12986,7 @@
                 <a:r>
                   <a:rPr lang="en-US" sz="1425" strike="noStrike" u="none">
                     <a:solidFill>
-                      <a:srgbClr val="F4F7FB"/>
+                      <a:srgbClr val="1B2A3F"/>
                     </a:solidFill>
                     <a:latin typeface="IBM Plex Sans"/>
                     <a:ea typeface="IBM Plex Sans"/>
@@ -13073,11 +13073,11 @@
                 </a:pathLst>
               </a:custGeom>
               <a:solidFill>
-                <a:srgbClr val="192A42"/>
+                <a:srgbClr val="FFFFFF"/>
               </a:solidFill>
               <a:ln w="9525" cap="sq">
                 <a:solidFill>
-                  <a:srgbClr val="34465D"/>
+                  <a:srgbClr val="D4DCE6"/>
                 </a:solidFill>
                 <a:prstDash val="solid"/>
                 <a:miter/>
@@ -13114,7 +13114,7 @@
                 <a:r>
                   <a:rPr lang="en-US" sz="1425" strike="noStrike" u="none">
                     <a:solidFill>
-                      <a:srgbClr val="F4F7FB"/>
+                      <a:srgbClr val="1B2A3F"/>
                     </a:solidFill>
                     <a:latin typeface="IBM Plex Sans"/>
                     <a:ea typeface="IBM Plex Sans"/>
@@ -13136,7 +13136,7 @@
                 <a:r>
                   <a:rPr lang="en-US" sz="1425" strike="noStrike" u="none">
                     <a:solidFill>
-                      <a:srgbClr val="F4F7FB"/>
+                      <a:srgbClr val="1B2A3F"/>
                     </a:solidFill>
                     <a:latin typeface="IBM Plex Sans"/>
                     <a:ea typeface="IBM Plex Sans"/>
@@ -13351,11 +13351,11 @@
                 </a:pathLst>
               </a:custGeom>
               <a:solidFill>
-                <a:srgbClr val="192A42"/>
+                <a:srgbClr val="FFFFFF"/>
               </a:solidFill>
               <a:ln w="9525" cap="sq">
                 <a:solidFill>
-                  <a:srgbClr val="34465D"/>
+                  <a:srgbClr val="D4DCE6"/>
                 </a:solidFill>
                 <a:prstDash val="solid"/>
                 <a:miter/>
@@ -13392,7 +13392,7 @@
                 <a:r>
                   <a:rPr lang="en-US" sz="1425" strike="noStrike" u="none">
                     <a:solidFill>
-                      <a:srgbClr val="F4F7FB"/>
+                      <a:srgbClr val="1B2A3F"/>
                     </a:solidFill>
                     <a:latin typeface="IBM Plex Sans"/>
                     <a:ea typeface="IBM Plex Sans"/>
@@ -13455,11 +13455,11 @@
                 </a:pathLst>
               </a:custGeom>
               <a:solidFill>
-                <a:srgbClr val="192A42"/>
+                <a:srgbClr val="FFFFFF"/>
               </a:solidFill>
               <a:ln w="9525" cap="sq">
                 <a:solidFill>
-                  <a:srgbClr val="34465D"/>
+                  <a:srgbClr val="D4DCE6"/>
                 </a:solidFill>
                 <a:prstDash val="solid"/>
                 <a:miter/>
@@ -13496,7 +13496,7 @@
                 <a:r>
                   <a:rPr lang="en-US" sz="1425" strike="noStrike" u="none">
                     <a:solidFill>
-                      <a:srgbClr val="F4F7FB"/>
+                      <a:srgbClr val="1B2A3F"/>
                     </a:solidFill>
                     <a:latin typeface="IBM Plex Sans"/>
                     <a:ea typeface="IBM Plex Sans"/>
@@ -13711,11 +13711,11 @@
                 </a:pathLst>
               </a:custGeom>
               <a:solidFill>
-                <a:srgbClr val="192A42"/>
+                <a:srgbClr val="FFFFFF"/>
               </a:solidFill>
               <a:ln w="9525" cap="sq">
                 <a:solidFill>
-                  <a:srgbClr val="34465D"/>
+                  <a:srgbClr val="D4DCE6"/>
                 </a:solidFill>
                 <a:prstDash val="solid"/>
                 <a:miter/>
@@ -13752,7 +13752,7 @@
                 <a:r>
                   <a:rPr lang="en-US" sz="1425" strike="noStrike" u="none">
                     <a:solidFill>
-                      <a:srgbClr val="F4F7FB"/>
+                      <a:srgbClr val="1B2A3F"/>
                     </a:solidFill>
                     <a:latin typeface="IBM Plex Sans"/>
                     <a:ea typeface="IBM Plex Sans"/>
@@ -13967,11 +13967,11 @@
                 </a:pathLst>
               </a:custGeom>
               <a:solidFill>
-                <a:srgbClr val="192A42"/>
+                <a:srgbClr val="FFFFFF"/>
               </a:solidFill>
               <a:ln w="9525" cap="sq">
                 <a:solidFill>
-                  <a:srgbClr val="34465D"/>
+                  <a:srgbClr val="D4DCE6"/>
                 </a:solidFill>
                 <a:prstDash val="solid"/>
                 <a:miter/>
@@ -14008,7 +14008,7 @@
                 <a:r>
                   <a:rPr lang="en-US" sz="1425" strike="noStrike" u="none">
                     <a:solidFill>
-                      <a:srgbClr val="F4F7FB"/>
+                      <a:srgbClr val="1B2A3F"/>
                     </a:solidFill>
                     <a:latin typeface="JetBrains Mono"/>
                     <a:ea typeface="JetBrains Mono"/>
@@ -14030,7 +14030,7 @@
                 <a:r>
                   <a:rPr lang="en-US" sz="1425" strike="noStrike" u="none">
                     <a:solidFill>
-                      <a:srgbClr val="F4F7FB"/>
+                      <a:srgbClr val="1B2A3F"/>
                     </a:solidFill>
                     <a:latin typeface="JetBrains Mono"/>
                     <a:ea typeface="JetBrains Mono"/>
@@ -14244,11 +14244,11 @@
               </a:pathLst>
             </a:custGeom>
             <a:solidFill>
-              <a:srgbClr val="16243A"/>
+              <a:srgbClr val="FFFFFF"/>
             </a:solidFill>
             <a:ln w="9525" cap="sq">
               <a:solidFill>
-                <a:srgbClr val="34465D"/>
+                <a:srgbClr val="D4DCE6"/>
               </a:solidFill>
               <a:prstDash val="lgDash"/>
               <a:miter/>
@@ -14315,7 +14315,7 @@
             <a:r>
               <a:rPr lang="en-US" sz="2250" strike="noStrike" u="none">
                 <a:solidFill>
-                  <a:srgbClr val="F4F7FB"/>
+                  <a:srgbClr val="3C4A5C"/>
                 </a:solidFill>
                 <a:latin typeface="JetBrains Mono"/>
                 <a:ea typeface="JetBrains Mono"/>
@@ -14347,7 +14347,7 @@
             <a:r>
               <a:rPr lang="en-US" sz="2250" strike="noStrike" u="none">
                 <a:solidFill>
-                  <a:srgbClr val="F4F7FB"/>
+                  <a:srgbClr val="3C4A5C"/>
                 </a:solidFill>
                 <a:latin typeface="JetBrains Mono"/>
                 <a:ea typeface="JetBrains Mono"/>
@@ -14373,7 +14373,7 @@
     <p:bg>
       <p:bgPr>
         <a:solidFill>
-          <a:srgbClr val="0F1C2E"/>
+          <a:srgbClr val="F7F9FC"/>
         </a:solidFill>
       </p:bgPr>
     </p:bg>
@@ -14507,7 +14507,7 @@
             <a:r>
               <a:rPr lang="en-US" sz="1350">
                 <a:solidFill>
-                  <a:srgbClr val="AAB6C6"/>
+                  <a:srgbClr val="8A98AA"/>
                 </a:solidFill>
                 <a:latin typeface="JetBrains Mono"/>
                 <a:ea typeface="JetBrains Mono"/>
@@ -14548,7 +14548,7 @@
             <a:r>
               <a:rPr lang="en-US" sz="4800" b="true">
                 <a:solidFill>
-                  <a:srgbClr val="F4F7FB"/>
+                  <a:srgbClr val="1B2A3F"/>
                 </a:solidFill>
                 <a:latin typeface="IBM Plex Sans Bold"/>
                 <a:ea typeface="IBM Plex Sans Bold"/>
@@ -14624,11 +14624,11 @@
                 </a:pathLst>
               </a:custGeom>
               <a:solidFill>
-                <a:srgbClr val="192A42"/>
+                <a:srgbClr val="FFFFFF"/>
               </a:solidFill>
               <a:ln w="9525" cap="sq">
                 <a:solidFill>
-                  <a:srgbClr val="34465D"/>
+                  <a:srgbClr val="D4DCE6"/>
                 </a:solidFill>
                 <a:prstDash val="solid"/>
                 <a:miter/>
@@ -14679,7 +14679,7 @@
             </a:prstGeom>
             <a:ln cap="flat" w="12700">
               <a:solidFill>
-                <a:srgbClr val="34465D"/>
+                <a:srgbClr val="D4DCE6"/>
               </a:solidFill>
               <a:prstDash val="solid"/>
               <a:headEnd type="none" len="sm" w="sm"/>
@@ -14703,7 +14703,7 @@
             </a:prstGeom>
             <a:ln cap="flat" w="12700">
               <a:solidFill>
-                <a:srgbClr val="34465D"/>
+                <a:srgbClr val="D4DCE6"/>
               </a:solidFill>
               <a:prstDash val="solid"/>
               <a:headEnd type="none" len="sm" w="sm"/>
@@ -14727,7 +14727,7 @@
             </a:prstGeom>
             <a:ln cap="flat" w="12700">
               <a:solidFill>
-                <a:srgbClr val="34465D"/>
+                <a:srgbClr val="D4DCE6"/>
               </a:solidFill>
               <a:prstDash val="solid"/>
               <a:headEnd type="none" len="sm" w="sm"/>
@@ -14751,7 +14751,7 @@
             </a:prstGeom>
             <a:ln cap="flat" w="12700">
               <a:solidFill>
-                <a:srgbClr val="34465D"/>
+                <a:srgbClr val="D4DCE6"/>
               </a:solidFill>
               <a:prstDash val="solid"/>
               <a:headEnd type="none" len="sm" w="sm"/>
@@ -14799,7 +14799,7 @@
             </a:prstGeom>
             <a:ln cap="flat" w="12700">
               <a:solidFill>
-                <a:srgbClr val="34465D"/>
+                <a:srgbClr val="D4DCE6"/>
               </a:solidFill>
               <a:prstDash val="solid"/>
               <a:headEnd type="none" len="sm" w="sm"/>
@@ -14823,7 +14823,7 @@
             </a:prstGeom>
             <a:ln cap="flat" w="12700">
               <a:solidFill>
-                <a:srgbClr val="34465D"/>
+                <a:srgbClr val="D4DCE6"/>
               </a:solidFill>
               <a:prstDash val="solid"/>
               <a:headEnd type="none" len="sm" w="sm"/>
@@ -14847,7 +14847,7 @@
             </a:prstGeom>
             <a:ln cap="flat" w="12700">
               <a:solidFill>
-                <a:srgbClr val="34465D"/>
+                <a:srgbClr val="D4DCE6"/>
               </a:solidFill>
               <a:prstDash val="solid"/>
               <a:headEnd type="none" len="sm" w="sm"/>
@@ -14871,7 +14871,7 @@
             </a:prstGeom>
             <a:ln cap="flat" w="12700">
               <a:solidFill>
-                <a:srgbClr val="34465D"/>
+                <a:srgbClr val="D4DCE6"/>
               </a:solidFill>
               <a:prstDash val="solid"/>
               <a:headEnd type="none" len="sm" w="sm"/>
@@ -14930,7 +14930,7 @@
               </a:custGeom>
               <a:solidFill>
                 <a:srgbClr val="C0392B">
-                  <a:alpha val="17647"/>
+                  <a:alpha val="9804"/>
                 </a:srgbClr>
               </a:solidFill>
               <a:ln cap="sq">
@@ -15205,7 +15205,7 @@
               <a:r>
                 <a:rPr lang="en-US" sz="1575" strike="noStrike" u="none">
                   <a:solidFill>
-                    <a:srgbClr val="AAB6C6"/>
+                    <a:srgbClr val="3C4A5C"/>
                   </a:solidFill>
                   <a:latin typeface="JetBrains Mono"/>
                   <a:ea typeface="JetBrains Mono"/>
@@ -15249,7 +15249,7 @@
               <a:r>
                 <a:rPr lang="en-US" sz="1575" strike="noStrike" u="none">
                   <a:solidFill>
-                    <a:srgbClr val="AAB6C6"/>
+                    <a:srgbClr val="3C4A5C"/>
                   </a:solidFill>
                   <a:latin typeface="IBM Plex Sans"/>
                   <a:ea typeface="IBM Plex Sans"/>
@@ -15293,7 +15293,7 @@
               <a:r>
                 <a:rPr lang="en-US" sz="1575" strike="noStrike" u="none">
                   <a:solidFill>
-                    <a:srgbClr val="AAB6C6"/>
+                    <a:srgbClr val="3C4A5C"/>
                   </a:solidFill>
                   <a:latin typeface="IBM Plex Sans"/>
                   <a:ea typeface="IBM Plex Sans"/>
@@ -15337,7 +15337,7 @@
               <a:r>
                 <a:rPr lang="en-US" sz="1575" strike="noStrike" u="none">
                   <a:solidFill>
-                    <a:srgbClr val="AAB6C6"/>
+                    <a:srgbClr val="3C4A5C"/>
                   </a:solidFill>
                   <a:latin typeface="JetBrains Mono"/>
                   <a:ea typeface="JetBrains Mono"/>
@@ -15381,7 +15381,7 @@
               <a:r>
                 <a:rPr lang="en-US" sz="1575" strike="noStrike" u="none">
                   <a:solidFill>
-                    <a:srgbClr val="AAB6C6"/>
+                    <a:srgbClr val="3C4A5C"/>
                   </a:solidFill>
                   <a:latin typeface="JetBrains Mono"/>
                   <a:ea typeface="JetBrains Mono"/>
@@ -15425,7 +15425,7 @@
               <a:r>
                 <a:rPr lang="en-US" sz="1575" strike="noStrike" u="none">
                   <a:solidFill>
-                    <a:srgbClr val="AAB6C6"/>
+                    <a:srgbClr val="3C4A5C"/>
                   </a:solidFill>
                   <a:latin typeface="JetBrains Mono"/>
                   <a:ea typeface="JetBrains Mono"/>
@@ -15469,7 +15469,7 @@
               <a:r>
                 <a:rPr lang="en-US" sz="1575" strike="noStrike" u="none">
                   <a:solidFill>
-                    <a:srgbClr val="AAB6C6"/>
+                    <a:srgbClr val="3C4A5C"/>
                   </a:solidFill>
                   <a:latin typeface="IBM Plex Sans"/>
                   <a:ea typeface="IBM Plex Sans"/>
@@ -15513,7 +15513,7 @@
               <a:r>
                 <a:rPr lang="en-US" sz="1575" strike="noStrike" u="none">
                   <a:solidFill>
-                    <a:srgbClr val="AAB6C6"/>
+                    <a:srgbClr val="3C4A5C"/>
                   </a:solidFill>
                   <a:latin typeface="IBM Plex Sans"/>
                   <a:ea typeface="IBM Plex Sans"/>
@@ -15557,7 +15557,7 @@
               <a:r>
                 <a:rPr lang="en-US" sz="1575" strike="noStrike" u="none">
                   <a:solidFill>
-                    <a:srgbClr val="AAB6C6"/>
+                    <a:srgbClr val="3C4A5C"/>
                   </a:solidFill>
                   <a:latin typeface="JetBrains Mono"/>
                   <a:ea typeface="JetBrains Mono"/>
@@ -15601,7 +15601,7 @@
               <a:r>
                 <a:rPr lang="en-US" sz="1575" strike="noStrike" u="none">
                   <a:solidFill>
-                    <a:srgbClr val="AAB6C6"/>
+                    <a:srgbClr val="3C4A5C"/>
                   </a:solidFill>
                   <a:latin typeface="JetBrains Mono"/>
                   <a:ea typeface="JetBrains Mono"/>
@@ -15645,7 +15645,7 @@
               <a:r>
                 <a:rPr lang="en-US" sz="1575" strike="noStrike" u="none">
                   <a:solidFill>
-                    <a:srgbClr val="AAB6C6"/>
+                    <a:srgbClr val="3C4A5C"/>
                   </a:solidFill>
                   <a:latin typeface="JetBrains Mono"/>
                   <a:ea typeface="JetBrains Mono"/>
@@ -15689,7 +15689,7 @@
               <a:r>
                 <a:rPr lang="en-US" sz="1575" strike="noStrike" u="none">
                   <a:solidFill>
-                    <a:srgbClr val="AAB6C6"/>
+                    <a:srgbClr val="3C4A5C"/>
                   </a:solidFill>
                   <a:latin typeface="IBM Plex Sans"/>
                   <a:ea typeface="IBM Plex Sans"/>
@@ -15733,7 +15733,7 @@
               <a:r>
                 <a:rPr lang="en-US" sz="1575" strike="noStrike" u="none">
                   <a:solidFill>
-                    <a:srgbClr val="AAB6C6"/>
+                    <a:srgbClr val="3C4A5C"/>
                   </a:solidFill>
                   <a:latin typeface="IBM Plex Sans"/>
                   <a:ea typeface="IBM Plex Sans"/>
@@ -15777,7 +15777,7 @@
               <a:r>
                 <a:rPr lang="en-US" sz="1575" strike="noStrike" u="none">
                   <a:solidFill>
-                    <a:srgbClr val="AAB6C6"/>
+                    <a:srgbClr val="3C4A5C"/>
                   </a:solidFill>
                   <a:latin typeface="JetBrains Mono"/>
                   <a:ea typeface="JetBrains Mono"/>
@@ -15821,7 +15821,7 @@
               <a:r>
                 <a:rPr lang="en-US" sz="1575" strike="noStrike" u="none">
                   <a:solidFill>
-                    <a:srgbClr val="AAB6C6"/>
+                    <a:srgbClr val="3C4A5C"/>
                   </a:solidFill>
                   <a:latin typeface="JetBrains Mono"/>
                   <a:ea typeface="JetBrains Mono"/>
@@ -15865,7 +15865,7 @@
               <a:r>
                 <a:rPr lang="en-US" sz="1575" strike="noStrike" u="none">
                   <a:solidFill>
-                    <a:srgbClr val="AAB6C6"/>
+                    <a:srgbClr val="3C4A5C"/>
                   </a:solidFill>
                   <a:latin typeface="JetBrains Mono"/>
                   <a:ea typeface="JetBrains Mono"/>
@@ -15909,7 +15909,7 @@
               <a:r>
                 <a:rPr lang="en-US" sz="1575" strike="noStrike" u="none">
                   <a:solidFill>
-                    <a:srgbClr val="AAB6C6"/>
+                    <a:srgbClr val="3C4A5C"/>
                   </a:solidFill>
                   <a:latin typeface="IBM Plex Sans"/>
                   <a:ea typeface="IBM Plex Sans"/>
@@ -15953,7 +15953,7 @@
               <a:r>
                 <a:rPr lang="en-US" sz="1575" strike="noStrike" u="none">
                   <a:solidFill>
-                    <a:srgbClr val="AAB6C6"/>
+                    <a:srgbClr val="3C4A5C"/>
                   </a:solidFill>
                   <a:latin typeface="IBM Plex Sans"/>
                   <a:ea typeface="IBM Plex Sans"/>
@@ -15997,7 +15997,7 @@
               <a:r>
                 <a:rPr lang="en-US" sz="1575" strike="noStrike" u="none">
                   <a:solidFill>
-                    <a:srgbClr val="AAB6C6"/>
+                    <a:srgbClr val="3C4A5C"/>
                   </a:solidFill>
                   <a:latin typeface="JetBrains Mono"/>
                   <a:ea typeface="JetBrains Mono"/>
@@ -16041,7 +16041,7 @@
               <a:r>
                 <a:rPr lang="en-US" sz="1575" strike="noStrike" u="none">
                   <a:solidFill>
-                    <a:srgbClr val="AAB6C6"/>
+                    <a:srgbClr val="3C4A5C"/>
                   </a:solidFill>
                   <a:latin typeface="JetBrains Mono"/>
                   <a:ea typeface="JetBrains Mono"/>
@@ -16085,7 +16085,7 @@
               <a:r>
                 <a:rPr lang="en-US" b="true" sz="1575" strike="noStrike" u="none">
                   <a:solidFill>
-                    <a:srgbClr val="F4F7FB"/>
+                    <a:srgbClr val="1B2A3F"/>
                   </a:solidFill>
                   <a:latin typeface="JetBrains Mono Bold"/>
                   <a:ea typeface="JetBrains Mono Bold"/>
@@ -16129,7 +16129,7 @@
               <a:r>
                 <a:rPr lang="en-US" b="true" sz="1575" strike="noStrike" u="none">
                   <a:solidFill>
-                    <a:srgbClr val="F4F7FB"/>
+                    <a:srgbClr val="1B2A3F"/>
                   </a:solidFill>
                   <a:latin typeface="IBM Plex Sans Bold"/>
                   <a:ea typeface="IBM Plex Sans Bold"/>
@@ -16173,7 +16173,7 @@
               <a:r>
                 <a:rPr lang="en-US" b="true" sz="1575" strike="noStrike" u="none">
                   <a:solidFill>
-                    <a:srgbClr val="F4F7FB"/>
+                    <a:srgbClr val="1B2A3F"/>
                   </a:solidFill>
                   <a:latin typeface="IBM Plex Sans Bold"/>
                   <a:ea typeface="IBM Plex Sans Bold"/>
@@ -16217,7 +16217,7 @@
               <a:r>
                 <a:rPr lang="en-US" b="true" sz="1575" strike="noStrike" u="none">
                   <a:solidFill>
-                    <a:srgbClr val="F4F7FB"/>
+                    <a:srgbClr val="1B2A3F"/>
                   </a:solidFill>
                   <a:latin typeface="JetBrains Mono Bold"/>
                   <a:ea typeface="JetBrains Mono Bold"/>
@@ -16261,7 +16261,7 @@
               <a:r>
                 <a:rPr lang="en-US" b="true" sz="1575" strike="noStrike" u="none">
                   <a:solidFill>
-                    <a:srgbClr val="F4F7FB"/>
+                    <a:srgbClr val="1B2A3F"/>
                   </a:solidFill>
                   <a:latin typeface="JetBrains Mono Bold"/>
                   <a:ea typeface="JetBrains Mono Bold"/>
@@ -16288,7 +16288,7 @@
     <p:bg>
       <p:bgPr>
         <a:solidFill>
-          <a:srgbClr val="16243A"/>
+          <a:srgbClr val="EDF1F6"/>
         </a:solidFill>
       </p:bgPr>
     </p:bg>
@@ -16422,7 +16422,7 @@
             <a:r>
               <a:rPr lang="en-US" sz="1350">
                 <a:solidFill>
-                  <a:srgbClr val="AAB6C6"/>
+                  <a:srgbClr val="8A98AA"/>
                 </a:solidFill>
                 <a:latin typeface="JetBrains Mono"/>
                 <a:ea typeface="JetBrains Mono"/>
@@ -16463,7 +16463,7 @@
             <a:r>
               <a:rPr lang="en-US" b="true" sz="15750" spc="1260">
                 <a:solidFill>
-                  <a:srgbClr val="F4F7FB"/>
+                  <a:srgbClr val="1B2A3F"/>
                 </a:solidFill>
                 <a:latin typeface="IBM Plex Sans Bold"/>
                 <a:ea typeface="IBM Plex Sans Bold"/>
@@ -16620,7 +16620,7 @@
     <p:bg>
       <p:bgPr>
         <a:solidFill>
-          <a:srgbClr val="0F1C2E"/>
+          <a:srgbClr val="F7F9FC"/>
         </a:solidFill>
       </p:bgPr>
     </p:bg>
@@ -16754,7 +16754,7 @@
             <a:r>
               <a:rPr lang="en-US" sz="1350">
                 <a:solidFill>
-                  <a:srgbClr val="AAB6C6"/>
+                  <a:srgbClr val="8A98AA"/>
                 </a:solidFill>
                 <a:latin typeface="JetBrains Mono"/>
                 <a:ea typeface="JetBrains Mono"/>
@@ -16795,7 +16795,7 @@
             <a:r>
               <a:rPr lang="en-US" sz="4800" b="true">
                 <a:solidFill>
-                  <a:srgbClr val="F4F7FB"/>
+                  <a:srgbClr val="1B2A3F"/>
                 </a:solidFill>
                 <a:latin typeface="IBM Plex Sans Bold"/>
                 <a:ea typeface="IBM Plex Sans Bold"/>
@@ -16836,7 +16836,7 @@
             <a:r>
               <a:rPr lang="en-US" sz="12750" b="true">
                 <a:solidFill>
-                  <a:srgbClr val="F4F7FB"/>
+                  <a:srgbClr val="1B2A3F"/>
                 </a:solidFill>
                 <a:latin typeface="JetBrains Mono Bold"/>
                 <a:ea typeface="JetBrains Mono Bold"/>
@@ -16986,11 +16986,11 @@
               </a:pathLst>
             </a:custGeom>
             <a:solidFill>
-              <a:srgbClr val="0F1C2E"/>
+              <a:srgbClr val="FFFFFF"/>
             </a:solidFill>
             <a:ln w="9525" cap="sq">
               <a:solidFill>
-                <a:srgbClr val="34465D"/>
+                <a:srgbClr val="D4DCE6"/>
               </a:solidFill>
               <a:prstDash val="lgDash"/>
               <a:miter/>
@@ -17057,7 +17057,7 @@
             <a:r>
               <a:rPr lang="en-US" sz="1650" strike="noStrike" u="none">
                 <a:solidFill>
-                  <a:srgbClr val="34465D"/>
+                  <a:srgbClr val="8A98AA"/>
                 </a:solidFill>
                 <a:latin typeface="JetBrains Mono"/>
                 <a:ea typeface="JetBrains Mono"/>
@@ -17098,7 +17098,7 @@
             <a:r>
               <a:rPr lang="en-US" sz="1425">
                 <a:solidFill>
-                  <a:srgbClr val="AAB6C6"/>
+                  <a:srgbClr val="3C4A5C"/>
                 </a:solidFill>
                 <a:latin typeface="Arimo"/>
                 <a:ea typeface="Arimo"/>
@@ -17124,7 +17124,7 @@
             <a:r>
               <a:rPr lang="en-US" sz="1425">
                 <a:solidFill>
-                  <a:srgbClr val="AAB6C6"/>
+                  <a:srgbClr val="3C4A5C"/>
                 </a:solidFill>
                 <a:latin typeface="Arimo"/>
                 <a:ea typeface="Arimo"/>
@@ -17143,7 +17143,7 @@
             <a:r>
               <a:rPr lang="en-US" sz="1425">
                 <a:solidFill>
-                  <a:srgbClr val="AAB6C6"/>
+                  <a:srgbClr val="3C4A5C"/>
                 </a:solidFill>
                 <a:latin typeface="Arimo"/>
                 <a:ea typeface="Arimo"/>
@@ -17162,7 +17162,7 @@
             <a:r>
               <a:rPr lang="en-US" sz="1425">
                 <a:solidFill>
-                  <a:srgbClr val="AAB6C6"/>
+                  <a:srgbClr val="3C4A5C"/>
                 </a:solidFill>
                 <a:latin typeface="Arimo"/>
                 <a:ea typeface="Arimo"/>
@@ -17181,7 +17181,7 @@
             <a:r>
               <a:rPr lang="en-US" sz="1425">
                 <a:solidFill>
-                  <a:srgbClr val="AAB6C6"/>
+                  <a:srgbClr val="3C4A5C"/>
                 </a:solidFill>
                 <a:latin typeface="Arimo"/>
                 <a:ea typeface="Arimo"/>
@@ -17200,7 +17200,7 @@
             <a:r>
               <a:rPr lang="en-US" sz="1425">
                 <a:solidFill>
-                  <a:srgbClr val="AAB6C6"/>
+                  <a:srgbClr val="3C4A5C"/>
                 </a:solidFill>
                 <a:latin typeface="Arimo"/>
                 <a:ea typeface="Arimo"/>
@@ -17219,7 +17219,7 @@
             <a:r>
               <a:rPr lang="en-US" sz="1425">
                 <a:solidFill>
-                  <a:srgbClr val="AAB6C6"/>
+                  <a:srgbClr val="3C4A5C"/>
                 </a:solidFill>
                 <a:latin typeface="Arimo"/>
                 <a:ea typeface="Arimo"/>
@@ -17238,7 +17238,7 @@
             <a:r>
               <a:rPr lang="en-US" sz="1425">
                 <a:solidFill>
-                  <a:srgbClr val="AAB6C6"/>
+                  <a:srgbClr val="3C4A5C"/>
                 </a:solidFill>
                 <a:latin typeface="Arimo"/>
                 <a:ea typeface="Arimo"/>
@@ -17257,7 +17257,7 @@
             <a:r>
               <a:rPr lang="en-US" sz="1425">
                 <a:solidFill>
-                  <a:srgbClr val="AAB6C6"/>
+                  <a:srgbClr val="3C4A5C"/>
                 </a:solidFill>
                 <a:latin typeface="Arimo"/>
                 <a:ea typeface="Arimo"/>
@@ -17276,7 +17276,7 @@
             <a:r>
               <a:rPr lang="en-US" sz="1425">
                 <a:solidFill>
-                  <a:srgbClr val="AAB6C6"/>
+                  <a:srgbClr val="3C4A5C"/>
                 </a:solidFill>
                 <a:latin typeface="Arimo"/>
                 <a:ea typeface="Arimo"/>
@@ -17295,7 +17295,7 @@
             <a:r>
               <a:rPr lang="en-US" sz="1425">
                 <a:solidFill>
-                  <a:srgbClr val="AAB6C6"/>
+                  <a:srgbClr val="3C4A5C"/>
                 </a:solidFill>
                 <a:latin typeface="Arimo"/>
                 <a:ea typeface="Arimo"/>
@@ -17314,7 +17314,7 @@
             <a:r>
               <a:rPr lang="en-US" sz="1425">
                 <a:solidFill>
-                  <a:srgbClr val="AAB6C6"/>
+                  <a:srgbClr val="3C4A5C"/>
                 </a:solidFill>
                 <a:latin typeface="Arimo"/>
                 <a:ea typeface="Arimo"/>
@@ -17340,7 +17340,7 @@
             <a:r>
               <a:rPr lang="en-US" sz="1425">
                 <a:solidFill>
-                  <a:srgbClr val="AAB6C6"/>
+                  <a:srgbClr val="3C4A5C"/>
                 </a:solidFill>
                 <a:latin typeface="Arimo"/>
                 <a:ea typeface="Arimo"/>

--- a/docs/SLIDE.pptx
+++ b/docs/SLIDE.pptx
@@ -2981,7 +2981,7 @@
           <a:p>
             <a:r>
               <a:rPr lang="en-US"/>
-              <a:t>5 GIÂY. "Chuyển sang màn hình live."</a:t>
+              <a:t>5 GIÂY. "Em xin chuyển sang demo trực tiếp."</a:t>
             </a:r>
           </a:p>
           <a:p>
@@ -2993,31 +2993,31 @@
           <a:p>
             <a:r>
               <a:rPr lang="en-US"/>
-              <a:t>DEMO 4 PHÚT theo docs/KICH_BAN_7P.md:</a:t>
+              <a:t>DEMO ~3 PHÚT, 2 CẢNH (docs/KICH_BAN_7P.md, lệnh ở docs/LENH_DEMO.txt):</a:t>
             </a:r>
           </a:p>
           <a:p>
             <a:r>
               <a:rPr lang="en-US"/>
-              <a:t>  D1 0:00–0:25  phân vùng (2 lệnh)</a:t>
+              <a:t>  Cảnh 0  0:00–0:15  docker compose ps — chỉ waf có "-&gt;"</a:t>
             </a:r>
           </a:p>
           <a:p>
             <a:r>
               <a:rPr lang="en-US"/>
-              <a:t>  D2 0:25–1:10  sửa điểm hợp lệ + step-up OTP</a:t>
+              <a:t>  Cảnh 1  0:15–1:15  KB2 cookie: curl.exe với $c → SESSION_CONTEXT_MISMATCH → gv01 bị đá ra → CRITICAL</a:t>
             </a:r>
           </a:p>
           <a:p>
             <a:r>
               <a:rPr lang="en-US"/>
-              <a:t>  D3 1:10–2:20  KB2 đánh cắp cookie</a:t>
+              <a:t>  Cảnh 2  1:15–2:35  KB6: toàn vẹn sạch → UPDATE DB → DB=10 / log=8.5 → DELETE bị permission denied</a:t>
             </a:r>
           </a:p>
           <a:p>
             <a:r>
               <a:rPr lang="en-US"/>
-              <a:t>  D4 2:20–3:45  KB6 insider sửa DB</a:t>
+              <a:t>  Cảnh 3  2:35–2:50  "25/25 PASS, bốn kịch bản còn lại chạy được ngay"</a:t>
             </a:r>
           </a:p>
           <a:p>
@@ -3029,13 +3029,37 @@
           <a:p>
             <a:r>
               <a:rPr lang="en-US"/>
-              <a:t>KB1 / KB3 / KB4 / KB5 để dành cho hỏi đáp.</a:t>
+              <a:t>NHỚ TRƯỚC KHI BẤM GIỜ:</a:t>
             </a:r>
           </a:p>
           <a:p>
             <a:r>
               <a:rPr lang="en-US"/>
-              <a:t>NHỚ TRƯỚC KHI BẤM GIỜ: gv01 và admin đã đăng nhập sẵn, đã chạy docker compose restart app, lệnh dán sẵn trong file text.</a:t>
+              <a:t>  - đã chạy node scripts/reset-demo.mjs</a:t>
+            </a:r>
+          </a:p>
+          <a:p>
+            <a:r>
+              <a:rPr lang="en-US"/>
+              <a:t>  - admin ở cửa sổ ẨN DANH, gv01 ở cửa sổ THƯỜNG</a:t>
+            </a:r>
+          </a:p>
+          <a:p>
+            <a:r>
+              <a:rPr lang="en-US"/>
+              <a:t>  - cookie gv01 đã cất vào $c, chạy cảnh 1 trong 15 phút</a:t>
+            </a:r>
+          </a:p>
+          <a:p>
+            <a:r>
+              <a:rPr lang="en-US"/>
+              <a:t/>
+            </a:r>
+          </a:p>
+          <a:p>
+            <a:r>
+              <a:rPr lang="en-US"/>
+              <a:t>cls trước mỗi lệnh. Ra kết quả thì DỪNG 3 GIÂY rồi mới nói.</a:t>
             </a:r>
           </a:p>
         </p:txBody>
@@ -6620,8 +6644,8 @@
         </p:nvSpPr>
         <p:spPr>
           <a:xfrm rot="0">
-            <a:off x="1047750" y="6229350"/>
-            <a:ext cx="10953750" cy="2091690"/>
+            <a:off x="1047750" y="5347212"/>
+            <a:ext cx="10953750" cy="3493036"/>
           </a:xfrm>
           <a:prstGeom prst="rect">
             <a:avLst/>
@@ -6635,14 +6659,14 @@
           <a:p>
             <a:pPr algn="l" marL="0" indent="0" lvl="0">
               <a:lnSpc>
-                <a:spcPts val="2790"/>
+                <a:spcPts val="3099"/>
               </a:lnSpc>
               <a:spcBef>
                 <a:spcPct val="0"/>
               </a:spcBef>
             </a:pPr>
             <a:r>
-              <a:rPr lang="en-US" sz="1800" strike="noStrike" u="none">
+              <a:rPr lang="en-US" sz="1999" strike="noStrike" u="none">
                 <a:solidFill>
                   <a:srgbClr val="3C4A5C"/>
                 </a:solidFill>
@@ -6657,14 +6681,14 @@
           <a:p>
             <a:pPr algn="l" marL="0" indent="0" lvl="0">
               <a:lnSpc>
-                <a:spcPts val="2790"/>
+                <a:spcPts val="3099"/>
               </a:lnSpc>
               <a:spcBef>
                 <a:spcPct val="0"/>
               </a:spcBef>
             </a:pPr>
             <a:r>
-              <a:rPr lang="en-US" sz="1800" strike="noStrike" u="none">
+              <a:rPr lang="en-US" sz="1999" strike="noStrike" u="none">
                 <a:solidFill>
                   <a:srgbClr val="3C4A5C"/>
                 </a:solidFill>
@@ -6679,7 +6703,7 @@
           <a:p>
             <a:pPr algn="l" marL="0" indent="0" lvl="0">
               <a:lnSpc>
-                <a:spcPts val="2790"/>
+                <a:spcPts val="3099"/>
               </a:lnSpc>
               <a:spcBef>
                 <a:spcPct val="0"/>
@@ -6689,14 +6713,14 @@
           <a:p>
             <a:pPr algn="l" marL="0" indent="0" lvl="0">
               <a:lnSpc>
-                <a:spcPts val="2790"/>
+                <a:spcPts val="3099"/>
               </a:lnSpc>
               <a:spcBef>
                 <a:spcPct val="0"/>
               </a:spcBef>
             </a:pPr>
             <a:r>
-              <a:rPr lang="en-US" sz="1800" strike="noStrike" u="none">
+              <a:rPr lang="en-US" sz="1999" strike="noStrike" u="none">
                 <a:solidFill>
                   <a:srgbClr val="3C4A5C"/>
                 </a:solidFill>
@@ -6705,20 +6729,20 @@
                 <a:cs typeface="JetBrains Mono"/>
                 <a:sym typeface="JetBrains Mono"/>
               </a:rPr>
-              <a:t>Nhóm: ____________________</a:t>
+              <a:t>Nhóm: 5</a:t>
             </a:r>
           </a:p>
           <a:p>
             <a:pPr algn="l" marL="0" indent="0" lvl="0">
               <a:lnSpc>
-                <a:spcPts val="2790"/>
+                <a:spcPts val="3099"/>
               </a:lnSpc>
               <a:spcBef>
                 <a:spcPct val="0"/>
               </a:spcBef>
             </a:pPr>
             <a:r>
-              <a:rPr lang="en-US" sz="1800" strike="noStrike" u="none">
+              <a:rPr lang="en-US" sz="1999" strike="noStrike" u="none">
                 <a:solidFill>
                   <a:srgbClr val="3C4A5C"/>
                 </a:solidFill>
@@ -6727,20 +6751,20 @@
                 <a:cs typeface="JetBrains Mono"/>
                 <a:sym typeface="JetBrains Mono"/>
               </a:rPr>
-              <a:t>Thành viên: ____________________</a:t>
+              <a:t>Thành viên: Trần Trung Hiếu    1150080052</a:t>
             </a:r>
           </a:p>
           <a:p>
             <a:pPr algn="l" marL="0" indent="0" lvl="0">
               <a:lnSpc>
-                <a:spcPts val="2790"/>
+                <a:spcPts val="3099"/>
               </a:lnSpc>
               <a:spcBef>
                 <a:spcPct val="0"/>
               </a:spcBef>
             </a:pPr>
             <a:r>
-              <a:rPr lang="en-US" sz="1800" strike="noStrike" u="none">
+              <a:rPr lang="en-US" sz="1999" strike="noStrike" u="none">
                 <a:solidFill>
                   <a:srgbClr val="3C4A5C"/>
                 </a:solidFill>
@@ -6749,7 +6773,73 @@
                 <a:cs typeface="JetBrains Mono"/>
                 <a:sym typeface="JetBrains Mono"/>
               </a:rPr>
-              <a:t>GVHD: ____________________</a:t>
+              <a:t>            Lưu Gia Luân       1150080060</a:t>
+            </a:r>
+          </a:p>
+          <a:p>
+            <a:pPr algn="l" marL="0" indent="0" lvl="0">
+              <a:lnSpc>
+                <a:spcPts val="3099"/>
+              </a:lnSpc>
+              <a:spcBef>
+                <a:spcPct val="0"/>
+              </a:spcBef>
+            </a:pPr>
+            <a:r>
+              <a:rPr lang="en-US" sz="1999" strike="noStrike" u="none">
+                <a:solidFill>
+                  <a:srgbClr val="3C4A5C"/>
+                </a:solidFill>
+                <a:latin typeface="JetBrains Mono"/>
+                <a:ea typeface="JetBrains Mono"/>
+                <a:cs typeface="JetBrains Mono"/>
+                <a:sym typeface="JetBrains Mono"/>
+              </a:rPr>
+              <a:t>            Lương Hào Minh     1150080066</a:t>
+            </a:r>
+          </a:p>
+          <a:p>
+            <a:pPr algn="l" marL="0" indent="0" lvl="0">
+              <a:lnSpc>
+                <a:spcPts val="3099"/>
+              </a:lnSpc>
+              <a:spcBef>
+                <a:spcPct val="0"/>
+              </a:spcBef>
+            </a:pPr>
+            <a:r>
+              <a:rPr lang="en-US" sz="1999" strike="noStrike" u="none">
+                <a:solidFill>
+                  <a:srgbClr val="3C4A5C"/>
+                </a:solidFill>
+                <a:latin typeface="JetBrains Mono"/>
+                <a:ea typeface="JetBrains Mono"/>
+                <a:cs typeface="JetBrains Mono"/>
+                <a:sym typeface="JetBrains Mono"/>
+              </a:rPr>
+              <a:t>            Trần Hồ Quang Vinh 1150080082</a:t>
+            </a:r>
+          </a:p>
+          <a:p>
+            <a:pPr algn="l" marL="0" indent="0" lvl="0">
+              <a:lnSpc>
+                <a:spcPts val="3099"/>
+              </a:lnSpc>
+              <a:spcBef>
+                <a:spcPct val="0"/>
+              </a:spcBef>
+            </a:pPr>
+            <a:r>
+              <a:rPr lang="en-US" sz="1999" strike="noStrike" u="none">
+                <a:solidFill>
+                  <a:srgbClr val="3C4A5C"/>
+                </a:solidFill>
+                <a:latin typeface="JetBrains Mono"/>
+                <a:ea typeface="JetBrains Mono"/>
+                <a:cs typeface="JetBrains Mono"/>
+                <a:sym typeface="JetBrains Mono"/>
+              </a:rPr>
+              <a:t>GVHD: Th.S Hà Châu Hoàng</a:t>
             </a:r>
           </a:p>
         </p:txBody>
@@ -9822,7 +9912,7 @@
 </file>
 
 <file path=ppt/slides/slide3.xml><?xml version="1.0" encoding="utf-8"?>
-<p:sld xmlns:p="http://schemas.openxmlformats.org/presentationml/2006/main" xmlns:a="http://schemas.openxmlformats.org/drawingml/2006/main">
+<p:sld xmlns:p="http://schemas.openxmlformats.org/presentationml/2006/main" xmlns:a="http://schemas.openxmlformats.org/drawingml/2006/main" show="false">
   <p:cSld>
     <p:bg>
       <p:bgPr>
@@ -12433,7 +12523,7 @@
 </file>
 
 <file path=ppt/slides/slide6.xml><?xml version="1.0" encoding="utf-8"?>
-<p:sld xmlns:p="http://schemas.openxmlformats.org/presentationml/2006/main" xmlns:a="http://schemas.openxmlformats.org/drawingml/2006/main">
+<p:sld xmlns:p="http://schemas.openxmlformats.org/presentationml/2006/main" xmlns:a="http://schemas.openxmlformats.org/drawingml/2006/main" show="false">
   <p:cSld>
     <p:bg>
       <p:bgPr>
@@ -16601,7 +16691,7 @@
                 <a:cs typeface="JetBrains Mono"/>
                 <a:sym typeface="JetBrains Mono"/>
               </a:rPr>
-              <a:t>Chuyển sang màn hình live  ·  KB1 → KB6 trên hệ thống đang chạy</a:t>
+              <a:t>Màn hình live  ·  KB2 đánh cắp cookie  ·  KB6 insider sửa DB</a:t>
             </a:r>
           </a:p>
         </p:txBody>

--- a/docs/SLIDE.pptx
+++ b/docs/SLIDE.pptx
@@ -5,7 +5,7 @@
     <p:sldMasterId id="2147483648" r:id="rId1"/>
   </p:sldMasterIdLst>
   <p:notesMasterIdLst>
-    <p:notesMasterId r:id="rId18"/>
+    <p:notesMasterId r:id="rId19"/>
   </p:notesMasterIdLst>
   <p:sldIdLst>
     <p:sldId id="256" r:id="rId6"/>
@@ -20,33 +20,34 @@
     <p:sldId id="265" r:id="rId15"/>
     <p:sldId id="266" r:id="rId16"/>
     <p:sldId id="267" r:id="rId17"/>
+    <p:sldId id="268" r:id="rId18"/>
   </p:sldIdLst>
   <p:sldSz cx="18288000" cy="10287000"/>
   <p:notesSz cx="6858000" cy="9144000"/>
   <p:embeddedFontLst>
     <p:embeddedFont>
       <p:font typeface="JetBrains Mono" charset="1" panose="02010509020102050004"/>
-      <p:regular r:id="rId21"/>
+      <p:regular r:id="rId22"/>
     </p:embeddedFont>
     <p:embeddedFont>
       <p:font typeface="IBM Plex Sans Bold" charset="1" panose="020B0803050203000203"/>
-      <p:regular r:id="rId22"/>
+      <p:regular r:id="rId23"/>
     </p:embeddedFont>
     <p:embeddedFont>
       <p:font typeface="IBM Plex Sans" charset="1" panose="020B0503050203000203"/>
-      <p:regular r:id="rId23"/>
+      <p:regular r:id="rId24"/>
     </p:embeddedFont>
     <p:embeddedFont>
-      <p:font typeface="JetBrains Mono Bold" charset="1" panose="02010809030102050004"/>
+      <p:font typeface="Arimo" charset="1" panose="020B0604020202020204"/>
       <p:regular r:id="rId26"/>
     </p:embeddedFont>
     <p:embeddedFont>
       <p:font typeface="Arimo Bold" charset="1" panose="020B0704020202020204"/>
-      <p:regular r:id="rId29"/>
+      <p:regular r:id="rId27"/>
     </p:embeddedFont>
     <p:embeddedFont>
-      <p:font typeface="Arimo" charset="1" panose="020B0604020202020204"/>
-      <p:regular r:id="rId34"/>
+      <p:font typeface="JetBrains Mono Bold" charset="1" panose="02010809030102050004"/>
+      <p:regular r:id="rId30"/>
     </p:embeddedFont>
   </p:embeddedFontLst>
   <p:defaultTextStyle>
@@ -857,7 +858,7 @@
           <a:p>
             <a:r>
               <a:rPr lang="en-US"/>
-              <a:t>50 GIÂY. SLIDE GHI ĐIỂM.</a:t>
+              <a:t>25 GIÂY. 25/25 PASS · 6 luồng bình thường + 19 test tấn công · phủ KB1–KB6.</a:t>
             </a:r>
           </a:p>
           <a:p>
@@ -869,37 +870,7 @@
           <a:p>
             <a:r>
               <a:rPr lang="en-US"/>
-              <a:t>Chỉ đọc ba con số:</a:t>
-            </a:r>
-          </a:p>
-          <a:p>
-            <a:r>
-              <a:rPr lang="en-US"/>
-              <a:t>  1 sửa / 30 giây</a:t>
-            </a:r>
-          </a:p>
-          <a:p>
-            <a:r>
-              <a:rPr lang="en-US"/>
-              <a:t>  PL1 chặn oan 0/15</a:t>
-            </a:r>
-          </a:p>
-          <a:p>
-            <a:r>
-              <a:rPr lang="en-US"/>
-              <a:t>  RTO 5–6 giây</a:t>
-            </a:r>
-          </a:p>
-          <a:p>
-            <a:r>
-              <a:rPr lang="en-US"/>
-              <a:t/>
-            </a:r>
-          </a:p>
-          <a:p>
-            <a:r>
-              <a:rPr lang="en-US"/>
-              <a:t>DỄ VỠ NGÂN SÁCH: đừng kể quá trình đo, chỉ đọc kết quả.</a:t>
+              <a:t>Đừng đọc từng dòng trên màn hình — để thầy tự đọc.</a:t>
             </a:r>
           </a:p>
         </p:txBody>
@@ -1111,19 +1082,7 @@
           <a:p>
             <a:r>
               <a:rPr lang="en-US"/>
-              <a:t>25 GIÂY. Đọc nhanh đúng 2 dòng:</a:t>
-            </a:r>
-          </a:p>
-          <a:p>
-            <a:r>
-              <a:rPr lang="en-US"/>
-              <a:t>  TOTP không chống AiTM → Passkey/WebAuthn</a:t>
-            </a:r>
-          </a:p>
-          <a:p>
-            <a:r>
-              <a:rPr lang="en-US"/>
-              <a:t>  Superuser DB vẫn tính lại được hash-chain → SIEM + WORM</a:t>
+              <a:t>50 GIÂY. SLIDE GHI ĐIỂM.</a:t>
             </a:r>
           </a:p>
           <a:p>
@@ -1135,13 +1094,37 @@
           <a:p>
             <a:r>
               <a:rPr lang="en-US"/>
-              <a:t>DỄ VỠ NGÂN SÁCH: đừng xin lỗi dài dòng.</a:t>
+              <a:t>Chỉ đọc ba con số:</a:t>
             </a:r>
           </a:p>
           <a:p>
             <a:r>
               <a:rPr lang="en-US"/>
-              <a:t>Nếu phần nói đã quá 6:30 thì cắt slide này còn 15 giây.</a:t>
+              <a:t>  1 sửa / 30 giây</a:t>
+            </a:r>
+          </a:p>
+          <a:p>
+            <a:r>
+              <a:rPr lang="en-US"/>
+              <a:t>  PL1 chặn oan 0/15</a:t>
+            </a:r>
+          </a:p>
+          <a:p>
+            <a:r>
+              <a:rPr lang="en-US"/>
+              <a:t>  RTO 5–6 giây</a:t>
+            </a:r>
+          </a:p>
+          <a:p>
+            <a:r>
+              <a:rPr lang="en-US"/>
+              <a:t/>
+            </a:r>
+          </a:p>
+          <a:p>
+            <a:r>
+              <a:rPr lang="en-US"/>
+              <a:t>DỄ VỠ NGÂN SÁCH: đừng kể quá trình đo, chỉ đọc kết quả.</a:t>
             </a:r>
           </a:p>
         </p:txBody>
@@ -1353,7 +1336,19 @@
           <a:p>
             <a:r>
               <a:rPr lang="en-US"/>
-              <a:t>30 GIÂY. Bốn câu, đọc chậm, dừng lại sau câu 3. Rồi mời hỏi đáp.</a:t>
+              <a:t>25 GIÂY. Đọc nhanh đúng 2 dòng:</a:t>
+            </a:r>
+          </a:p>
+          <a:p>
+            <a:r>
+              <a:rPr lang="en-US"/>
+              <a:t>  TOTP không chống AiTM → Passkey/WebAuthn</a:t>
+            </a:r>
+          </a:p>
+          <a:p>
+            <a:r>
+              <a:rPr lang="en-US"/>
+              <a:t>  Superuser DB vẫn tính lại được hash-chain → SIEM + WORM</a:t>
             </a:r>
           </a:p>
           <a:p>
@@ -1365,7 +1360,237 @@
           <a:p>
             <a:r>
               <a:rPr lang="en-US"/>
-              <a:t>TỔNG PHẦN NÓI: 5 phút 55 — dư 65 giây so với khung 7 phút.</a:t>
+              <a:t>DỄ VỠ NGÂN SÁCH: đừng xin lỗi dài dòng.</a:t>
+            </a:r>
+          </a:p>
+          <a:p>
+            <a:r>
+              <a:rPr lang="en-US"/>
+              <a:t>Nếu phần nói đã quá 6:30 thì cắt slide này còn 15 giây.</a:t>
+            </a:r>
+          </a:p>
+        </p:txBody>
+      </p:sp>
+      <p:sp>
+        <p:nvSpPr>
+          <p:cNvPr id="6" name="Footer Placeholder 5"/>
+          <p:cNvSpPr>
+            <a:spLocks noGrp="1"/>
+          </p:cNvSpPr>
+          <p:nvPr>
+            <p:ph type="ftr" sz="quarter" idx="4"/>
+          </p:nvPr>
+        </p:nvSpPr>
+        <p:spPr>
+          <a:xfrm>
+            <a:off x="0" y="6502400"/>
+            <a:ext cx="3962400" cy="341313"/>
+          </a:xfrm>
+          <a:prstGeom prst="rect">
+            <a:avLst/>
+          </a:prstGeom>
+        </p:spPr>
+        <p:txBody>
+          <a:bodyPr vert="horz" lIns="91440" tIns="45720" rIns="91440" bIns="45720" rtlCol="0" anchor="b"/>
+          <a:lstStyle>
+            <a:lvl1pPr algn="l">
+              <a:defRPr sz="1200"/>
+            </a:lvl1pPr>
+          </a:lstStyle>
+          <a:p/>
+        </p:txBody>
+      </p:sp>
+      <p:sp>
+        <p:nvSpPr>
+          <p:cNvPr id="7" name="Slide Number Placeholder 6"/>
+          <p:cNvSpPr>
+            <a:spLocks noGrp="1"/>
+          </p:cNvSpPr>
+          <p:nvPr>
+            <p:ph type="sldNum" sz="quarter" idx="5"/>
+          </p:nvPr>
+        </p:nvSpPr>
+        <p:spPr>
+          <a:xfrm>
+            <a:off x="5180013" y="6502400"/>
+            <a:ext cx="3962400" cy="341313"/>
+          </a:xfrm>
+          <a:prstGeom prst="rect">
+            <a:avLst/>
+          </a:prstGeom>
+        </p:spPr>
+        <p:txBody>
+          <a:bodyPr vert="horz" lIns="91440" tIns="45720" rIns="91440" bIns="45720" rtlCol="0" anchor="b"/>
+          <a:lstStyle>
+            <a:lvl1pPr algn="r">
+              <a:defRPr sz="1200"/>
+            </a:lvl1pPr>
+          </a:lstStyle>
+          <a:p>
+            <a:r id="{871B2431-D351-4C6E-A3CF-9DFAC0E3E050}" type="slidenum">
+              <a:rPr lang="cs-CZ" smtClean="0"/>
+              <a:t>‹#›</a:t>
+            </a:r>
+          </a:p>
+        </p:txBody>
+      </p:sp>
+    </p:spTree>
+  </p:cSld>
+  <p:clrMapOvr>
+    <a:masterClrMapping/>
+  </p:clrMapOvr>
+</p:notes>
+</file>
+
+<file path=ppt/notesSlides/notesSlide13.xml><?xml version="1.0" encoding="utf-8"?>
+<p:notes xmlns:p="http://schemas.openxmlformats.org/presentationml/2006/main" xmlns:a="http://schemas.openxmlformats.org/drawingml/2006/main">
+  <p:cSld>
+    <p:spTree xmlns:r="http://schemas.openxmlformats.org/officeDocument/2006/relationships">
+      <p:nvGrpSpPr>
+        <p:cNvPr id="1" name=""/>
+        <p:cNvGrpSpPr/>
+        <p:nvPr/>
+      </p:nvGrpSpPr>
+      <p:grpSpPr>
+        <a:xfrm>
+          <a:off x="0" y="0"/>
+          <a:ext cx="0" cy="0"/>
+          <a:chOff x="0" y="0"/>
+          <a:chExt cx="0" cy="0"/>
+        </a:xfrm>
+      </p:grpSpPr>
+      <p:sp>
+        <p:nvSpPr>
+          <p:cNvPr id="2" name="Header Placeholder 1"/>
+          <p:cNvSpPr>
+            <a:spLocks noGrp="1"/>
+          </p:cNvSpPr>
+          <p:nvPr>
+            <p:ph type="hdr" sz="quarter"/>
+          </p:nvPr>
+        </p:nvSpPr>
+        <p:spPr>
+          <a:xfrm>
+            <a:off x="0" y="0"/>
+            <a:ext cx="3962400" cy="342900"/>
+          </a:xfrm>
+          <a:prstGeom prst="rect">
+            <a:avLst/>
+          </a:prstGeom>
+        </p:spPr>
+        <p:txBody>
+          <a:bodyPr vert="horz" lIns="91440" tIns="45720" rIns="91440" bIns="45720" rtlCol="0"/>
+          <a:lstStyle>
+            <a:lvl1pPr algn="l">
+              <a:defRPr sz="1200"/>
+            </a:lvl1pPr>
+          </a:lstStyle>
+          <a:p/>
+        </p:txBody>
+      </p:sp>
+      <p:sp>
+        <p:nvSpPr>
+          <p:cNvPr id="3" name="Date Placeholder 2"/>
+          <p:cNvSpPr>
+            <a:spLocks noGrp="1"/>
+          </p:cNvSpPr>
+          <p:nvPr>
+            <p:ph type="dt" idx="1"/>
+          </p:nvPr>
+        </p:nvSpPr>
+        <p:spPr>
+          <a:xfrm>
+            <a:off x="5180013" y="0"/>
+            <a:ext cx="3962400" cy="342900"/>
+          </a:xfrm>
+          <a:prstGeom prst="rect">
+            <a:avLst/>
+          </a:prstGeom>
+        </p:spPr>
+        <p:txBody>
+          <a:bodyPr vert="horz" lIns="91440" tIns="45720" rIns="91440" bIns="45720" rtlCol="0"/>
+          <a:lstStyle>
+            <a:lvl1pPr algn="r">
+              <a:defRPr sz="1200"/>
+            </a:lvl1pPr>
+          </a:lstStyle>
+          <a:p>
+            <a:r id="{B7268E1E-0E44-426D-905E-8AD9B19D2182}" type="datetimeFigureOut">
+              <a:rPr lang="cs-CZ" smtClean="0"/>
+              <a:t>1.7.2013</a:t>
+            </a:r>
+          </a:p>
+        </p:txBody>
+      </p:sp>
+      <p:sp>
+        <p:nvSpPr>
+          <p:cNvPr id="4" name="Slide Image Placeholder 3"/>
+          <p:cNvSpPr>
+            <a:spLocks noGrp="1" noRot="1" noChangeAspect="1"/>
+          </p:cNvSpPr>
+          <p:nvPr>
+            <p:ph type="sldImg" idx="2"/>
+          </p:nvPr>
+        </p:nvSpPr>
+        <p:spPr>
+          <a:xfrm>
+            <a:off x="2857500" y="512763"/>
+            <a:ext cx="3429000" cy="2566987"/>
+          </a:xfrm>
+          <a:prstGeom prst="rect">
+            <a:avLst/>
+          </a:prstGeom>
+          <a:noFill/>
+          <a:ln w="12700">
+            <a:solidFill>
+              <a:prstClr val="black"/>
+            </a:solidFill>
+          </a:ln>
+        </p:spPr>
+        <p:txBody>
+          <a:bodyPr vert="horz" lIns="91440" tIns="45720" rIns="91440" bIns="45720" rtlCol="0" anchor="ctr"/>
+          <a:lstStyle/>
+          <a:p/>
+        </p:txBody>
+      </p:sp>
+      <p:sp>
+        <p:nvSpPr>
+          <p:cNvPr id="5" name="Notes Placeholder 4"/>
+          <p:cNvSpPr>
+            <a:spLocks noGrp="1"/>
+          </p:cNvSpPr>
+          <p:nvPr>
+            <p:ph type="body" sz="quarter" idx="3"/>
+          </p:nvPr>
+        </p:nvSpPr>
+        <p:spPr>
+          <a:xfrm>
+            <a:off x="914400" y="3251200"/>
+            <a:ext cx="7315200" cy="3081338"/>
+          </a:xfrm>
+          <a:prstGeom prst="rect">
+            <a:avLst/>
+          </a:prstGeom>
+        </p:spPr>
+        <p:txBody>
+          <a:bodyPr vert="horz" lIns="91440" tIns="45720" rIns="91440" bIns="45720" rtlCol="0"/>
+          <a:lstStyle/>
+          <a:p>
+            <a:r>
+              <a:rPr lang="en-US"/>
+              <a:t>30 GIÂY. Bốn câu, đọc chậm, dừng lại sau câu 3. Rồi mời hỏi đáp.</a:t>
+            </a:r>
+          </a:p>
+          <a:p>
+            <a:r>
+              <a:rPr lang="en-US"/>
+              <a:t/>
+            </a:r>
+          </a:p>
+          <a:p>
+            <a:r>
+              <a:rPr lang="en-US"/>
+              <a:t>TỔNG PHẦN NÓI: 6 phút 05 — dư 55 giây so với khung 7 phút.</a:t>
             </a:r>
           </a:p>
         </p:txBody>
@@ -1577,7 +1802,7 @@
           <a:p>
             <a:r>
               <a:rPr lang="en-US"/>
-              <a:t>45 GIÂY. Điểm là tài sản toàn vẹn → cổng vào duy nhất là tài khoản GV → dừng ở câu hỏi lớn.</a:t>
+              <a:t>10 GIÂY. Đừng đọc từng dòng.</a:t>
             </a:r>
           </a:p>
           <a:p>
@@ -1589,7 +1814,7 @@
           <a:p>
             <a:r>
               <a:rPr lang="en-US"/>
-              <a:t>THÊM MỘT CÂU (vì slide 3 đã ẩn): "tác nhân nguy hiểm nhất là insider có quyền DB — phần lớn đồ án bỏ qua."</a:t>
+              <a:t>"Bài của nhóm em đi từ bài toán, qua thiết kế, rồi chứng minh bằng demo trực tiếp và bộ test, cuối cùng là hạn chế và kết luận."</a:t>
             </a:r>
           </a:p>
           <a:p>
@@ -1601,7 +1826,7 @@
           <a:p>
             <a:r>
               <a:rPr lang="en-US"/>
-              <a:t>Đây là cái móc của cả bài: đừng vội nói về kỹ thuật.</a:t>
+              <a:t>Chỉ tay vào dòng 05 màu đỏ: đây là phần demo.</a:t>
             </a:r>
           </a:p>
         </p:txBody>
@@ -1813,13 +2038,7 @@
           <a:p>
             <a:r>
               <a:rPr lang="en-US"/>
-              <a:t>ẨN SLIDE NÀY khi trình bày.</a:t>
-            </a:r>
-          </a:p>
-          <a:p>
-            <a:r>
-              <a:rPr lang="en-US"/>
-              <a:t>PowerPoint: chuột phải vào slide ở khung bên trái → Hide Slide.</a:t>
+              <a:t>45 GIÂY. Điểm là tài sản toàn vẹn → cổng vào duy nhất là tài khoản GV → dừng ở câu hỏi lớn.</a:t>
             </a:r>
           </a:p>
           <a:p>
@@ -1831,7 +2050,19 @@
           <a:p>
             <a:r>
               <a:rPr lang="en-US"/>
-              <a:t>Chỉ mở khi thầy hỏi "tài sản nào quan trọng nhất". Nội dung đã gộp một câu vào slide 2.</a:t>
+              <a:t>THÊM MỘT CÂU (vì slide 4 đã ẩn): "tác nhân nguy hiểm nhất là insider có quyền DB — phần lớn đồ án bỏ qua."</a:t>
+            </a:r>
+          </a:p>
+          <a:p>
+            <a:r>
+              <a:rPr lang="en-US"/>
+              <a:t/>
+            </a:r>
+          </a:p>
+          <a:p>
+            <a:r>
+              <a:rPr lang="en-US"/>
+              <a:t>Đây là cái móc của cả bài: đừng vội nói về kỹ thuật.</a:t>
             </a:r>
           </a:p>
         </p:txBody>
@@ -2043,7 +2274,13 @@
           <a:p>
             <a:r>
               <a:rPr lang="en-US"/>
-              <a:t>50 GIÂY. 3 zone · chỉ WAF có port.</a:t>
+              <a:t>ẨN SLIDE NÀY khi trình bày.</a:t>
+            </a:r>
+          </a:p>
+          <a:p>
+            <a:r>
+              <a:rPr lang="en-US"/>
+              <a:t>PowerPoint: chuột phải vào slide ở khung bên trái → Hide Slide.</a:t>
             </a:r>
           </a:p>
           <a:p>
@@ -2055,19 +2292,7 @@
           <a:p>
             <a:r>
               <a:rPr lang="en-US"/>
-              <a:t>NHẤN D4: app không gọi được ra Internet, nên có RCE trong app cũng không exfiltrate được dữ liệu.</a:t>
-            </a:r>
-          </a:p>
-          <a:p>
-            <a:r>
-              <a:rPr lang="en-US"/>
-              <a:t/>
-            </a:r>
-          </a:p>
-          <a:p>
-            <a:r>
-              <a:rPr lang="en-US"/>
-              <a:t>Đừng đọc hết 5 luồng bị chặn.</a:t>
+              <a:t>Chỉ mở khi thầy hỏi "tài sản nào quan trọng nhất". Nội dung đã gộp một câu vào slide 3.</a:t>
             </a:r>
           </a:p>
         </p:txBody>
@@ -2279,7 +2504,7 @@
           <a:p>
             <a:r>
               <a:rPr lang="en-US"/>
-              <a:t>70 GIÂY — slide dài nhất, bấm giờ riêng khi tổng duyệt.</a:t>
+              <a:t>50 GIÂY. 3 zone · chỉ WAF có port.</a:t>
             </a:r>
           </a:p>
           <a:p>
@@ -2291,7 +2516,7 @@
           <a:p>
             <a:r>
               <a:rPr lang="en-US"/>
-              <a:t>Đọc 5 dòng bảng, dừng lại ở dòng cuối (không tin cả DB của mình).</a:t>
+              <a:t>NHẤN D4: app không gọi được ra Internet, nên có RCE trong app cũng không exfiltrate được dữ liệu.</a:t>
             </a:r>
           </a:p>
           <a:p>
@@ -2303,19 +2528,7 @@
           <a:p>
             <a:r>
               <a:rPr lang="en-US"/>
-              <a:t>THÊM MỘT CÂU (vì slide 6 đã ẩn): "cụ thể hoá thành 12 lớp kiểm chứng, một request sửa điểm phải qua hết."</a:t>
-            </a:r>
-          </a:p>
-          <a:p>
-            <a:r>
-              <a:rPr lang="en-US"/>
-              <a:t/>
-            </a:r>
-          </a:p>
-          <a:p>
-            <a:r>
-              <a:rPr lang="en-US"/>
-              <a:t>DỄ VỠ NGÂN SÁCH: đừng giải thích từng dòng.</a:t>
+              <a:t>Đừng đọc hết 5 luồng bị chặn.</a:t>
             </a:r>
           </a:p>
         </p:txBody>
@@ -2527,13 +2740,7 @@
           <a:p>
             <a:r>
               <a:rPr lang="en-US"/>
-              <a:t>ẨN SLIDE NÀY khi trình bày.</a:t>
-            </a:r>
-          </a:p>
-          <a:p>
-            <a:r>
-              <a:rPr lang="en-US"/>
-              <a:t>PowerPoint: chuột phải vào slide ở khung bên trái → Hide Slide.</a:t>
+              <a:t>70 GIÂY — slide dài nhất, bấm giờ riêng khi tổng duyệt.</a:t>
             </a:r>
           </a:p>
           <a:p>
@@ -2545,7 +2752,31 @@
           <a:p>
             <a:r>
               <a:rPr lang="en-US"/>
-              <a:t>Chỉ mở khi thầy hỏi "12 lớp là những lớp nào". Đã nói bằng một câu ở slide 5.</a:t>
+              <a:t>Đọc 5 dòng bảng, dừng lại ở dòng cuối (không tin cả DB của mình).</a:t>
+            </a:r>
+          </a:p>
+          <a:p>
+            <a:r>
+              <a:rPr lang="en-US"/>
+              <a:t/>
+            </a:r>
+          </a:p>
+          <a:p>
+            <a:r>
+              <a:rPr lang="en-US"/>
+              <a:t>THÊM MỘT CÂU (vì slide 7 đã ẩn): "cụ thể hoá thành 12 lớp kiểm chứng, một request sửa điểm phải qua hết."</a:t>
+            </a:r>
+          </a:p>
+          <a:p>
+            <a:r>
+              <a:rPr lang="en-US"/>
+              <a:t/>
+            </a:r>
+          </a:p>
+          <a:p>
+            <a:r>
+              <a:rPr lang="en-US"/>
+              <a:t>DỄ VỠ NGÂN SÁCH: đừng giải thích từng dòng.</a:t>
             </a:r>
           </a:p>
         </p:txBody>
@@ -2757,7 +2988,13 @@
           <a:p>
             <a:r>
               <a:rPr lang="en-US"/>
-              <a:t>40 GIÂY. Lướt nhanh 4 dòng đầu.</a:t>
+              <a:t>ẨN SLIDE NÀY khi trình bày.</a:t>
+            </a:r>
+          </a:p>
+          <a:p>
+            <a:r>
+              <a:rPr lang="en-US"/>
+              <a:t>PowerPoint: chuột phải vào slide ở khung bên trái → Hide Slide.</a:t>
             </a:r>
           </a:p>
           <a:p>
@@ -2769,7 +3006,7 @@
           <a:p>
             <a:r>
               <a:rPr lang="en-US"/>
-              <a:t>DỮNG Ở R08: insider sửa DB, audit_log append-only, hash-chain, TC22–TC24. Đây là dòng phân biệt đồ án này với đồ án khác.</a:t>
+              <a:t>Chỉ mở khi thầy hỏi "12 lớp là những lớp nào". Đã nói bằng một câu ở slide 6.</a:t>
             </a:r>
           </a:p>
         </p:txBody>
@@ -2981,7 +3218,7 @@
           <a:p>
             <a:r>
               <a:rPr lang="en-US"/>
-              <a:t>5 GIÂY. "Em xin chuyển sang demo trực tiếp."</a:t>
+              <a:t>40 GIÂY. Lướt nhanh 4 dòng đầu.</a:t>
             </a:r>
           </a:p>
           <a:p>
@@ -2993,73 +3230,7 @@
           <a:p>
             <a:r>
               <a:rPr lang="en-US"/>
-              <a:t>DEMO ~3 PHÚT, 2 CẢNH (docs/KICH_BAN_7P.md, lệnh ở docs/LENH_DEMO.txt):</a:t>
-            </a:r>
-          </a:p>
-          <a:p>
-            <a:r>
-              <a:rPr lang="en-US"/>
-              <a:t>  Cảnh 0  0:00–0:15  docker compose ps — chỉ waf có "-&gt;"</a:t>
-            </a:r>
-          </a:p>
-          <a:p>
-            <a:r>
-              <a:rPr lang="en-US"/>
-              <a:t>  Cảnh 1  0:15–1:15  KB2 cookie: curl.exe với $c → SESSION_CONTEXT_MISMATCH → gv01 bị đá ra → CRITICAL</a:t>
-            </a:r>
-          </a:p>
-          <a:p>
-            <a:r>
-              <a:rPr lang="en-US"/>
-              <a:t>  Cảnh 2  1:15–2:35  KB6: toàn vẹn sạch → UPDATE DB → DB=10 / log=8.5 → DELETE bị permission denied</a:t>
-            </a:r>
-          </a:p>
-          <a:p>
-            <a:r>
-              <a:rPr lang="en-US"/>
-              <a:t>  Cảnh 3  2:35–2:50  "25/25 PASS, bốn kịch bản còn lại chạy được ngay"</a:t>
-            </a:r>
-          </a:p>
-          <a:p>
-            <a:r>
-              <a:rPr lang="en-US"/>
-              <a:t/>
-            </a:r>
-          </a:p>
-          <a:p>
-            <a:r>
-              <a:rPr lang="en-US"/>
-              <a:t>NHỚ TRƯỚC KHI BẤM GIỜ:</a:t>
-            </a:r>
-          </a:p>
-          <a:p>
-            <a:r>
-              <a:rPr lang="en-US"/>
-              <a:t>  - đã chạy node scripts/reset-demo.mjs</a:t>
-            </a:r>
-          </a:p>
-          <a:p>
-            <a:r>
-              <a:rPr lang="en-US"/>
-              <a:t>  - admin ở cửa sổ ẨN DANH, gv01 ở cửa sổ THƯỜNG</a:t>
-            </a:r>
-          </a:p>
-          <a:p>
-            <a:r>
-              <a:rPr lang="en-US"/>
-              <a:t>  - cookie gv01 đã cất vào $c, chạy cảnh 1 trong 15 phút</a:t>
-            </a:r>
-          </a:p>
-          <a:p>
-            <a:r>
-              <a:rPr lang="en-US"/>
-              <a:t/>
-            </a:r>
-          </a:p>
-          <a:p>
-            <a:r>
-              <a:rPr lang="en-US"/>
-              <a:t>cls trước mỗi lệnh. Ra kết quả thì DỪNG 3 GIÂY rồi mới nói.</a:t>
+              <a:t>DỮNG Ở R08: insider sửa DB, audit_log append-only, hash-chain, TC22–TC24. Đây là dòng phân biệt đồ án này với đồ án khác.</a:t>
             </a:r>
           </a:p>
         </p:txBody>
@@ -3271,7 +3442,7 @@
           <a:p>
             <a:r>
               <a:rPr lang="en-US"/>
-              <a:t>25 GIÂY. 25/25 PASS · 6 luồng bình thường + 19 test tấn công · phủ KB1–KB6.</a:t>
+              <a:t>5 GIÂY. "Em xin chuyển sang demo trực tiếp."</a:t>
             </a:r>
           </a:p>
           <a:p>
@@ -3283,7 +3454,73 @@
           <a:p>
             <a:r>
               <a:rPr lang="en-US"/>
-              <a:t>Đừng đọc từng dòng trên màn hình — để thầy tự đọc.</a:t>
+              <a:t>DEMO ~3 PHÚT, 2 CẢNH (docs/KICH_BAN_7P.md, lệnh ở docs/LENH_DEMO.txt):</a:t>
+            </a:r>
+          </a:p>
+          <a:p>
+            <a:r>
+              <a:rPr lang="en-US"/>
+              <a:t>  Cảnh 0  0:00–0:15  docker compose ps — chỉ waf có "-&gt;"</a:t>
+            </a:r>
+          </a:p>
+          <a:p>
+            <a:r>
+              <a:rPr lang="en-US"/>
+              <a:t>  Cảnh 1  0:15–1:15  KB2 cookie: curl.exe với $c → SESSION_CONTEXT_MISMATCH → gv01 bị đá ra → CRITICAL</a:t>
+            </a:r>
+          </a:p>
+          <a:p>
+            <a:r>
+              <a:rPr lang="en-US"/>
+              <a:t>  Cảnh 2  1:15–2:35  KB6: toàn vẹn sạch → UPDATE DB → DB=10 / log=8.5 → DELETE bị permission denied</a:t>
+            </a:r>
+          </a:p>
+          <a:p>
+            <a:r>
+              <a:rPr lang="en-US"/>
+              <a:t>  Cảnh 3  2:35–2:50  "25/25 PASS, bốn kịch bản còn lại chạy được ngay"</a:t>
+            </a:r>
+          </a:p>
+          <a:p>
+            <a:r>
+              <a:rPr lang="en-US"/>
+              <a:t/>
+            </a:r>
+          </a:p>
+          <a:p>
+            <a:r>
+              <a:rPr lang="en-US"/>
+              <a:t>NHỚ TRƯỚC KHI BẤM GIỜ:</a:t>
+            </a:r>
+          </a:p>
+          <a:p>
+            <a:r>
+              <a:rPr lang="en-US"/>
+              <a:t>  - đã chạy node scripts/reset-demo.mjs</a:t>
+            </a:r>
+          </a:p>
+          <a:p>
+            <a:r>
+              <a:rPr lang="en-US"/>
+              <a:t>  - admin ở cửa sổ ẨN DANH, gv01 ở cửa sổ THƯỜNG</a:t>
+            </a:r>
+          </a:p>
+          <a:p>
+            <a:r>
+              <a:rPr lang="en-US"/>
+              <a:t>  - cookie gv01 đã cất vào $c, chạy cảnh 1 trong 15 phút</a:t>
+            </a:r>
+          </a:p>
+          <a:p>
+            <a:r>
+              <a:rPr lang="en-US"/>
+              <a:t/>
+            </a:r>
+          </a:p>
+          <a:p>
+            <a:r>
+              <a:rPr lang="en-US"/>
+              <a:t>cls trước mỗi lệnh. Ra kết quả thì DỪNG 3 GIÂY rồi mới nói.</a:t>
             </a:r>
           </a:p>
         </p:txBody>
@@ -6858,7 +7095,7 @@
     <p:bg>
       <p:bgPr>
         <a:solidFill>
-          <a:srgbClr val="EDF1F6"/>
+          <a:srgbClr val="F7F9FC"/>
         </a:solidFill>
       </p:bgPr>
     </p:bg>
@@ -6984,13 +7221,16 @@
           </a:bodyPr>
           <a:lstStyle/>
           <a:p>
-            <a:pPr algn="r">
+            <a:pPr algn="r" marL="0" indent="0" lvl="0">
               <a:lnSpc>
                 <a:spcPts val="1889"/>
               </a:lnSpc>
+              <a:spcBef>
+                <a:spcPct val="0"/>
+              </a:spcBef>
             </a:pPr>
             <a:r>
-              <a:rPr lang="en-US" sz="1350">
+              <a:rPr lang="en-US" sz="1350" strike="noStrike" u="none">
                 <a:solidFill>
                   <a:srgbClr val="8A98AA"/>
                 </a:solidFill>
@@ -7000,6 +7240,755 @@
                 <a:sym typeface="JetBrains Mono"/>
               </a:rPr>
               <a:t>10</a:t>
+            </a:r>
+          </a:p>
+        </p:txBody>
+      </p:sp>
+      <p:sp>
+        <p:nvSpPr>
+          <p:cNvPr name="TextBox 6" id="6"/>
+          <p:cNvSpPr txBox="true"/>
+          <p:nvPr/>
+        </p:nvSpPr>
+        <p:spPr>
+          <a:xfrm rot="0">
+            <a:off x="1047750" y="1304925"/>
+            <a:ext cx="8572500" cy="663702"/>
+          </a:xfrm>
+          <a:prstGeom prst="rect">
+            <a:avLst/>
+          </a:prstGeom>
+        </p:spPr>
+        <p:txBody>
+          <a:bodyPr anchor="t" rtlCol="false" tIns="0" lIns="0" bIns="0" rIns="0">
+            <a:spAutoFit/>
+          </a:bodyPr>
+          <a:lstStyle/>
+          <a:p>
+            <a:pPr algn="l">
+              <a:lnSpc>
+                <a:spcPts val="5184"/>
+              </a:lnSpc>
+            </a:pPr>
+            <a:r>
+              <a:rPr lang="en-US" sz="4800" b="true">
+                <a:solidFill>
+                  <a:srgbClr val="1B2A3F"/>
+                </a:solidFill>
+                <a:latin typeface="IBM Plex Sans Bold"/>
+                <a:ea typeface="IBM Plex Sans Bold"/>
+                <a:cs typeface="IBM Plex Sans Bold"/>
+                <a:sym typeface="IBM Plex Sans Bold"/>
+              </a:rPr>
+              <a:t>Kết quả kiểm thử</a:t>
+            </a:r>
+          </a:p>
+        </p:txBody>
+      </p:sp>
+      <p:sp>
+        <p:nvSpPr>
+          <p:cNvPr name="TextBox 7" id="7"/>
+          <p:cNvSpPr txBox="true"/>
+          <p:nvPr/>
+        </p:nvSpPr>
+        <p:spPr>
+          <a:xfrm rot="0">
+            <a:off x="1047750" y="3181350"/>
+            <a:ext cx="6572250" cy="2181225"/>
+          </a:xfrm>
+          <a:prstGeom prst="rect">
+            <a:avLst/>
+          </a:prstGeom>
+        </p:spPr>
+        <p:txBody>
+          <a:bodyPr anchor="t" rtlCol="false" tIns="0" lIns="0" bIns="0" rIns="0">
+            <a:spAutoFit/>
+          </a:bodyPr>
+          <a:lstStyle/>
+          <a:p>
+            <a:pPr algn="l">
+              <a:lnSpc>
+                <a:spcPts val="17850"/>
+              </a:lnSpc>
+            </a:pPr>
+            <a:r>
+              <a:rPr lang="en-US" sz="12750" b="true">
+                <a:solidFill>
+                  <a:srgbClr val="1B2A3F"/>
+                </a:solidFill>
+                <a:latin typeface="JetBrains Mono Bold"/>
+                <a:ea typeface="JetBrains Mono Bold"/>
+                <a:cs typeface="JetBrains Mono Bold"/>
+                <a:sym typeface="JetBrains Mono Bold"/>
+              </a:rPr>
+              <a:t>25/25</a:t>
+            </a:r>
+          </a:p>
+        </p:txBody>
+      </p:sp>
+      <p:sp>
+        <p:nvSpPr>
+          <p:cNvPr name="TextBox 8" id="8"/>
+          <p:cNvSpPr txBox="true"/>
+          <p:nvPr/>
+        </p:nvSpPr>
+        <p:spPr>
+          <a:xfrm rot="0">
+            <a:off x="1047750" y="5543550"/>
+            <a:ext cx="4953000" cy="1128713"/>
+          </a:xfrm>
+          <a:prstGeom prst="rect">
+            <a:avLst/>
+          </a:prstGeom>
+        </p:spPr>
+        <p:txBody>
+          <a:bodyPr anchor="t" rtlCol="false" tIns="0" lIns="0" bIns="0" rIns="0">
+            <a:spAutoFit/>
+          </a:bodyPr>
+          <a:lstStyle/>
+          <a:p>
+            <a:pPr algn="l" marL="0" indent="0" lvl="0">
+              <a:lnSpc>
+                <a:spcPts val="3037"/>
+              </a:lnSpc>
+              <a:spcBef>
+                <a:spcPct val="0"/>
+              </a:spcBef>
+            </a:pPr>
+            <a:r>
+              <a:rPr lang="en-US" sz="2250" strike="noStrike" u="none">
+                <a:solidFill>
+                  <a:srgbClr val="2E5C8A"/>
+                </a:solidFill>
+                <a:latin typeface="IBM Plex Sans"/>
+                <a:ea typeface="IBM Plex Sans"/>
+                <a:cs typeface="IBM Plex Sans"/>
+                <a:sym typeface="IBM Plex Sans"/>
+              </a:rPr>
+              <a:t>test case PASS</a:t>
+            </a:r>
+          </a:p>
+          <a:p>
+            <a:pPr algn="l" marL="0" indent="0" lvl="0">
+              <a:lnSpc>
+                <a:spcPts val="3037"/>
+              </a:lnSpc>
+              <a:spcBef>
+                <a:spcPct val="0"/>
+              </a:spcBef>
+            </a:pPr>
+            <a:r>
+              <a:rPr lang="en-US" sz="2250" strike="noStrike" u="none">
+                <a:solidFill>
+                  <a:srgbClr val="2E5C8A"/>
+                </a:solidFill>
+                <a:latin typeface="IBM Plex Sans"/>
+                <a:ea typeface="IBM Plex Sans"/>
+                <a:cs typeface="IBM Plex Sans"/>
+                <a:sym typeface="IBM Plex Sans"/>
+              </a:rPr>
+              <a:t>6 luồng bình thường</a:t>
+            </a:r>
+          </a:p>
+          <a:p>
+            <a:pPr algn="l" marL="0" indent="0" lvl="0">
+              <a:lnSpc>
+                <a:spcPts val="3037"/>
+              </a:lnSpc>
+              <a:spcBef>
+                <a:spcPct val="0"/>
+              </a:spcBef>
+            </a:pPr>
+            <a:r>
+              <a:rPr lang="en-US" sz="2250" strike="noStrike" u="none">
+                <a:solidFill>
+                  <a:srgbClr val="2E5C8A"/>
+                </a:solidFill>
+                <a:latin typeface="IBM Plex Sans"/>
+                <a:ea typeface="IBM Plex Sans"/>
+                <a:cs typeface="IBM Plex Sans"/>
+                <a:sym typeface="IBM Plex Sans"/>
+              </a:rPr>
+              <a:t>+ 19 test tấn công</a:t>
+            </a:r>
+          </a:p>
+        </p:txBody>
+      </p:sp>
+      <p:grpSp>
+        <p:nvGrpSpPr>
+          <p:cNvPr name="Group 9" id="9"/>
+          <p:cNvGrpSpPr/>
+          <p:nvPr/>
+        </p:nvGrpSpPr>
+        <p:grpSpPr>
+          <a:xfrm rot="0">
+            <a:off x="7620000" y="2190750"/>
+            <a:ext cx="9429750" cy="5905500"/>
+            <a:chOff x="0" y="0"/>
+            <a:chExt cx="12573000" cy="7874000"/>
+          </a:xfrm>
+        </p:grpSpPr>
+        <p:sp>
+          <p:nvSpPr>
+            <p:cNvPr name="Freeform 10" id="10"/>
+            <p:cNvSpPr/>
+            <p:nvPr/>
+          </p:nvSpPr>
+          <p:spPr>
+            <a:xfrm flipH="false" flipV="false" rot="0">
+              <a:off x="0" y="0"/>
+              <a:ext cx="12573000" cy="7874000"/>
+            </a:xfrm>
+            <a:custGeom>
+              <a:avLst/>
+              <a:gdLst/>
+              <a:ahLst/>
+              <a:cxnLst/>
+              <a:rect r="r" b="b" t="t" l="l"/>
+              <a:pathLst>
+                <a:path h="7874000" w="12573000">
+                  <a:moveTo>
+                    <a:pt x="0" y="0"/>
+                  </a:moveTo>
+                  <a:lnTo>
+                    <a:pt x="12573000" y="0"/>
+                  </a:lnTo>
+                  <a:lnTo>
+                    <a:pt x="12573000" y="7874000"/>
+                  </a:lnTo>
+                  <a:lnTo>
+                    <a:pt x="0" y="7874000"/>
+                  </a:lnTo>
+                  <a:close/>
+                </a:path>
+              </a:pathLst>
+            </a:custGeom>
+            <a:solidFill>
+              <a:srgbClr val="FFFFFF"/>
+            </a:solidFill>
+            <a:ln w="9525" cap="sq">
+              <a:solidFill>
+                <a:srgbClr val="D4DCE6"/>
+              </a:solidFill>
+              <a:prstDash val="lgDash"/>
+              <a:miter/>
+            </a:ln>
+          </p:spPr>
+        </p:sp>
+        <p:sp>
+          <p:nvSpPr>
+            <p:cNvPr name="TextBox 11" id="11"/>
+            <p:cNvSpPr txBox="true"/>
+            <p:nvPr/>
+          </p:nvSpPr>
+          <p:spPr>
+            <a:xfrm>
+              <a:off x="0" y="-38100"/>
+              <a:ext cx="12573000" cy="7912100"/>
+            </a:xfrm>
+            <a:prstGeom prst="rect">
+              <a:avLst/>
+            </a:prstGeom>
+          </p:spPr>
+          <p:txBody>
+            <a:bodyPr anchor="ctr" rtlCol="false" tIns="50800" lIns="50800" bIns="50800" rIns="50800"/>
+            <a:lstStyle/>
+            <a:p>
+              <a:pPr algn="l">
+                <a:lnSpc>
+                  <a:spcPts val="1679"/>
+                </a:lnSpc>
+              </a:pPr>
+            </a:p>
+          </p:txBody>
+        </p:sp>
+      </p:grpSp>
+      <p:sp>
+        <p:nvSpPr>
+          <p:cNvPr name="TextBox 12" id="12"/>
+          <p:cNvSpPr txBox="true"/>
+          <p:nvPr/>
+        </p:nvSpPr>
+        <p:spPr>
+          <a:xfrm rot="0">
+            <a:off x="8477250" y="8391525"/>
+            <a:ext cx="7620000" cy="567690"/>
+          </a:xfrm>
+          <a:prstGeom prst="rect">
+            <a:avLst/>
+          </a:prstGeom>
+        </p:spPr>
+        <p:txBody>
+          <a:bodyPr anchor="t" rtlCol="false" tIns="0" lIns="0" bIns="0" rIns="0">
+            <a:spAutoFit/>
+          </a:bodyPr>
+          <a:lstStyle/>
+          <a:p>
+            <a:pPr algn="ctr" marL="0" indent="0" lvl="0">
+              <a:lnSpc>
+                <a:spcPts val="2310"/>
+              </a:lnSpc>
+              <a:spcBef>
+                <a:spcPct val="0"/>
+              </a:spcBef>
+            </a:pPr>
+            <a:r>
+              <a:rPr lang="en-US" sz="1650" strike="noStrike" u="none">
+                <a:solidFill>
+                  <a:srgbClr val="8A98AA"/>
+                </a:solidFill>
+                <a:latin typeface="JetBrains Mono"/>
+                <a:ea typeface="JetBrains Mono"/>
+                <a:cs typeface="JetBrains Mono"/>
+                <a:sym typeface="JetBrains Mono"/>
+              </a:rPr>
+              <a:t>Trích kết quả thực tế — docs/evidence/07-run-tests-output.txt</a:t>
+            </a:r>
+          </a:p>
+        </p:txBody>
+      </p:sp>
+      <p:sp>
+        <p:nvSpPr>
+          <p:cNvPr name="TextBox 13" id="13"/>
+          <p:cNvSpPr txBox="true"/>
+          <p:nvPr/>
+        </p:nvSpPr>
+        <p:spPr>
+          <a:xfrm rot="0">
+            <a:off x="7953375" y="2466975"/>
+            <a:ext cx="8763000" cy="4003358"/>
+          </a:xfrm>
+          <a:prstGeom prst="rect">
+            <a:avLst/>
+          </a:prstGeom>
+        </p:spPr>
+        <p:txBody>
+          <a:bodyPr anchor="t" rtlCol="false" tIns="0" lIns="0" bIns="0" rIns="0">
+            <a:spAutoFit/>
+          </a:bodyPr>
+          <a:lstStyle/>
+          <a:p>
+            <a:pPr algn="l">
+              <a:lnSpc>
+                <a:spcPts val="2137"/>
+              </a:lnSpc>
+            </a:pPr>
+            <a:r>
+              <a:rPr lang="en-US" sz="1425">
+                <a:solidFill>
+                  <a:srgbClr val="3C4A5C"/>
+                </a:solidFill>
+                <a:latin typeface="Arimo"/>
+                <a:ea typeface="Arimo"/>
+                <a:cs typeface="Arimo"/>
+                <a:sym typeface="Arimo"/>
+              </a:rPr>
+              <a:t>$ node tests/run-tests.mjs</a:t>
+            </a:r>
+          </a:p>
+          <a:p>
+            <a:pPr algn="l">
+              <a:lnSpc>
+                <a:spcPts val="2137"/>
+              </a:lnSpc>
+            </a:pPr>
+          </a:p>
+          <a:p>
+            <a:pPr algn="l">
+              <a:lnSpc>
+                <a:spcPts val="2137"/>
+              </a:lnSpc>
+            </a:pPr>
+            <a:r>
+              <a:rPr lang="en-US" sz="1425">
+                <a:solidFill>
+                  <a:srgbClr val="3C4A5C"/>
+                </a:solidFill>
+                <a:latin typeface="Arimo"/>
+                <a:ea typeface="Arimo"/>
+                <a:cs typeface="Arimo"/>
+                <a:sym typeface="Arimo"/>
+              </a:rPr>
+              <a:t> TC01   PASS   bat buoc MFA lan dau</a:t>
+            </a:r>
+          </a:p>
+          <a:p>
+            <a:pPr algn="l">
+              <a:lnSpc>
+                <a:spcPts val="2137"/>
+              </a:lnSpc>
+            </a:pPr>
+            <a:r>
+              <a:rPr lang="en-US" sz="1425">
+                <a:solidFill>
+                  <a:srgbClr val="3C4A5C"/>
+                </a:solidFill>
+                <a:latin typeface="Arimo"/>
+                <a:ea typeface="Arimo"/>
+                <a:cs typeface="Arimo"/>
+                <a:sym typeface="Arimo"/>
+              </a:rPr>
+              <a:t> TC11   PASS   sua payload JWT</a:t>
+            </a:r>
+          </a:p>
+          <a:p>
+            <a:pPr algn="l">
+              <a:lnSpc>
+                <a:spcPts val="2137"/>
+              </a:lnSpc>
+            </a:pPr>
+            <a:r>
+              <a:rPr lang="en-US" sz="1425">
+                <a:solidFill>
+                  <a:srgbClr val="3C4A5C"/>
+                </a:solidFill>
+                <a:latin typeface="Arimo"/>
+                <a:ea typeface="Arimo"/>
+                <a:cs typeface="Arimo"/>
+                <a:sym typeface="Arimo"/>
+              </a:rPr>
+              <a:t> TC12   PASS   JWT alg=none</a:t>
+            </a:r>
+          </a:p>
+          <a:p>
+            <a:pPr algn="l">
+              <a:lnSpc>
+                <a:spcPts val="2137"/>
+              </a:lnSpc>
+            </a:pPr>
+            <a:r>
+              <a:rPr lang="en-US" sz="1425">
+                <a:solidFill>
+                  <a:srgbClr val="3C4A5C"/>
+                </a:solidFill>
+                <a:latin typeface="Arimo"/>
+                <a:ea typeface="Arimo"/>
+                <a:cs typeface="Arimo"/>
+                <a:sym typeface="Arimo"/>
+              </a:rPr>
+              <a:t> TC05   PASS   chuoi hash 268 dong, khong vi pham</a:t>
+            </a:r>
+          </a:p>
+          <a:p>
+            <a:pPr algn="l">
+              <a:lnSpc>
+                <a:spcPts val="2137"/>
+              </a:lnSpc>
+            </a:pPr>
+            <a:r>
+              <a:rPr lang="en-US" sz="1425">
+                <a:solidFill>
+                  <a:srgbClr val="3C4A5C"/>
+                </a:solidFill>
+                <a:latin typeface="Arimo"/>
+                <a:ea typeface="Arimo"/>
+                <a:cs typeface="Arimo"/>
+                <a:sym typeface="Arimo"/>
+              </a:rPr>
+              <a:t> TC22   PASS   sua diem thang trong DB -&gt; phat hien lech</a:t>
+            </a:r>
+          </a:p>
+          <a:p>
+            <a:pPr algn="l">
+              <a:lnSpc>
+                <a:spcPts val="2137"/>
+              </a:lnSpc>
+            </a:pPr>
+            <a:r>
+              <a:rPr lang="en-US" sz="1425">
+                <a:solidFill>
+                  <a:srgbClr val="3C4A5C"/>
+                </a:solidFill>
+                <a:latin typeface="Arimo"/>
+                <a:ea typeface="Arimo"/>
+                <a:cs typeface="Arimo"/>
+                <a:sym typeface="Arimo"/>
+              </a:rPr>
+              <a:t> TC24   PASS   sua audit id 3 -&gt; dut chuoi hash</a:t>
+            </a:r>
+          </a:p>
+          <a:p>
+            <a:pPr algn="l">
+              <a:lnSpc>
+                <a:spcPts val="2137"/>
+              </a:lnSpc>
+            </a:pPr>
+            <a:r>
+              <a:rPr lang="en-US" sz="1425">
+                <a:solidFill>
+                  <a:srgbClr val="3C4A5C"/>
+                </a:solidFill>
+                <a:latin typeface="Arimo"/>
+                <a:ea typeface="Arimo"/>
+                <a:cs typeface="Arimo"/>
+                <a:sym typeface="Arimo"/>
+              </a:rPr>
+              <a:t> TC23   PASS   app_user bi tu choi 4 lenh pha hoai</a:t>
+            </a:r>
+          </a:p>
+          <a:p>
+            <a:pPr algn="l">
+              <a:lnSpc>
+                <a:spcPts val="2137"/>
+              </a:lnSpc>
+            </a:pPr>
+            <a:r>
+              <a:rPr lang="en-US" sz="1425">
+                <a:solidFill>
+                  <a:srgbClr val="3C4A5C"/>
+                </a:solidFill>
+                <a:latin typeface="Arimo"/>
+                <a:ea typeface="Arimo"/>
+                <a:cs typeface="Arimo"/>
+                <a:sym typeface="Arimo"/>
+              </a:rPr>
+              <a:t> TC19   PASS   SQLi qua WAF -&gt; 403</a:t>
+            </a:r>
+          </a:p>
+          <a:p>
+            <a:pPr algn="l">
+              <a:lnSpc>
+                <a:spcPts val="2137"/>
+              </a:lnSpc>
+            </a:pPr>
+            <a:r>
+              <a:rPr lang="en-US" sz="1425">
+                <a:solidFill>
+                  <a:srgbClr val="3C4A5C"/>
+                </a:solidFill>
+                <a:latin typeface="Arimo"/>
+                <a:ea typeface="Arimo"/>
+                <a:cs typeface="Arimo"/>
+                <a:sym typeface="Arimo"/>
+              </a:rPr>
+              <a:t> TC21   PASS   chi waf anh xa port ra host</a:t>
+            </a:r>
+          </a:p>
+          <a:p>
+            <a:pPr algn="l">
+              <a:lnSpc>
+                <a:spcPts val="2137"/>
+              </a:lnSpc>
+            </a:pPr>
+            <a:r>
+              <a:rPr lang="en-US" sz="1425">
+                <a:solidFill>
+                  <a:srgbClr val="3C4A5C"/>
+                </a:solidFill>
+                <a:latin typeface="Arimo"/>
+                <a:ea typeface="Arimo"/>
+                <a:cs typeface="Arimo"/>
+                <a:sym typeface="Arimo"/>
+              </a:rPr>
+              <a:t> TC09   PASS   3 lan OTP sai -&gt; khoa, canh bao HIGH</a:t>
+            </a:r>
+          </a:p>
+          <a:p>
+            <a:pPr algn="l">
+              <a:lnSpc>
+                <a:spcPts val="2137"/>
+              </a:lnSpc>
+            </a:pPr>
+            <a:r>
+              <a:rPr lang="en-US" sz="1425">
+                <a:solidFill>
+                  <a:srgbClr val="3C4A5C"/>
+                </a:solidFill>
+                <a:latin typeface="Arimo"/>
+                <a:ea typeface="Arimo"/>
+                <a:cs typeface="Arimo"/>
+                <a:sym typeface="Arimo"/>
+              </a:rPr>
+              <a:t> ...</a:t>
+            </a:r>
+          </a:p>
+          <a:p>
+            <a:pPr algn="l">
+              <a:lnSpc>
+                <a:spcPts val="2137"/>
+              </a:lnSpc>
+            </a:pPr>
+          </a:p>
+          <a:p>
+            <a:pPr algn="l">
+              <a:lnSpc>
+                <a:spcPts val="2137"/>
+              </a:lnSpc>
+            </a:pPr>
+            <a:r>
+              <a:rPr lang="en-US" sz="1425">
+                <a:solidFill>
+                  <a:srgbClr val="3C4A5C"/>
+                </a:solidFill>
+                <a:latin typeface="Arimo"/>
+                <a:ea typeface="Arimo"/>
+                <a:cs typeface="Arimo"/>
+                <a:sym typeface="Arimo"/>
+              </a:rPr>
+              <a:t>25/25 PASS</a:t>
+            </a:r>
+          </a:p>
+        </p:txBody>
+      </p:sp>
+    </p:spTree>
+  </p:cSld>
+  <p:clrMapOvr>
+    <a:masterClrMapping/>
+  </p:clrMapOvr>
+</p:sld>
+</file>
+
+<file path=ppt/slides/slide11.xml><?xml version="1.0" encoding="utf-8"?>
+<p:sld xmlns:p="http://schemas.openxmlformats.org/presentationml/2006/main" xmlns:a="http://schemas.openxmlformats.org/drawingml/2006/main">
+  <p:cSld>
+    <p:bg>
+      <p:bgPr>
+        <a:solidFill>
+          <a:srgbClr val="EDF1F6"/>
+        </a:solidFill>
+      </p:bgPr>
+    </p:bg>
+    <p:spTree>
+      <p:nvGrpSpPr>
+        <p:cNvPr id="1" name=""/>
+        <p:cNvGrpSpPr/>
+        <p:nvPr/>
+      </p:nvGrpSpPr>
+      <p:grpSpPr>
+        <a:xfrm>
+          <a:off x="0" y="0"/>
+          <a:ext cx="0" cy="0"/>
+          <a:chOff x="0" y="0"/>
+          <a:chExt cx="0" cy="0"/>
+        </a:xfrm>
+      </p:grpSpPr>
+      <p:grpSp>
+        <p:nvGrpSpPr>
+          <p:cNvPr name="Group 2" id="2"/>
+          <p:cNvGrpSpPr/>
+          <p:nvPr/>
+        </p:nvGrpSpPr>
+        <p:grpSpPr>
+          <a:xfrm rot="0">
+            <a:off x="1047750" y="819150"/>
+            <a:ext cx="876300" cy="47625"/>
+            <a:chOff x="0" y="0"/>
+            <a:chExt cx="1168400" cy="63500"/>
+          </a:xfrm>
+        </p:grpSpPr>
+        <p:sp>
+          <p:nvSpPr>
+            <p:cNvPr name="Freeform 3" id="3"/>
+            <p:cNvSpPr/>
+            <p:nvPr/>
+          </p:nvSpPr>
+          <p:spPr>
+            <a:xfrm flipH="false" flipV="false" rot="0">
+              <a:off x="0" y="0"/>
+              <a:ext cx="1168400" cy="63500"/>
+            </a:xfrm>
+            <a:custGeom>
+              <a:avLst/>
+              <a:gdLst/>
+              <a:ahLst/>
+              <a:cxnLst/>
+              <a:rect r="r" b="b" t="t" l="l"/>
+              <a:pathLst>
+                <a:path h="63500" w="1168400">
+                  <a:moveTo>
+                    <a:pt x="0" y="0"/>
+                  </a:moveTo>
+                  <a:lnTo>
+                    <a:pt x="1168400" y="0"/>
+                  </a:lnTo>
+                  <a:lnTo>
+                    <a:pt x="1168400" y="63500"/>
+                  </a:lnTo>
+                  <a:lnTo>
+                    <a:pt x="0" y="63500"/>
+                  </a:lnTo>
+                  <a:close/>
+                </a:path>
+              </a:pathLst>
+            </a:custGeom>
+            <a:solidFill>
+              <a:srgbClr val="2E5C8A"/>
+            </a:solidFill>
+            <a:ln cap="sq">
+              <a:noFill/>
+              <a:prstDash val="solid"/>
+              <a:miter/>
+            </a:ln>
+          </p:spPr>
+        </p:sp>
+        <p:sp>
+          <p:nvSpPr>
+            <p:cNvPr name="TextBox 4" id="4"/>
+            <p:cNvSpPr txBox="true"/>
+            <p:nvPr/>
+          </p:nvSpPr>
+          <p:spPr>
+            <a:xfrm>
+              <a:off x="0" y="-38100"/>
+              <a:ext cx="1168400" cy="101600"/>
+            </a:xfrm>
+            <a:prstGeom prst="rect">
+              <a:avLst/>
+            </a:prstGeom>
+          </p:spPr>
+          <p:txBody>
+            <a:bodyPr anchor="ctr" rtlCol="false" tIns="50800" lIns="50800" bIns="50800" rIns="50800"/>
+            <a:lstStyle/>
+            <a:p>
+              <a:pPr algn="l">
+                <a:lnSpc>
+                  <a:spcPts val="1679"/>
+                </a:lnSpc>
+              </a:pPr>
+            </a:p>
+          </p:txBody>
+        </p:sp>
+      </p:grpSp>
+      <p:sp>
+        <p:nvSpPr>
+          <p:cNvPr name="TextBox 5" id="5"/>
+          <p:cNvSpPr txBox="true"/>
+          <p:nvPr/>
+        </p:nvSpPr>
+        <p:spPr>
+          <a:xfrm rot="0">
+            <a:off x="16764000" y="666750"/>
+            <a:ext cx="476250" cy="222885"/>
+          </a:xfrm>
+          <a:prstGeom prst="rect">
+            <a:avLst/>
+          </a:prstGeom>
+        </p:spPr>
+        <p:txBody>
+          <a:bodyPr anchor="t" rtlCol="false" tIns="0" lIns="0" bIns="0" rIns="0">
+            <a:spAutoFit/>
+          </a:bodyPr>
+          <a:lstStyle/>
+          <a:p>
+            <a:pPr algn="r" marL="0" indent="0" lvl="0">
+              <a:lnSpc>
+                <a:spcPts val="1889"/>
+              </a:lnSpc>
+              <a:spcBef>
+                <a:spcPct val="0"/>
+              </a:spcBef>
+            </a:pPr>
+            <a:r>
+              <a:rPr lang="en-US" sz="1350" strike="noStrike" u="none">
+                <a:solidFill>
+                  <a:srgbClr val="8A98AA"/>
+                </a:solidFill>
+                <a:latin typeface="JetBrains Mono"/>
+                <a:ea typeface="JetBrains Mono"/>
+                <a:cs typeface="JetBrains Mono"/>
+                <a:sym typeface="JetBrains Mono"/>
+              </a:rPr>
+              <a:t>11</a:t>
             </a:r>
           </a:p>
         </p:txBody>
@@ -7928,7 +8917,7 @@
 </p:sld>
 </file>
 
-<file path=ppt/slides/slide11.xml><?xml version="1.0" encoding="utf-8"?>
+<file path=ppt/slides/slide12.xml><?xml version="1.0" encoding="utf-8"?>
 <p:sld xmlns:p="http://schemas.openxmlformats.org/presentationml/2006/main" xmlns:a="http://schemas.openxmlformats.org/drawingml/2006/main">
   <p:cSld>
     <p:bg>
@@ -8060,13 +9049,16 @@
           </a:bodyPr>
           <a:lstStyle/>
           <a:p>
-            <a:pPr algn="r">
+            <a:pPr algn="r" marL="0" indent="0" lvl="0">
               <a:lnSpc>
                 <a:spcPts val="1889"/>
               </a:lnSpc>
+              <a:spcBef>
+                <a:spcPct val="0"/>
+              </a:spcBef>
             </a:pPr>
             <a:r>
-              <a:rPr lang="en-US" sz="1350">
+              <a:rPr lang="en-US" sz="1350" strike="noStrike" u="none">
                 <a:solidFill>
                   <a:srgbClr val="8A98AA"/>
                 </a:solidFill>
@@ -8075,7 +9067,7 @@
                 <a:cs typeface="JetBrains Mono"/>
                 <a:sym typeface="JetBrains Mono"/>
               </a:rPr>
-              <a:t>11</a:t>
+              <a:t>12</a:t>
             </a:r>
           </a:p>
         </p:txBody>
@@ -8899,7 +9891,7 @@
 </p:sld>
 </file>
 
-<file path=ppt/slides/slide12.xml><?xml version="1.0" encoding="utf-8"?>
+<file path=ppt/slides/slide13.xml><?xml version="1.0" encoding="utf-8"?>
 <p:sld xmlns:p="http://schemas.openxmlformats.org/presentationml/2006/main" xmlns:a="http://schemas.openxmlformats.org/drawingml/2006/main">
   <p:cSld>
     <p:bg>
@@ -9031,13 +10023,16 @@
           </a:bodyPr>
           <a:lstStyle/>
           <a:p>
-            <a:pPr algn="r">
+            <a:pPr algn="r" marL="0" indent="0" lvl="0">
               <a:lnSpc>
                 <a:spcPts val="1889"/>
               </a:lnSpc>
+              <a:spcBef>
+                <a:spcPct val="0"/>
+              </a:spcBef>
             </a:pPr>
             <a:r>
-              <a:rPr lang="en-US" sz="1350">
+              <a:rPr lang="en-US" sz="1350" strike="noStrike" u="none">
                 <a:solidFill>
                   <a:srgbClr val="8A98AA"/>
                 </a:solidFill>
@@ -9046,7 +10041,7 @@
                 <a:cs typeface="JetBrains Mono"/>
                 <a:sym typeface="JetBrains Mono"/>
               </a:rPr>
-              <a:t>12</a:t>
+              <a:t>13</a:t>
             </a:r>
           </a:p>
         </p:txBody>
@@ -9485,6 +10480,817 @@
 </file>
 
 <file path=ppt/slides/slide2.xml><?xml version="1.0" encoding="utf-8"?>
+<p:sld xmlns:p="http://schemas.openxmlformats.org/presentationml/2006/main" xmlns:a="http://schemas.openxmlformats.org/drawingml/2006/main">
+  <p:cSld>
+    <p:bg>
+      <p:bgPr>
+        <a:solidFill>
+          <a:srgbClr val="EDF1F6"/>
+        </a:solidFill>
+      </p:bgPr>
+    </p:bg>
+    <p:spTree>
+      <p:nvGrpSpPr>
+        <p:cNvPr id="1" name=""/>
+        <p:cNvGrpSpPr/>
+        <p:nvPr/>
+      </p:nvGrpSpPr>
+      <p:grpSpPr>
+        <a:xfrm>
+          <a:off x="0" y="0"/>
+          <a:ext cx="0" cy="0"/>
+          <a:chOff x="0" y="0"/>
+          <a:chExt cx="0" cy="0"/>
+        </a:xfrm>
+      </p:grpSpPr>
+      <p:grpSp>
+        <p:nvGrpSpPr>
+          <p:cNvPr name="Group 2" id="2"/>
+          <p:cNvGrpSpPr/>
+          <p:nvPr/>
+        </p:nvGrpSpPr>
+        <p:grpSpPr>
+          <a:xfrm rot="0">
+            <a:off x="1047750" y="819150"/>
+            <a:ext cx="876300" cy="47625"/>
+            <a:chOff x="0" y="0"/>
+            <a:chExt cx="1168400" cy="63500"/>
+          </a:xfrm>
+        </p:grpSpPr>
+        <p:sp>
+          <p:nvSpPr>
+            <p:cNvPr name="Freeform 3" id="3"/>
+            <p:cNvSpPr/>
+            <p:nvPr/>
+          </p:nvSpPr>
+          <p:spPr>
+            <a:xfrm flipH="false" flipV="false" rot="0">
+              <a:off x="0" y="0"/>
+              <a:ext cx="1168400" cy="63500"/>
+            </a:xfrm>
+            <a:custGeom>
+              <a:avLst/>
+              <a:gdLst/>
+              <a:ahLst/>
+              <a:cxnLst/>
+              <a:rect r="r" b="b" t="t" l="l"/>
+              <a:pathLst>
+                <a:path h="63500" w="1168400">
+                  <a:moveTo>
+                    <a:pt x="0" y="0"/>
+                  </a:moveTo>
+                  <a:lnTo>
+                    <a:pt x="1168400" y="0"/>
+                  </a:lnTo>
+                  <a:lnTo>
+                    <a:pt x="1168400" y="63500"/>
+                  </a:lnTo>
+                  <a:lnTo>
+                    <a:pt x="0" y="63500"/>
+                  </a:lnTo>
+                  <a:close/>
+                </a:path>
+              </a:pathLst>
+            </a:custGeom>
+            <a:solidFill>
+              <a:srgbClr val="2E5C8A"/>
+            </a:solidFill>
+          </p:spPr>
+        </p:sp>
+        <p:sp>
+          <p:nvSpPr>
+            <p:cNvPr name="TextBox 4" id="4"/>
+            <p:cNvSpPr txBox="true"/>
+            <p:nvPr/>
+          </p:nvSpPr>
+          <p:spPr>
+            <a:xfrm>
+              <a:off x="0" y="-38100"/>
+              <a:ext cx="1168400" cy="101600"/>
+            </a:xfrm>
+            <a:prstGeom prst="rect">
+              <a:avLst/>
+            </a:prstGeom>
+          </p:spPr>
+          <p:txBody>
+            <a:bodyPr anchor="ctr" rtlCol="false" tIns="50800" lIns="50800" bIns="50800" rIns="50800"/>
+            <a:lstStyle/>
+            <a:p>
+              <a:pPr algn="l">
+                <a:lnSpc>
+                  <a:spcPts val="1679"/>
+                </a:lnSpc>
+              </a:pPr>
+            </a:p>
+          </p:txBody>
+        </p:sp>
+      </p:grpSp>
+      <p:sp>
+        <p:nvSpPr>
+          <p:cNvPr name="TextBox 5" id="5"/>
+          <p:cNvSpPr txBox="true"/>
+          <p:nvPr/>
+        </p:nvSpPr>
+        <p:spPr>
+          <a:xfrm rot="0">
+            <a:off x="16764000" y="647700"/>
+            <a:ext cx="476250" cy="241935"/>
+          </a:xfrm>
+          <a:prstGeom prst="rect">
+            <a:avLst/>
+          </a:prstGeom>
+        </p:spPr>
+        <p:txBody>
+          <a:bodyPr anchor="t" rtlCol="false" tIns="0" lIns="0" bIns="0" rIns="0">
+            <a:spAutoFit/>
+          </a:bodyPr>
+          <a:lstStyle/>
+          <a:p>
+            <a:pPr algn="r">
+              <a:lnSpc>
+                <a:spcPts val="1889"/>
+              </a:lnSpc>
+            </a:pPr>
+            <a:r>
+              <a:rPr lang="en-US" sz="1350">
+                <a:solidFill>
+                  <a:srgbClr val="8A98AA"/>
+                </a:solidFill>
+                <a:latin typeface="Arimo"/>
+                <a:ea typeface="Arimo"/>
+                <a:cs typeface="Arimo"/>
+                <a:sym typeface="Arimo"/>
+              </a:rPr>
+              <a:t>02</a:t>
+            </a:r>
+          </a:p>
+        </p:txBody>
+      </p:sp>
+      <p:sp>
+        <p:nvSpPr>
+          <p:cNvPr name="TextBox 6" id="6"/>
+          <p:cNvSpPr txBox="true"/>
+          <p:nvPr/>
+        </p:nvSpPr>
+        <p:spPr>
+          <a:xfrm rot="0">
+            <a:off x="1047750" y="1181100"/>
+            <a:ext cx="11430000" cy="692277"/>
+          </a:xfrm>
+          <a:prstGeom prst="rect">
+            <a:avLst/>
+          </a:prstGeom>
+        </p:spPr>
+        <p:txBody>
+          <a:bodyPr anchor="t" rtlCol="false" tIns="0" lIns="0" bIns="0" rIns="0">
+            <a:spAutoFit/>
+          </a:bodyPr>
+          <a:lstStyle/>
+          <a:p>
+            <a:pPr algn="l">
+              <a:lnSpc>
+                <a:spcPts val="5184"/>
+              </a:lnSpc>
+            </a:pPr>
+            <a:r>
+              <a:rPr lang="en-US" sz="4800" b="true">
+                <a:solidFill>
+                  <a:srgbClr val="1B2A3F"/>
+                </a:solidFill>
+                <a:latin typeface="Arimo Bold"/>
+                <a:ea typeface="Arimo Bold"/>
+                <a:cs typeface="Arimo Bold"/>
+                <a:sym typeface="Arimo Bold"/>
+              </a:rPr>
+              <a:t>Nội dung</a:t>
+            </a:r>
+          </a:p>
+        </p:txBody>
+      </p:sp>
+      <p:sp>
+        <p:nvSpPr>
+          <p:cNvPr name="TextBox 7" id="7"/>
+          <p:cNvSpPr txBox="true"/>
+          <p:nvPr/>
+        </p:nvSpPr>
+        <p:spPr>
+          <a:xfrm rot="0">
+            <a:off x="1047750" y="1962150"/>
+            <a:ext cx="11430000" cy="350520"/>
+          </a:xfrm>
+          <a:prstGeom prst="rect">
+            <a:avLst/>
+          </a:prstGeom>
+        </p:spPr>
+        <p:txBody>
+          <a:bodyPr anchor="t" rtlCol="false" tIns="0" lIns="0" bIns="0" rIns="0">
+            <a:spAutoFit/>
+          </a:bodyPr>
+          <a:lstStyle/>
+          <a:p>
+            <a:pPr algn="l">
+              <a:lnSpc>
+                <a:spcPts val="2729"/>
+              </a:lnSpc>
+            </a:pPr>
+            <a:r>
+              <a:rPr lang="en-US" sz="1950">
+                <a:solidFill>
+                  <a:srgbClr val="3C4A5C"/>
+                </a:solidFill>
+                <a:latin typeface="Arimo"/>
+                <a:ea typeface="Arimo"/>
+                <a:cs typeface="Arimo"/>
+                <a:sym typeface="Arimo"/>
+              </a:rPr>
+              <a:t>Bài trình bày gồm bảy phần</a:t>
+            </a:r>
+          </a:p>
+        </p:txBody>
+      </p:sp>
+      <p:sp>
+        <p:nvSpPr>
+          <p:cNvPr name="TextBox 8" id="8"/>
+          <p:cNvSpPr txBox="true"/>
+          <p:nvPr/>
+        </p:nvSpPr>
+        <p:spPr>
+          <a:xfrm rot="0">
+            <a:off x="1047750" y="2924175"/>
+            <a:ext cx="857250" cy="365760"/>
+          </a:xfrm>
+          <a:prstGeom prst="rect">
+            <a:avLst/>
+          </a:prstGeom>
+        </p:spPr>
+        <p:txBody>
+          <a:bodyPr anchor="t" rtlCol="false" tIns="0" lIns="0" bIns="0" rIns="0">
+            <a:spAutoFit/>
+          </a:bodyPr>
+          <a:lstStyle/>
+          <a:p>
+            <a:pPr algn="l">
+              <a:lnSpc>
+                <a:spcPts val="2940"/>
+              </a:lnSpc>
+            </a:pPr>
+            <a:r>
+              <a:rPr lang="en-US" sz="2100">
+                <a:solidFill>
+                  <a:srgbClr val="2E5C8A"/>
+                </a:solidFill>
+                <a:latin typeface="Arimo"/>
+                <a:ea typeface="Arimo"/>
+                <a:cs typeface="Arimo"/>
+                <a:sym typeface="Arimo"/>
+              </a:rPr>
+              <a:t>01</a:t>
+            </a:r>
+          </a:p>
+        </p:txBody>
+      </p:sp>
+      <p:sp>
+        <p:nvSpPr>
+          <p:cNvPr name="TextBox 9" id="9"/>
+          <p:cNvSpPr txBox="true"/>
+          <p:nvPr/>
+        </p:nvSpPr>
+        <p:spPr>
+          <a:xfrm rot="0">
+            <a:off x="2190750" y="2847975"/>
+            <a:ext cx="14287500" cy="440055"/>
+          </a:xfrm>
+          <a:prstGeom prst="rect">
+            <a:avLst/>
+          </a:prstGeom>
+        </p:spPr>
+        <p:txBody>
+          <a:bodyPr anchor="t" rtlCol="false" tIns="0" lIns="0" bIns="0" rIns="0">
+            <a:spAutoFit/>
+          </a:bodyPr>
+          <a:lstStyle/>
+          <a:p>
+            <a:pPr algn="l">
+              <a:lnSpc>
+                <a:spcPts val="3569"/>
+              </a:lnSpc>
+            </a:pPr>
+            <a:r>
+              <a:rPr lang="en-US" sz="2550">
+                <a:solidFill>
+                  <a:srgbClr val="1B2A3F"/>
+                </a:solidFill>
+                <a:latin typeface="Arimo"/>
+                <a:ea typeface="Arimo"/>
+                <a:cs typeface="Arimo"/>
+                <a:sym typeface="Arimo"/>
+              </a:rPr>
+              <a:t>Bài toán — điểm số cần toàn vẹn</a:t>
+            </a:r>
+          </a:p>
+        </p:txBody>
+      </p:sp>
+      <p:sp>
+        <p:nvSpPr>
+          <p:cNvPr name="TextBox 10" id="10"/>
+          <p:cNvSpPr txBox="true"/>
+          <p:nvPr/>
+        </p:nvSpPr>
+        <p:spPr>
+          <a:xfrm rot="0">
+            <a:off x="1047750" y="3800475"/>
+            <a:ext cx="857250" cy="365760"/>
+          </a:xfrm>
+          <a:prstGeom prst="rect">
+            <a:avLst/>
+          </a:prstGeom>
+        </p:spPr>
+        <p:txBody>
+          <a:bodyPr anchor="t" rtlCol="false" tIns="0" lIns="0" bIns="0" rIns="0">
+            <a:spAutoFit/>
+          </a:bodyPr>
+          <a:lstStyle/>
+          <a:p>
+            <a:pPr algn="l">
+              <a:lnSpc>
+                <a:spcPts val="2940"/>
+              </a:lnSpc>
+            </a:pPr>
+            <a:r>
+              <a:rPr lang="en-US" sz="2100">
+                <a:solidFill>
+                  <a:srgbClr val="2E5C8A"/>
+                </a:solidFill>
+                <a:latin typeface="Arimo"/>
+                <a:ea typeface="Arimo"/>
+                <a:cs typeface="Arimo"/>
+                <a:sym typeface="Arimo"/>
+              </a:rPr>
+              <a:t>02</a:t>
+            </a:r>
+          </a:p>
+        </p:txBody>
+      </p:sp>
+      <p:sp>
+        <p:nvSpPr>
+          <p:cNvPr name="TextBox 11" id="11"/>
+          <p:cNvSpPr txBox="true"/>
+          <p:nvPr/>
+        </p:nvSpPr>
+        <p:spPr>
+          <a:xfrm rot="0">
+            <a:off x="2190750" y="3724275"/>
+            <a:ext cx="14287500" cy="440055"/>
+          </a:xfrm>
+          <a:prstGeom prst="rect">
+            <a:avLst/>
+          </a:prstGeom>
+        </p:spPr>
+        <p:txBody>
+          <a:bodyPr anchor="t" rtlCol="false" tIns="0" lIns="0" bIns="0" rIns="0">
+            <a:spAutoFit/>
+          </a:bodyPr>
+          <a:lstStyle/>
+          <a:p>
+            <a:pPr algn="l">
+              <a:lnSpc>
+                <a:spcPts val="3569"/>
+              </a:lnSpc>
+            </a:pPr>
+            <a:r>
+              <a:rPr lang="en-US" sz="2550">
+                <a:solidFill>
+                  <a:srgbClr val="1B2A3F"/>
+                </a:solidFill>
+                <a:latin typeface="Arimo"/>
+                <a:ea typeface="Arimo"/>
+                <a:cs typeface="Arimo"/>
+                <a:sym typeface="Arimo"/>
+              </a:rPr>
+              <a:t>Kiến trúc phân vùng mạng</a:t>
+            </a:r>
+          </a:p>
+        </p:txBody>
+      </p:sp>
+      <p:sp>
+        <p:nvSpPr>
+          <p:cNvPr name="TextBox 12" id="12"/>
+          <p:cNvSpPr txBox="true"/>
+          <p:nvPr/>
+        </p:nvSpPr>
+        <p:spPr>
+          <a:xfrm rot="0">
+            <a:off x="1047750" y="4676775"/>
+            <a:ext cx="857250" cy="365760"/>
+          </a:xfrm>
+          <a:prstGeom prst="rect">
+            <a:avLst/>
+          </a:prstGeom>
+        </p:spPr>
+        <p:txBody>
+          <a:bodyPr anchor="t" rtlCol="false" tIns="0" lIns="0" bIns="0" rIns="0">
+            <a:spAutoFit/>
+          </a:bodyPr>
+          <a:lstStyle/>
+          <a:p>
+            <a:pPr algn="l">
+              <a:lnSpc>
+                <a:spcPts val="2940"/>
+              </a:lnSpc>
+            </a:pPr>
+            <a:r>
+              <a:rPr lang="en-US" sz="2100">
+                <a:solidFill>
+                  <a:srgbClr val="2E5C8A"/>
+                </a:solidFill>
+                <a:latin typeface="Arimo"/>
+                <a:ea typeface="Arimo"/>
+                <a:cs typeface="Arimo"/>
+                <a:sym typeface="Arimo"/>
+              </a:rPr>
+              <a:t>03</a:t>
+            </a:r>
+          </a:p>
+        </p:txBody>
+      </p:sp>
+      <p:sp>
+        <p:nvSpPr>
+          <p:cNvPr name="TextBox 13" id="13"/>
+          <p:cNvSpPr txBox="true"/>
+          <p:nvPr/>
+        </p:nvSpPr>
+        <p:spPr>
+          <a:xfrm rot="0">
+            <a:off x="2190750" y="4600575"/>
+            <a:ext cx="14287500" cy="440055"/>
+          </a:xfrm>
+          <a:prstGeom prst="rect">
+            <a:avLst/>
+          </a:prstGeom>
+        </p:spPr>
+        <p:txBody>
+          <a:bodyPr anchor="t" rtlCol="false" tIns="0" lIns="0" bIns="0" rIns="0">
+            <a:spAutoFit/>
+          </a:bodyPr>
+          <a:lstStyle/>
+          <a:p>
+            <a:pPr algn="l">
+              <a:lnSpc>
+                <a:spcPts val="3569"/>
+              </a:lnSpc>
+            </a:pPr>
+            <a:r>
+              <a:rPr lang="en-US" sz="2550">
+                <a:solidFill>
+                  <a:srgbClr val="1B2A3F"/>
+                </a:solidFill>
+                <a:latin typeface="Arimo"/>
+                <a:ea typeface="Arimo"/>
+                <a:cs typeface="Arimo"/>
+                <a:sym typeface="Arimo"/>
+              </a:rPr>
+              <a:t>Không tin mặc định — 12 lớp kiểm chứng</a:t>
+            </a:r>
+          </a:p>
+        </p:txBody>
+      </p:sp>
+      <p:sp>
+        <p:nvSpPr>
+          <p:cNvPr name="TextBox 14" id="14"/>
+          <p:cNvSpPr txBox="true"/>
+          <p:nvPr/>
+        </p:nvSpPr>
+        <p:spPr>
+          <a:xfrm rot="0">
+            <a:off x="1047750" y="5553075"/>
+            <a:ext cx="857250" cy="365760"/>
+          </a:xfrm>
+          <a:prstGeom prst="rect">
+            <a:avLst/>
+          </a:prstGeom>
+        </p:spPr>
+        <p:txBody>
+          <a:bodyPr anchor="t" rtlCol="false" tIns="0" lIns="0" bIns="0" rIns="0">
+            <a:spAutoFit/>
+          </a:bodyPr>
+          <a:lstStyle/>
+          <a:p>
+            <a:pPr algn="l">
+              <a:lnSpc>
+                <a:spcPts val="2940"/>
+              </a:lnSpc>
+            </a:pPr>
+            <a:r>
+              <a:rPr lang="en-US" sz="2100">
+                <a:solidFill>
+                  <a:srgbClr val="2E5C8A"/>
+                </a:solidFill>
+                <a:latin typeface="Arimo"/>
+                <a:ea typeface="Arimo"/>
+                <a:cs typeface="Arimo"/>
+                <a:sym typeface="Arimo"/>
+              </a:rPr>
+              <a:t>04</a:t>
+            </a:r>
+          </a:p>
+        </p:txBody>
+      </p:sp>
+      <p:sp>
+        <p:nvSpPr>
+          <p:cNvPr name="TextBox 15" id="15"/>
+          <p:cNvSpPr txBox="true"/>
+          <p:nvPr/>
+        </p:nvSpPr>
+        <p:spPr>
+          <a:xfrm rot="0">
+            <a:off x="2190750" y="5476875"/>
+            <a:ext cx="14287500" cy="440055"/>
+          </a:xfrm>
+          <a:prstGeom prst="rect">
+            <a:avLst/>
+          </a:prstGeom>
+        </p:spPr>
+        <p:txBody>
+          <a:bodyPr anchor="t" rtlCol="false" tIns="0" lIns="0" bIns="0" rIns="0">
+            <a:spAutoFit/>
+          </a:bodyPr>
+          <a:lstStyle/>
+          <a:p>
+            <a:pPr algn="l">
+              <a:lnSpc>
+                <a:spcPts val="3569"/>
+              </a:lnSpc>
+            </a:pPr>
+            <a:r>
+              <a:rPr lang="en-US" sz="2550">
+                <a:solidFill>
+                  <a:srgbClr val="1B2A3F"/>
+                </a:solidFill>
+                <a:latin typeface="Arimo"/>
+                <a:ea typeface="Arimo"/>
+                <a:cs typeface="Arimo"/>
+                <a:sym typeface="Arimo"/>
+              </a:rPr>
+              <a:t>Rủi ro chính và cách kiểm soát</a:t>
+            </a:r>
+          </a:p>
+        </p:txBody>
+      </p:sp>
+      <p:sp>
+        <p:nvSpPr>
+          <p:cNvPr name="TextBox 16" id="16"/>
+          <p:cNvSpPr txBox="true"/>
+          <p:nvPr/>
+        </p:nvSpPr>
+        <p:spPr>
+          <a:xfrm rot="0">
+            <a:off x="1047750" y="6429375"/>
+            <a:ext cx="857250" cy="365760"/>
+          </a:xfrm>
+          <a:prstGeom prst="rect">
+            <a:avLst/>
+          </a:prstGeom>
+        </p:spPr>
+        <p:txBody>
+          <a:bodyPr anchor="t" rtlCol="false" tIns="0" lIns="0" bIns="0" rIns="0">
+            <a:spAutoFit/>
+          </a:bodyPr>
+          <a:lstStyle/>
+          <a:p>
+            <a:pPr algn="l">
+              <a:lnSpc>
+                <a:spcPts val="2940"/>
+              </a:lnSpc>
+            </a:pPr>
+            <a:r>
+              <a:rPr lang="en-US" sz="2100" b="true">
+                <a:solidFill>
+                  <a:srgbClr val="C0392B"/>
+                </a:solidFill>
+                <a:latin typeface="Arimo Bold"/>
+                <a:ea typeface="Arimo Bold"/>
+                <a:cs typeface="Arimo Bold"/>
+                <a:sym typeface="Arimo Bold"/>
+              </a:rPr>
+              <a:t>05</a:t>
+            </a:r>
+          </a:p>
+        </p:txBody>
+      </p:sp>
+      <p:sp>
+        <p:nvSpPr>
+          <p:cNvPr name="TextBox 17" id="17"/>
+          <p:cNvSpPr txBox="true"/>
+          <p:nvPr/>
+        </p:nvSpPr>
+        <p:spPr>
+          <a:xfrm rot="0">
+            <a:off x="2190750" y="6353175"/>
+            <a:ext cx="14287500" cy="440055"/>
+          </a:xfrm>
+          <a:prstGeom prst="rect">
+            <a:avLst/>
+          </a:prstGeom>
+        </p:spPr>
+        <p:txBody>
+          <a:bodyPr anchor="t" rtlCol="false" tIns="0" lIns="0" bIns="0" rIns="0">
+            <a:spAutoFit/>
+          </a:bodyPr>
+          <a:lstStyle/>
+          <a:p>
+            <a:pPr algn="l">
+              <a:lnSpc>
+                <a:spcPts val="3569"/>
+              </a:lnSpc>
+            </a:pPr>
+            <a:r>
+              <a:rPr lang="en-US" sz="2550" b="true">
+                <a:solidFill>
+                  <a:srgbClr val="1B2A3F"/>
+                </a:solidFill>
+                <a:latin typeface="Arimo Bold"/>
+                <a:ea typeface="Arimo Bold"/>
+                <a:cs typeface="Arimo Bold"/>
+                <a:sym typeface="Arimo Bold"/>
+              </a:rPr>
+              <a:t>Demo trực tiếp — cookie bị đánh cắp, insider sửa database</a:t>
+            </a:r>
+          </a:p>
+        </p:txBody>
+      </p:sp>
+      <p:sp>
+        <p:nvSpPr>
+          <p:cNvPr name="TextBox 18" id="18"/>
+          <p:cNvSpPr txBox="true"/>
+          <p:nvPr/>
+        </p:nvSpPr>
+        <p:spPr>
+          <a:xfrm rot="0">
+            <a:off x="1047750" y="7305675"/>
+            <a:ext cx="857250" cy="365760"/>
+          </a:xfrm>
+          <a:prstGeom prst="rect">
+            <a:avLst/>
+          </a:prstGeom>
+        </p:spPr>
+        <p:txBody>
+          <a:bodyPr anchor="t" rtlCol="false" tIns="0" lIns="0" bIns="0" rIns="0">
+            <a:spAutoFit/>
+          </a:bodyPr>
+          <a:lstStyle/>
+          <a:p>
+            <a:pPr algn="l">
+              <a:lnSpc>
+                <a:spcPts val="2940"/>
+              </a:lnSpc>
+            </a:pPr>
+            <a:r>
+              <a:rPr lang="en-US" sz="2100">
+                <a:solidFill>
+                  <a:srgbClr val="2E5C8A"/>
+                </a:solidFill>
+                <a:latin typeface="Arimo"/>
+                <a:ea typeface="Arimo"/>
+                <a:cs typeface="Arimo"/>
+                <a:sym typeface="Arimo"/>
+              </a:rPr>
+              <a:t>06</a:t>
+            </a:r>
+          </a:p>
+        </p:txBody>
+      </p:sp>
+      <p:sp>
+        <p:nvSpPr>
+          <p:cNvPr name="TextBox 19" id="19"/>
+          <p:cNvSpPr txBox="true"/>
+          <p:nvPr/>
+        </p:nvSpPr>
+        <p:spPr>
+          <a:xfrm rot="0">
+            <a:off x="2190750" y="7229475"/>
+            <a:ext cx="14287500" cy="440055"/>
+          </a:xfrm>
+          <a:prstGeom prst="rect">
+            <a:avLst/>
+          </a:prstGeom>
+        </p:spPr>
+        <p:txBody>
+          <a:bodyPr anchor="t" rtlCol="false" tIns="0" lIns="0" bIns="0" rIns="0">
+            <a:spAutoFit/>
+          </a:bodyPr>
+          <a:lstStyle/>
+          <a:p>
+            <a:pPr algn="l">
+              <a:lnSpc>
+                <a:spcPts val="3569"/>
+              </a:lnSpc>
+            </a:pPr>
+            <a:r>
+              <a:rPr lang="en-US" sz="2550">
+                <a:solidFill>
+                  <a:srgbClr val="1B2A3F"/>
+                </a:solidFill>
+                <a:latin typeface="Arimo"/>
+                <a:ea typeface="Arimo"/>
+                <a:cs typeface="Arimo"/>
+                <a:sym typeface="Arimo"/>
+              </a:rPr>
+              <a:t>Kết quả kiểm thử và trade-off</a:t>
+            </a:r>
+          </a:p>
+        </p:txBody>
+      </p:sp>
+      <p:sp>
+        <p:nvSpPr>
+          <p:cNvPr name="TextBox 20" id="20"/>
+          <p:cNvSpPr txBox="true"/>
+          <p:nvPr/>
+        </p:nvSpPr>
+        <p:spPr>
+          <a:xfrm rot="0">
+            <a:off x="1047750" y="8181975"/>
+            <a:ext cx="857250" cy="365760"/>
+          </a:xfrm>
+          <a:prstGeom prst="rect">
+            <a:avLst/>
+          </a:prstGeom>
+        </p:spPr>
+        <p:txBody>
+          <a:bodyPr anchor="t" rtlCol="false" tIns="0" lIns="0" bIns="0" rIns="0">
+            <a:spAutoFit/>
+          </a:bodyPr>
+          <a:lstStyle/>
+          <a:p>
+            <a:pPr algn="l">
+              <a:lnSpc>
+                <a:spcPts val="2940"/>
+              </a:lnSpc>
+            </a:pPr>
+            <a:r>
+              <a:rPr lang="en-US" sz="2100">
+                <a:solidFill>
+                  <a:srgbClr val="2E5C8A"/>
+                </a:solidFill>
+                <a:latin typeface="Arimo"/>
+                <a:ea typeface="Arimo"/>
+                <a:cs typeface="Arimo"/>
+                <a:sym typeface="Arimo"/>
+              </a:rPr>
+              <a:t>07</a:t>
+            </a:r>
+          </a:p>
+        </p:txBody>
+      </p:sp>
+      <p:sp>
+        <p:nvSpPr>
+          <p:cNvPr name="TextBox 21" id="21"/>
+          <p:cNvSpPr txBox="true"/>
+          <p:nvPr/>
+        </p:nvSpPr>
+        <p:spPr>
+          <a:xfrm rot="0">
+            <a:off x="2190750" y="8105775"/>
+            <a:ext cx="14287500" cy="440055"/>
+          </a:xfrm>
+          <a:prstGeom prst="rect">
+            <a:avLst/>
+          </a:prstGeom>
+        </p:spPr>
+        <p:txBody>
+          <a:bodyPr anchor="t" rtlCol="false" tIns="0" lIns="0" bIns="0" rIns="0">
+            <a:spAutoFit/>
+          </a:bodyPr>
+          <a:lstStyle/>
+          <a:p>
+            <a:pPr algn="l">
+              <a:lnSpc>
+                <a:spcPts val="3569"/>
+              </a:lnSpc>
+            </a:pPr>
+            <a:r>
+              <a:rPr lang="en-US" sz="2550">
+                <a:solidFill>
+                  <a:srgbClr val="1B2A3F"/>
+                </a:solidFill>
+                <a:latin typeface="Arimo"/>
+                <a:ea typeface="Arimo"/>
+                <a:cs typeface="Arimo"/>
+                <a:sym typeface="Arimo"/>
+              </a:rPr>
+              <a:t>Hạn chế và kết luận</a:t>
+            </a:r>
+          </a:p>
+        </p:txBody>
+      </p:sp>
+    </p:spTree>
+  </p:cSld>
+  <p:clrMapOvr>
+    <a:masterClrMapping/>
+  </p:clrMapOvr>
+</p:sld>
+</file>
+
+<file path=ppt/slides/slide3.xml><?xml version="1.0" encoding="utf-8"?>
 <p:sld xmlns:p="http://schemas.openxmlformats.org/presentationml/2006/main" xmlns:a="http://schemas.openxmlformats.org/drawingml/2006/main">
   <p:cSld>
     <p:bg>
@@ -9616,13 +11422,16 @@
           </a:bodyPr>
           <a:lstStyle/>
           <a:p>
-            <a:pPr algn="r">
+            <a:pPr algn="r" marL="0" indent="0" lvl="0">
               <a:lnSpc>
                 <a:spcPts val="1889"/>
               </a:lnSpc>
+              <a:spcBef>
+                <a:spcPct val="0"/>
+              </a:spcBef>
             </a:pPr>
             <a:r>
-              <a:rPr lang="en-US" sz="1350">
+              <a:rPr lang="en-US" sz="1350" strike="noStrike" u="none">
                 <a:solidFill>
                   <a:srgbClr val="8A98AA"/>
                 </a:solidFill>
@@ -9631,7 +11440,7 @@
                 <a:cs typeface="JetBrains Mono"/>
                 <a:sym typeface="JetBrains Mono"/>
               </a:rPr>
-              <a:t>02</a:t>
+              <a:t>03</a:t>
             </a:r>
           </a:p>
         </p:txBody>
@@ -9911,7 +11720,7 @@
 </p:sld>
 </file>
 
-<file path=ppt/slides/slide3.xml><?xml version="1.0" encoding="utf-8"?>
+<file path=ppt/slides/slide4.xml><?xml version="1.0" encoding="utf-8"?>
 <p:sld xmlns:p="http://schemas.openxmlformats.org/presentationml/2006/main" xmlns:a="http://schemas.openxmlformats.org/drawingml/2006/main" show="false">
   <p:cSld>
     <p:bg>
@@ -10043,13 +11852,16 @@
           </a:bodyPr>
           <a:lstStyle/>
           <a:p>
-            <a:pPr algn="r">
+            <a:pPr algn="r" marL="0" indent="0" lvl="0">
               <a:lnSpc>
                 <a:spcPts val="1889"/>
               </a:lnSpc>
+              <a:spcBef>
+                <a:spcPct val="0"/>
+              </a:spcBef>
             </a:pPr>
             <a:r>
-              <a:rPr lang="en-US" sz="1350">
+              <a:rPr lang="en-US" sz="1350" strike="noStrike" u="none">
                 <a:solidFill>
                   <a:srgbClr val="8A98AA"/>
                 </a:solidFill>
@@ -10058,7 +11870,7 @@
                 <a:cs typeface="JetBrains Mono"/>
                 <a:sym typeface="JetBrains Mono"/>
               </a:rPr>
-              <a:t>03</a:t>
+              <a:t>04</a:t>
             </a:r>
           </a:p>
         </p:txBody>
@@ -10858,7 +12670,7 @@
 </p:sld>
 </file>
 
-<file path=ppt/slides/slide4.xml><?xml version="1.0" encoding="utf-8"?>
+<file path=ppt/slides/slide5.xml><?xml version="1.0" encoding="utf-8"?>
 <p:sld xmlns:p="http://schemas.openxmlformats.org/presentationml/2006/main" xmlns:a="http://schemas.openxmlformats.org/drawingml/2006/main" xmlns:r="http://schemas.openxmlformats.org/officeDocument/2006/relationships">
   <p:cSld>
     <p:bg>
@@ -10990,13 +12802,16 @@
           </a:bodyPr>
           <a:lstStyle/>
           <a:p>
-            <a:pPr algn="r">
+            <a:pPr algn="r" marL="0" indent="0" lvl="0">
               <a:lnSpc>
                 <a:spcPts val="1889"/>
               </a:lnSpc>
+              <a:spcBef>
+                <a:spcPct val="0"/>
+              </a:spcBef>
             </a:pPr>
             <a:r>
-              <a:rPr lang="en-US" sz="1350">
+              <a:rPr lang="en-US" sz="1350" strike="noStrike" u="none">
                 <a:solidFill>
                   <a:srgbClr val="8A98AA"/>
                 </a:solidFill>
@@ -11005,7 +12820,7 @@
                 <a:cs typeface="JetBrains Mono"/>
                 <a:sym typeface="JetBrains Mono"/>
               </a:rPr>
-              <a:t>04</a:t>
+              <a:t>05</a:t>
             </a:r>
           </a:p>
         </p:txBody>
@@ -11421,7 +13236,7 @@
 </p:sld>
 </file>
 
-<file path=ppt/slides/slide5.xml><?xml version="1.0" encoding="utf-8"?>
+<file path=ppt/slides/slide6.xml><?xml version="1.0" encoding="utf-8"?>
 <p:sld xmlns:p="http://schemas.openxmlformats.org/presentationml/2006/main" xmlns:a="http://schemas.openxmlformats.org/drawingml/2006/main">
   <p:cSld>
     <p:bg>
@@ -11553,13 +13368,16 @@
           </a:bodyPr>
           <a:lstStyle/>
           <a:p>
-            <a:pPr algn="r">
+            <a:pPr algn="r" marL="0" indent="0" lvl="0">
               <a:lnSpc>
                 <a:spcPts val="1889"/>
               </a:lnSpc>
+              <a:spcBef>
+                <a:spcPct val="0"/>
+              </a:spcBef>
             </a:pPr>
             <a:r>
-              <a:rPr lang="en-US" sz="1350">
+              <a:rPr lang="en-US" sz="1350" strike="noStrike" u="none">
                 <a:solidFill>
                   <a:srgbClr val="8A98AA"/>
                 </a:solidFill>
@@ -11568,7 +13386,7 @@
                 <a:cs typeface="JetBrains Mono"/>
                 <a:sym typeface="JetBrains Mono"/>
               </a:rPr>
-              <a:t>05</a:t>
+              <a:t>06</a:t>
             </a:r>
           </a:p>
         </p:txBody>
@@ -12522,7 +14340,7 @@
 </p:sld>
 </file>
 
-<file path=ppt/slides/slide6.xml><?xml version="1.0" encoding="utf-8"?>
+<file path=ppt/slides/slide7.xml><?xml version="1.0" encoding="utf-8"?>
 <p:sld xmlns:p="http://schemas.openxmlformats.org/presentationml/2006/main" xmlns:a="http://schemas.openxmlformats.org/drawingml/2006/main" show="false">
   <p:cSld>
     <p:bg>
@@ -12654,13 +14472,16 @@
           </a:bodyPr>
           <a:lstStyle/>
           <a:p>
-            <a:pPr algn="r">
+            <a:pPr algn="r" marL="0" indent="0" lvl="0">
               <a:lnSpc>
                 <a:spcPts val="1889"/>
               </a:lnSpc>
+              <a:spcBef>
+                <a:spcPct val="0"/>
+              </a:spcBef>
             </a:pPr>
             <a:r>
-              <a:rPr lang="en-US" sz="1350">
+              <a:rPr lang="en-US" sz="1350" strike="noStrike" u="none">
                 <a:solidFill>
                   <a:srgbClr val="8A98AA"/>
                 </a:solidFill>
@@ -12669,7 +14490,7 @@
                 <a:cs typeface="JetBrains Mono"/>
                 <a:sym typeface="JetBrains Mono"/>
               </a:rPr>
-              <a:t>06</a:t>
+              <a:t>07</a:t>
             </a:r>
           </a:p>
         </p:txBody>
@@ -14457,7 +16278,7 @@
 </p:sld>
 </file>
 
-<file path=ppt/slides/slide7.xml><?xml version="1.0" encoding="utf-8"?>
+<file path=ppt/slides/slide8.xml><?xml version="1.0" encoding="utf-8"?>
 <p:sld xmlns:p="http://schemas.openxmlformats.org/presentationml/2006/main" xmlns:a="http://schemas.openxmlformats.org/drawingml/2006/main">
   <p:cSld>
     <p:bg>
@@ -14589,13 +16410,16 @@
           </a:bodyPr>
           <a:lstStyle/>
           <a:p>
-            <a:pPr algn="r">
+            <a:pPr algn="r" marL="0" indent="0" lvl="0">
               <a:lnSpc>
                 <a:spcPts val="1889"/>
               </a:lnSpc>
+              <a:spcBef>
+                <a:spcPct val="0"/>
+              </a:spcBef>
             </a:pPr>
             <a:r>
-              <a:rPr lang="en-US" sz="1350">
+              <a:rPr lang="en-US" sz="1350" strike="noStrike" u="none">
                 <a:solidFill>
                   <a:srgbClr val="8A98AA"/>
                 </a:solidFill>
@@ -14604,7 +16428,7 @@
                 <a:cs typeface="JetBrains Mono"/>
                 <a:sym typeface="JetBrains Mono"/>
               </a:rPr>
-              <a:t>07</a:t>
+              <a:t>08</a:t>
             </a:r>
           </a:p>
         </p:txBody>
@@ -16372,7 +18196,7 @@
 </p:sld>
 </file>
 
-<file path=ppt/slides/slide8.xml><?xml version="1.0" encoding="utf-8"?>
+<file path=ppt/slides/slide9.xml><?xml version="1.0" encoding="utf-8"?>
 <p:sld xmlns:p="http://schemas.openxmlformats.org/presentationml/2006/main" xmlns:a="http://schemas.openxmlformats.org/drawingml/2006/main">
   <p:cSld>
     <p:bg>
@@ -16504,13 +18328,16 @@
           </a:bodyPr>
           <a:lstStyle/>
           <a:p>
-            <a:pPr algn="r">
+            <a:pPr algn="r" marL="0" indent="0" lvl="0">
               <a:lnSpc>
                 <a:spcPts val="1889"/>
               </a:lnSpc>
+              <a:spcBef>
+                <a:spcPct val="0"/>
+              </a:spcBef>
             </a:pPr>
             <a:r>
-              <a:rPr lang="en-US" sz="1350">
+              <a:rPr lang="en-US" sz="1350" strike="noStrike" u="none">
                 <a:solidFill>
                   <a:srgbClr val="8A98AA"/>
                 </a:solidFill>
@@ -16519,7 +18346,7 @@
                 <a:cs typeface="JetBrains Mono"/>
                 <a:sym typeface="JetBrains Mono"/>
               </a:rPr>
-              <a:t>08</a:t>
+              <a:t>09</a:t>
             </a:r>
           </a:p>
         </p:txBody>
@@ -16692,752 +18519,6 @@
                 <a:sym typeface="JetBrains Mono"/>
               </a:rPr>
               <a:t>Màn hình live  ·  KB2 đánh cắp cookie  ·  KB6 insider sửa DB</a:t>
-            </a:r>
-          </a:p>
-        </p:txBody>
-      </p:sp>
-    </p:spTree>
-  </p:cSld>
-  <p:clrMapOvr>
-    <a:masterClrMapping/>
-  </p:clrMapOvr>
-</p:sld>
-</file>
-
-<file path=ppt/slides/slide9.xml><?xml version="1.0" encoding="utf-8"?>
-<p:sld xmlns:p="http://schemas.openxmlformats.org/presentationml/2006/main" xmlns:a="http://schemas.openxmlformats.org/drawingml/2006/main">
-  <p:cSld>
-    <p:bg>
-      <p:bgPr>
-        <a:solidFill>
-          <a:srgbClr val="F7F9FC"/>
-        </a:solidFill>
-      </p:bgPr>
-    </p:bg>
-    <p:spTree>
-      <p:nvGrpSpPr>
-        <p:cNvPr id="1" name=""/>
-        <p:cNvGrpSpPr/>
-        <p:nvPr/>
-      </p:nvGrpSpPr>
-      <p:grpSpPr>
-        <a:xfrm>
-          <a:off x="0" y="0"/>
-          <a:ext cx="0" cy="0"/>
-          <a:chOff x="0" y="0"/>
-          <a:chExt cx="0" cy="0"/>
-        </a:xfrm>
-      </p:grpSpPr>
-      <p:grpSp>
-        <p:nvGrpSpPr>
-          <p:cNvPr name="Group 2" id="2"/>
-          <p:cNvGrpSpPr/>
-          <p:nvPr/>
-        </p:nvGrpSpPr>
-        <p:grpSpPr>
-          <a:xfrm rot="0">
-            <a:off x="1047750" y="819150"/>
-            <a:ext cx="876300" cy="47625"/>
-            <a:chOff x="0" y="0"/>
-            <a:chExt cx="1168400" cy="63500"/>
-          </a:xfrm>
-        </p:grpSpPr>
-        <p:sp>
-          <p:nvSpPr>
-            <p:cNvPr name="Freeform 3" id="3"/>
-            <p:cNvSpPr/>
-            <p:nvPr/>
-          </p:nvSpPr>
-          <p:spPr>
-            <a:xfrm flipH="false" flipV="false" rot="0">
-              <a:off x="0" y="0"/>
-              <a:ext cx="1168400" cy="63500"/>
-            </a:xfrm>
-            <a:custGeom>
-              <a:avLst/>
-              <a:gdLst/>
-              <a:ahLst/>
-              <a:cxnLst/>
-              <a:rect r="r" b="b" t="t" l="l"/>
-              <a:pathLst>
-                <a:path h="63500" w="1168400">
-                  <a:moveTo>
-                    <a:pt x="0" y="0"/>
-                  </a:moveTo>
-                  <a:lnTo>
-                    <a:pt x="1168400" y="0"/>
-                  </a:lnTo>
-                  <a:lnTo>
-                    <a:pt x="1168400" y="63500"/>
-                  </a:lnTo>
-                  <a:lnTo>
-                    <a:pt x="0" y="63500"/>
-                  </a:lnTo>
-                  <a:close/>
-                </a:path>
-              </a:pathLst>
-            </a:custGeom>
-            <a:solidFill>
-              <a:srgbClr val="2E5C8A"/>
-            </a:solidFill>
-            <a:ln cap="sq">
-              <a:noFill/>
-              <a:prstDash val="solid"/>
-              <a:miter/>
-            </a:ln>
-          </p:spPr>
-        </p:sp>
-        <p:sp>
-          <p:nvSpPr>
-            <p:cNvPr name="TextBox 4" id="4"/>
-            <p:cNvSpPr txBox="true"/>
-            <p:nvPr/>
-          </p:nvSpPr>
-          <p:spPr>
-            <a:xfrm>
-              <a:off x="0" y="-38100"/>
-              <a:ext cx="1168400" cy="101600"/>
-            </a:xfrm>
-            <a:prstGeom prst="rect">
-              <a:avLst/>
-            </a:prstGeom>
-          </p:spPr>
-          <p:txBody>
-            <a:bodyPr anchor="ctr" rtlCol="false" tIns="50800" lIns="50800" bIns="50800" rIns="50800"/>
-            <a:lstStyle/>
-            <a:p>
-              <a:pPr algn="l">
-                <a:lnSpc>
-                  <a:spcPts val="1679"/>
-                </a:lnSpc>
-              </a:pPr>
-            </a:p>
-          </p:txBody>
-        </p:sp>
-      </p:grpSp>
-      <p:sp>
-        <p:nvSpPr>
-          <p:cNvPr name="TextBox 5" id="5"/>
-          <p:cNvSpPr txBox="true"/>
-          <p:nvPr/>
-        </p:nvSpPr>
-        <p:spPr>
-          <a:xfrm rot="0">
-            <a:off x="16764000" y="666750"/>
-            <a:ext cx="476250" cy="222885"/>
-          </a:xfrm>
-          <a:prstGeom prst="rect">
-            <a:avLst/>
-          </a:prstGeom>
-        </p:spPr>
-        <p:txBody>
-          <a:bodyPr anchor="t" rtlCol="false" tIns="0" lIns="0" bIns="0" rIns="0">
-            <a:spAutoFit/>
-          </a:bodyPr>
-          <a:lstStyle/>
-          <a:p>
-            <a:pPr algn="r">
-              <a:lnSpc>
-                <a:spcPts val="1889"/>
-              </a:lnSpc>
-            </a:pPr>
-            <a:r>
-              <a:rPr lang="en-US" sz="1350">
-                <a:solidFill>
-                  <a:srgbClr val="8A98AA"/>
-                </a:solidFill>
-                <a:latin typeface="JetBrains Mono"/>
-                <a:ea typeface="JetBrains Mono"/>
-                <a:cs typeface="JetBrains Mono"/>
-                <a:sym typeface="JetBrains Mono"/>
-              </a:rPr>
-              <a:t>09</a:t>
-            </a:r>
-          </a:p>
-        </p:txBody>
-      </p:sp>
-      <p:sp>
-        <p:nvSpPr>
-          <p:cNvPr name="TextBox 6" id="6"/>
-          <p:cNvSpPr txBox="true"/>
-          <p:nvPr/>
-        </p:nvSpPr>
-        <p:spPr>
-          <a:xfrm rot="0">
-            <a:off x="1047750" y="1304925"/>
-            <a:ext cx="8572500" cy="663702"/>
-          </a:xfrm>
-          <a:prstGeom prst="rect">
-            <a:avLst/>
-          </a:prstGeom>
-        </p:spPr>
-        <p:txBody>
-          <a:bodyPr anchor="t" rtlCol="false" tIns="0" lIns="0" bIns="0" rIns="0">
-            <a:spAutoFit/>
-          </a:bodyPr>
-          <a:lstStyle/>
-          <a:p>
-            <a:pPr algn="l">
-              <a:lnSpc>
-                <a:spcPts val="5184"/>
-              </a:lnSpc>
-            </a:pPr>
-            <a:r>
-              <a:rPr lang="en-US" sz="4800" b="true">
-                <a:solidFill>
-                  <a:srgbClr val="1B2A3F"/>
-                </a:solidFill>
-                <a:latin typeface="IBM Plex Sans Bold"/>
-                <a:ea typeface="IBM Plex Sans Bold"/>
-                <a:cs typeface="IBM Plex Sans Bold"/>
-                <a:sym typeface="IBM Plex Sans Bold"/>
-              </a:rPr>
-              <a:t>Kết quả kiểm thử</a:t>
-            </a:r>
-          </a:p>
-        </p:txBody>
-      </p:sp>
-      <p:sp>
-        <p:nvSpPr>
-          <p:cNvPr name="TextBox 7" id="7"/>
-          <p:cNvSpPr txBox="true"/>
-          <p:nvPr/>
-        </p:nvSpPr>
-        <p:spPr>
-          <a:xfrm rot="0">
-            <a:off x="1047750" y="3181350"/>
-            <a:ext cx="6572250" cy="2181225"/>
-          </a:xfrm>
-          <a:prstGeom prst="rect">
-            <a:avLst/>
-          </a:prstGeom>
-        </p:spPr>
-        <p:txBody>
-          <a:bodyPr anchor="t" rtlCol="false" tIns="0" lIns="0" bIns="0" rIns="0">
-            <a:spAutoFit/>
-          </a:bodyPr>
-          <a:lstStyle/>
-          <a:p>
-            <a:pPr algn="l">
-              <a:lnSpc>
-                <a:spcPts val="17850"/>
-              </a:lnSpc>
-            </a:pPr>
-            <a:r>
-              <a:rPr lang="en-US" sz="12750" b="true">
-                <a:solidFill>
-                  <a:srgbClr val="1B2A3F"/>
-                </a:solidFill>
-                <a:latin typeface="JetBrains Mono Bold"/>
-                <a:ea typeface="JetBrains Mono Bold"/>
-                <a:cs typeface="JetBrains Mono Bold"/>
-                <a:sym typeface="JetBrains Mono Bold"/>
-              </a:rPr>
-              <a:t>25/25</a:t>
-            </a:r>
-          </a:p>
-        </p:txBody>
-      </p:sp>
-      <p:sp>
-        <p:nvSpPr>
-          <p:cNvPr name="TextBox 8" id="8"/>
-          <p:cNvSpPr txBox="true"/>
-          <p:nvPr/>
-        </p:nvSpPr>
-        <p:spPr>
-          <a:xfrm rot="0">
-            <a:off x="1047750" y="5543550"/>
-            <a:ext cx="4953000" cy="1128713"/>
-          </a:xfrm>
-          <a:prstGeom prst="rect">
-            <a:avLst/>
-          </a:prstGeom>
-        </p:spPr>
-        <p:txBody>
-          <a:bodyPr anchor="t" rtlCol="false" tIns="0" lIns="0" bIns="0" rIns="0">
-            <a:spAutoFit/>
-          </a:bodyPr>
-          <a:lstStyle/>
-          <a:p>
-            <a:pPr algn="l" marL="0" indent="0" lvl="0">
-              <a:lnSpc>
-                <a:spcPts val="3037"/>
-              </a:lnSpc>
-              <a:spcBef>
-                <a:spcPct val="0"/>
-              </a:spcBef>
-            </a:pPr>
-            <a:r>
-              <a:rPr lang="en-US" sz="2250" strike="noStrike" u="none">
-                <a:solidFill>
-                  <a:srgbClr val="2E5C8A"/>
-                </a:solidFill>
-                <a:latin typeface="IBM Plex Sans"/>
-                <a:ea typeface="IBM Plex Sans"/>
-                <a:cs typeface="IBM Plex Sans"/>
-                <a:sym typeface="IBM Plex Sans"/>
-              </a:rPr>
-              <a:t>test case PASS</a:t>
-            </a:r>
-          </a:p>
-          <a:p>
-            <a:pPr algn="l" marL="0" indent="0" lvl="0">
-              <a:lnSpc>
-                <a:spcPts val="3037"/>
-              </a:lnSpc>
-              <a:spcBef>
-                <a:spcPct val="0"/>
-              </a:spcBef>
-            </a:pPr>
-            <a:r>
-              <a:rPr lang="en-US" sz="2250" strike="noStrike" u="none">
-                <a:solidFill>
-                  <a:srgbClr val="2E5C8A"/>
-                </a:solidFill>
-                <a:latin typeface="IBM Plex Sans"/>
-                <a:ea typeface="IBM Plex Sans"/>
-                <a:cs typeface="IBM Plex Sans"/>
-                <a:sym typeface="IBM Plex Sans"/>
-              </a:rPr>
-              <a:t>6 luồng bình thường</a:t>
-            </a:r>
-          </a:p>
-          <a:p>
-            <a:pPr algn="l" marL="0" indent="0" lvl="0">
-              <a:lnSpc>
-                <a:spcPts val="3037"/>
-              </a:lnSpc>
-              <a:spcBef>
-                <a:spcPct val="0"/>
-              </a:spcBef>
-            </a:pPr>
-            <a:r>
-              <a:rPr lang="en-US" sz="2250" strike="noStrike" u="none">
-                <a:solidFill>
-                  <a:srgbClr val="2E5C8A"/>
-                </a:solidFill>
-                <a:latin typeface="IBM Plex Sans"/>
-                <a:ea typeface="IBM Plex Sans"/>
-                <a:cs typeface="IBM Plex Sans"/>
-                <a:sym typeface="IBM Plex Sans"/>
-              </a:rPr>
-              <a:t>+ 19 test tấn công</a:t>
-            </a:r>
-          </a:p>
-        </p:txBody>
-      </p:sp>
-      <p:grpSp>
-        <p:nvGrpSpPr>
-          <p:cNvPr name="Group 9" id="9"/>
-          <p:cNvGrpSpPr/>
-          <p:nvPr/>
-        </p:nvGrpSpPr>
-        <p:grpSpPr>
-          <a:xfrm rot="0">
-            <a:off x="7620000" y="2190750"/>
-            <a:ext cx="9429750" cy="5905500"/>
-            <a:chOff x="0" y="0"/>
-            <a:chExt cx="12573000" cy="7874000"/>
-          </a:xfrm>
-        </p:grpSpPr>
-        <p:sp>
-          <p:nvSpPr>
-            <p:cNvPr name="Freeform 10" id="10"/>
-            <p:cNvSpPr/>
-            <p:nvPr/>
-          </p:nvSpPr>
-          <p:spPr>
-            <a:xfrm flipH="false" flipV="false" rot="0">
-              <a:off x="0" y="0"/>
-              <a:ext cx="12573000" cy="7874000"/>
-            </a:xfrm>
-            <a:custGeom>
-              <a:avLst/>
-              <a:gdLst/>
-              <a:ahLst/>
-              <a:cxnLst/>
-              <a:rect r="r" b="b" t="t" l="l"/>
-              <a:pathLst>
-                <a:path h="7874000" w="12573000">
-                  <a:moveTo>
-                    <a:pt x="0" y="0"/>
-                  </a:moveTo>
-                  <a:lnTo>
-                    <a:pt x="12573000" y="0"/>
-                  </a:lnTo>
-                  <a:lnTo>
-                    <a:pt x="12573000" y="7874000"/>
-                  </a:lnTo>
-                  <a:lnTo>
-                    <a:pt x="0" y="7874000"/>
-                  </a:lnTo>
-                  <a:close/>
-                </a:path>
-              </a:pathLst>
-            </a:custGeom>
-            <a:solidFill>
-              <a:srgbClr val="FFFFFF"/>
-            </a:solidFill>
-            <a:ln w="9525" cap="sq">
-              <a:solidFill>
-                <a:srgbClr val="D4DCE6"/>
-              </a:solidFill>
-              <a:prstDash val="lgDash"/>
-              <a:miter/>
-            </a:ln>
-          </p:spPr>
-        </p:sp>
-        <p:sp>
-          <p:nvSpPr>
-            <p:cNvPr name="TextBox 11" id="11"/>
-            <p:cNvSpPr txBox="true"/>
-            <p:nvPr/>
-          </p:nvSpPr>
-          <p:spPr>
-            <a:xfrm>
-              <a:off x="0" y="-38100"/>
-              <a:ext cx="12573000" cy="7912100"/>
-            </a:xfrm>
-            <a:prstGeom prst="rect">
-              <a:avLst/>
-            </a:prstGeom>
-          </p:spPr>
-          <p:txBody>
-            <a:bodyPr anchor="ctr" rtlCol="false" tIns="50800" lIns="50800" bIns="50800" rIns="50800"/>
-            <a:lstStyle/>
-            <a:p>
-              <a:pPr algn="l">
-                <a:lnSpc>
-                  <a:spcPts val="1679"/>
-                </a:lnSpc>
-              </a:pPr>
-            </a:p>
-          </p:txBody>
-        </p:sp>
-      </p:grpSp>
-      <p:sp>
-        <p:nvSpPr>
-          <p:cNvPr name="TextBox 12" id="12"/>
-          <p:cNvSpPr txBox="true"/>
-          <p:nvPr/>
-        </p:nvSpPr>
-        <p:spPr>
-          <a:xfrm rot="0">
-            <a:off x="8477250" y="8391525"/>
-            <a:ext cx="7620000" cy="567690"/>
-          </a:xfrm>
-          <a:prstGeom prst="rect">
-            <a:avLst/>
-          </a:prstGeom>
-        </p:spPr>
-        <p:txBody>
-          <a:bodyPr anchor="t" rtlCol="false" tIns="0" lIns="0" bIns="0" rIns="0">
-            <a:spAutoFit/>
-          </a:bodyPr>
-          <a:lstStyle/>
-          <a:p>
-            <a:pPr algn="ctr" marL="0" indent="0" lvl="0">
-              <a:lnSpc>
-                <a:spcPts val="2310"/>
-              </a:lnSpc>
-              <a:spcBef>
-                <a:spcPct val="0"/>
-              </a:spcBef>
-            </a:pPr>
-            <a:r>
-              <a:rPr lang="en-US" sz="1650" strike="noStrike" u="none">
-                <a:solidFill>
-                  <a:srgbClr val="8A98AA"/>
-                </a:solidFill>
-                <a:latin typeface="JetBrains Mono"/>
-                <a:ea typeface="JetBrains Mono"/>
-                <a:cs typeface="JetBrains Mono"/>
-                <a:sym typeface="JetBrains Mono"/>
-              </a:rPr>
-              <a:t>Trích kết quả thực tế — docs/evidence/07-run-tests-output.txt</a:t>
-            </a:r>
-          </a:p>
-        </p:txBody>
-      </p:sp>
-      <p:sp>
-        <p:nvSpPr>
-          <p:cNvPr name="TextBox 13" id="13"/>
-          <p:cNvSpPr txBox="true"/>
-          <p:nvPr/>
-        </p:nvSpPr>
-        <p:spPr>
-          <a:xfrm rot="0">
-            <a:off x="7953375" y="2466975"/>
-            <a:ext cx="8763000" cy="4003358"/>
-          </a:xfrm>
-          <a:prstGeom prst="rect">
-            <a:avLst/>
-          </a:prstGeom>
-        </p:spPr>
-        <p:txBody>
-          <a:bodyPr anchor="t" rtlCol="false" tIns="0" lIns="0" bIns="0" rIns="0">
-            <a:spAutoFit/>
-          </a:bodyPr>
-          <a:lstStyle/>
-          <a:p>
-            <a:pPr algn="l">
-              <a:lnSpc>
-                <a:spcPts val="2137"/>
-              </a:lnSpc>
-            </a:pPr>
-            <a:r>
-              <a:rPr lang="en-US" sz="1425">
-                <a:solidFill>
-                  <a:srgbClr val="3C4A5C"/>
-                </a:solidFill>
-                <a:latin typeface="Arimo"/>
-                <a:ea typeface="Arimo"/>
-                <a:cs typeface="Arimo"/>
-                <a:sym typeface="Arimo"/>
-              </a:rPr>
-              <a:t>$ node tests/run-tests.mjs</a:t>
-            </a:r>
-          </a:p>
-          <a:p>
-            <a:pPr algn="l">
-              <a:lnSpc>
-                <a:spcPts val="2137"/>
-              </a:lnSpc>
-            </a:pPr>
-          </a:p>
-          <a:p>
-            <a:pPr algn="l">
-              <a:lnSpc>
-                <a:spcPts val="2137"/>
-              </a:lnSpc>
-            </a:pPr>
-            <a:r>
-              <a:rPr lang="en-US" sz="1425">
-                <a:solidFill>
-                  <a:srgbClr val="3C4A5C"/>
-                </a:solidFill>
-                <a:latin typeface="Arimo"/>
-                <a:ea typeface="Arimo"/>
-                <a:cs typeface="Arimo"/>
-                <a:sym typeface="Arimo"/>
-              </a:rPr>
-              <a:t> TC01   PASS   bat buoc MFA lan dau</a:t>
-            </a:r>
-          </a:p>
-          <a:p>
-            <a:pPr algn="l">
-              <a:lnSpc>
-                <a:spcPts val="2137"/>
-              </a:lnSpc>
-            </a:pPr>
-            <a:r>
-              <a:rPr lang="en-US" sz="1425">
-                <a:solidFill>
-                  <a:srgbClr val="3C4A5C"/>
-                </a:solidFill>
-                <a:latin typeface="Arimo"/>
-                <a:ea typeface="Arimo"/>
-                <a:cs typeface="Arimo"/>
-                <a:sym typeface="Arimo"/>
-              </a:rPr>
-              <a:t> TC11   PASS   sua payload JWT</a:t>
-            </a:r>
-          </a:p>
-          <a:p>
-            <a:pPr algn="l">
-              <a:lnSpc>
-                <a:spcPts val="2137"/>
-              </a:lnSpc>
-            </a:pPr>
-            <a:r>
-              <a:rPr lang="en-US" sz="1425">
-                <a:solidFill>
-                  <a:srgbClr val="3C4A5C"/>
-                </a:solidFill>
-                <a:latin typeface="Arimo"/>
-                <a:ea typeface="Arimo"/>
-                <a:cs typeface="Arimo"/>
-                <a:sym typeface="Arimo"/>
-              </a:rPr>
-              <a:t> TC12   PASS   JWT alg=none</a:t>
-            </a:r>
-          </a:p>
-          <a:p>
-            <a:pPr algn="l">
-              <a:lnSpc>
-                <a:spcPts val="2137"/>
-              </a:lnSpc>
-            </a:pPr>
-            <a:r>
-              <a:rPr lang="en-US" sz="1425">
-                <a:solidFill>
-                  <a:srgbClr val="3C4A5C"/>
-                </a:solidFill>
-                <a:latin typeface="Arimo"/>
-                <a:ea typeface="Arimo"/>
-                <a:cs typeface="Arimo"/>
-                <a:sym typeface="Arimo"/>
-              </a:rPr>
-              <a:t> TC05   PASS   chuoi hash 268 dong, khong vi pham</a:t>
-            </a:r>
-          </a:p>
-          <a:p>
-            <a:pPr algn="l">
-              <a:lnSpc>
-                <a:spcPts val="2137"/>
-              </a:lnSpc>
-            </a:pPr>
-            <a:r>
-              <a:rPr lang="en-US" sz="1425">
-                <a:solidFill>
-                  <a:srgbClr val="3C4A5C"/>
-                </a:solidFill>
-                <a:latin typeface="Arimo"/>
-                <a:ea typeface="Arimo"/>
-                <a:cs typeface="Arimo"/>
-                <a:sym typeface="Arimo"/>
-              </a:rPr>
-              <a:t> TC22   PASS   sua diem thang trong DB -&gt; phat hien lech</a:t>
-            </a:r>
-          </a:p>
-          <a:p>
-            <a:pPr algn="l">
-              <a:lnSpc>
-                <a:spcPts val="2137"/>
-              </a:lnSpc>
-            </a:pPr>
-            <a:r>
-              <a:rPr lang="en-US" sz="1425">
-                <a:solidFill>
-                  <a:srgbClr val="3C4A5C"/>
-                </a:solidFill>
-                <a:latin typeface="Arimo"/>
-                <a:ea typeface="Arimo"/>
-                <a:cs typeface="Arimo"/>
-                <a:sym typeface="Arimo"/>
-              </a:rPr>
-              <a:t> TC24   PASS   sua audit id 3 -&gt; dut chuoi hash</a:t>
-            </a:r>
-          </a:p>
-          <a:p>
-            <a:pPr algn="l">
-              <a:lnSpc>
-                <a:spcPts val="2137"/>
-              </a:lnSpc>
-            </a:pPr>
-            <a:r>
-              <a:rPr lang="en-US" sz="1425">
-                <a:solidFill>
-                  <a:srgbClr val="3C4A5C"/>
-                </a:solidFill>
-                <a:latin typeface="Arimo"/>
-                <a:ea typeface="Arimo"/>
-                <a:cs typeface="Arimo"/>
-                <a:sym typeface="Arimo"/>
-              </a:rPr>
-              <a:t> TC23   PASS   app_user bi tu choi 4 lenh pha hoai</a:t>
-            </a:r>
-          </a:p>
-          <a:p>
-            <a:pPr algn="l">
-              <a:lnSpc>
-                <a:spcPts val="2137"/>
-              </a:lnSpc>
-            </a:pPr>
-            <a:r>
-              <a:rPr lang="en-US" sz="1425">
-                <a:solidFill>
-                  <a:srgbClr val="3C4A5C"/>
-                </a:solidFill>
-                <a:latin typeface="Arimo"/>
-                <a:ea typeface="Arimo"/>
-                <a:cs typeface="Arimo"/>
-                <a:sym typeface="Arimo"/>
-              </a:rPr>
-              <a:t> TC19   PASS   SQLi qua WAF -&gt; 403</a:t>
-            </a:r>
-          </a:p>
-          <a:p>
-            <a:pPr algn="l">
-              <a:lnSpc>
-                <a:spcPts val="2137"/>
-              </a:lnSpc>
-            </a:pPr>
-            <a:r>
-              <a:rPr lang="en-US" sz="1425">
-                <a:solidFill>
-                  <a:srgbClr val="3C4A5C"/>
-                </a:solidFill>
-                <a:latin typeface="Arimo"/>
-                <a:ea typeface="Arimo"/>
-                <a:cs typeface="Arimo"/>
-                <a:sym typeface="Arimo"/>
-              </a:rPr>
-              <a:t> TC21   PASS   chi waf anh xa port ra host</a:t>
-            </a:r>
-          </a:p>
-          <a:p>
-            <a:pPr algn="l">
-              <a:lnSpc>
-                <a:spcPts val="2137"/>
-              </a:lnSpc>
-            </a:pPr>
-            <a:r>
-              <a:rPr lang="en-US" sz="1425">
-                <a:solidFill>
-                  <a:srgbClr val="3C4A5C"/>
-                </a:solidFill>
-                <a:latin typeface="Arimo"/>
-                <a:ea typeface="Arimo"/>
-                <a:cs typeface="Arimo"/>
-                <a:sym typeface="Arimo"/>
-              </a:rPr>
-              <a:t> TC09   PASS   3 lan OTP sai -&gt; khoa, canh bao HIGH</a:t>
-            </a:r>
-          </a:p>
-          <a:p>
-            <a:pPr algn="l">
-              <a:lnSpc>
-                <a:spcPts val="2137"/>
-              </a:lnSpc>
-            </a:pPr>
-            <a:r>
-              <a:rPr lang="en-US" sz="1425">
-                <a:solidFill>
-                  <a:srgbClr val="3C4A5C"/>
-                </a:solidFill>
-                <a:latin typeface="Arimo"/>
-                <a:ea typeface="Arimo"/>
-                <a:cs typeface="Arimo"/>
-                <a:sym typeface="Arimo"/>
-              </a:rPr>
-              <a:t> ...</a:t>
-            </a:r>
-          </a:p>
-          <a:p>
-            <a:pPr algn="l">
-              <a:lnSpc>
-                <a:spcPts val="2137"/>
-              </a:lnSpc>
-            </a:pPr>
-          </a:p>
-          <a:p>
-            <a:pPr algn="l">
-              <a:lnSpc>
-                <a:spcPts val="2137"/>
-              </a:lnSpc>
-            </a:pPr>
-            <a:r>
-              <a:rPr lang="en-US" sz="1425">
-                <a:solidFill>
-                  <a:srgbClr val="3C4A5C"/>
-                </a:solidFill>
-                <a:latin typeface="Arimo"/>
-                <a:ea typeface="Arimo"/>
-                <a:cs typeface="Arimo"/>
-                <a:sym typeface="Arimo"/>
-              </a:rPr>
-              <a:t>25/25 PASS</a:t>
             </a:r>
           </a:p>
         </p:txBody>

--- a/docs/SLIDE.pptx
+++ b/docs/SLIDE.pptx
@@ -10949,7 +10949,7 @@
                 <a:cs typeface="Arimo"/>
                 <a:sym typeface="Arimo"/>
               </a:rPr>
-              <a:t>Không tin mặc định — 12 lớp kiểm chứng</a:t>
+              <a:t>Không tin cậy mặc định — 12 lớp kiểm chứng</a:t>
             </a:r>
           </a:p>
         </p:txBody>
@@ -13427,7 +13427,7 @@
                 <a:cs typeface="IBM Plex Sans Bold"/>
                 <a:sym typeface="IBM Plex Sans Bold"/>
               </a:rPr>
-              <a:t>Không tin mặc định</a:t>
+              <a:t>Không tin cậy mặc định</a:t>
             </a:r>
           </a:p>
         </p:txBody>
